--- a/docs/LLM_Infra_Acceleration_Report.pptx
+++ b/docs/LLM_Infra_Acceleration_Report.pptx
@@ -4,21 +4,21 @@
   <p:sldMasterIdLst>
     <p:sldMasterId id="2147483648" r:id="rId1"/>
   </p:sldMasterIdLst>
+  <p:notesMasterIdLst>
+    <p:notesMasterId r:id="rId11"/>
+  </p:notesMasterIdLst>
   <p:sldIdLst>
-    <p:sldId id="256" r:id="rId7"/>
-    <p:sldId id="257" r:id="rId8"/>
-    <p:sldId id="258" r:id="rId9"/>
-    <p:sldId id="259" r:id="rId10"/>
-    <p:sldId id="260" r:id="rId11"/>
-    <p:sldId id="261" r:id="rId12"/>
-    <p:sldId id="262" r:id="rId13"/>
-    <p:sldId id="263" r:id="rId14"/>
-    <p:sldId id="264" r:id="rId15"/>
-    <p:sldId id="265" r:id="rId16"/>
-    <p:sldId id="266" r:id="rId17"/>
-    <p:sldId id="267" r:id="rId18"/>
+    <p:sldId id="256" r:id="rId2"/>
+    <p:sldId id="270" r:id="rId3"/>
+    <p:sldId id="257" r:id="rId4"/>
+    <p:sldId id="269" r:id="rId5"/>
+    <p:sldId id="259" r:id="rId6"/>
+    <p:sldId id="260" r:id="rId7"/>
+    <p:sldId id="263" r:id="rId8"/>
+    <p:sldId id="266" r:id="rId9"/>
+    <p:sldId id="267" r:id="rId10"/>
   </p:sldIdLst>
-  <p:sldSz cx="12191695" cy="6858000" type="screen4x3"/>
+  <p:sldSz cx="12192000" cy="6858000"/>
   <p:notesSz cx="6858000" cy="9144000"/>
   <p:defaultTextStyle>
     <a:defPPr>
@@ -115,7 +115,372 @@
       </a:defRPr>
     </a:lvl9pPr>
   </p:defaultTextStyle>
+  <p:extLst>
+    <p:ext uri="{EFAFB233-063F-42B5-8137-9DF3F51BA10A}">
+      <p15:sldGuideLst xmlns:p15="http://schemas.microsoft.com/office/powerpoint/2012/main">
+        <p15:guide id="1" orient="horz" pos="2160">
+          <p15:clr>
+            <a:srgbClr val="A4A3A4"/>
+          </p15:clr>
+        </p15:guide>
+        <p15:guide id="2" pos="2880">
+          <p15:clr>
+            <a:srgbClr val="A4A3A4"/>
+          </p15:clr>
+        </p15:guide>
+      </p15:sldGuideLst>
+    </p:ext>
+  </p:extLst>
 </p:presentation>
+</file>
+
+<file path=ppt/notesMasters/notesMaster1.xml><?xml version="1.0" encoding="utf-8"?>
+<p:notesMaster xmlns:a="http://schemas.openxmlformats.org/drawingml/2006/main" xmlns:r="http://schemas.openxmlformats.org/officeDocument/2006/relationships" xmlns:p="http://schemas.openxmlformats.org/presentationml/2006/main">
+  <p:cSld>
+    <p:bg>
+      <p:bgRef idx="1001">
+        <a:schemeClr val="bg1"/>
+      </p:bgRef>
+    </p:bg>
+    <p:spTree>
+      <p:nvGrpSpPr>
+        <p:cNvPr id="1" name=""/>
+        <p:cNvGrpSpPr/>
+        <p:nvPr/>
+      </p:nvGrpSpPr>
+      <p:grpSpPr>
+        <a:xfrm>
+          <a:off x="0" y="0"/>
+          <a:ext cx="0" cy="0"/>
+          <a:chOff x="0" y="0"/>
+          <a:chExt cx="0" cy="0"/>
+        </a:xfrm>
+      </p:grpSpPr>
+      <p:sp>
+        <p:nvSpPr>
+          <p:cNvPr id="2" name="Header Placeholder 1"/>
+          <p:cNvSpPr>
+            <a:spLocks noGrp="1"/>
+          </p:cNvSpPr>
+          <p:nvPr>
+            <p:ph type="hdr" sz="quarter"/>
+          </p:nvPr>
+        </p:nvSpPr>
+        <p:spPr>
+          <a:xfrm>
+            <a:off x="0" y="0"/>
+            <a:ext cx="2971800" cy="458788"/>
+          </a:xfrm>
+          <a:prstGeom prst="rect">
+            <a:avLst/>
+          </a:prstGeom>
+        </p:spPr>
+        <p:txBody>
+          <a:bodyPr vert="horz" lIns="91440" tIns="45720" rIns="91440" bIns="45720" rtlCol="0"/>
+          <a:lstStyle>
+            <a:lvl1pPr algn="l">
+              <a:defRPr sz="1200"/>
+            </a:lvl1pPr>
+          </a:lstStyle>
+          <a:p>
+            <a:endParaRPr lang="en-US"/>
+          </a:p>
+        </p:txBody>
+      </p:sp>
+      <p:sp>
+        <p:nvSpPr>
+          <p:cNvPr id="3" name="Date Placeholder 2"/>
+          <p:cNvSpPr>
+            <a:spLocks noGrp="1"/>
+          </p:cNvSpPr>
+          <p:nvPr>
+            <p:ph type="dt" idx="1"/>
+          </p:nvPr>
+        </p:nvSpPr>
+        <p:spPr>
+          <a:xfrm>
+            <a:off x="3884613" y="0"/>
+            <a:ext cx="2971800" cy="458788"/>
+          </a:xfrm>
+          <a:prstGeom prst="rect">
+            <a:avLst/>
+          </a:prstGeom>
+        </p:spPr>
+        <p:txBody>
+          <a:bodyPr vert="horz" lIns="91440" tIns="45720" rIns="91440" bIns="45720" rtlCol="0"/>
+          <a:lstStyle>
+            <a:lvl1pPr algn="r">
+              <a:defRPr sz="1200"/>
+            </a:lvl1pPr>
+          </a:lstStyle>
+          <a:p>
+            <a:fld id="{4AE8B6F6-3888-475F-8C40-20D711C1D9C5}" type="datetimeFigureOut">
+              <a:rPr lang="en-US" smtClean="0"/>
+              <a:t>5/5/2026</a:t>
+            </a:fld>
+            <a:endParaRPr lang="en-US"/>
+          </a:p>
+        </p:txBody>
+      </p:sp>
+      <p:sp>
+        <p:nvSpPr>
+          <p:cNvPr id="4" name="Slide Image Placeholder 3"/>
+          <p:cNvSpPr>
+            <a:spLocks noGrp="1" noRot="1" noChangeAspect="1"/>
+          </p:cNvSpPr>
+          <p:nvPr>
+            <p:ph type="sldImg" idx="2"/>
+          </p:nvPr>
+        </p:nvSpPr>
+        <p:spPr>
+          <a:xfrm>
+            <a:off x="685800" y="1143000"/>
+            <a:ext cx="5486400" cy="3086100"/>
+          </a:xfrm>
+          <a:prstGeom prst="rect">
+            <a:avLst/>
+          </a:prstGeom>
+          <a:noFill/>
+          <a:ln w="12700">
+            <a:solidFill>
+              <a:prstClr val="black"/>
+            </a:solidFill>
+          </a:ln>
+        </p:spPr>
+        <p:txBody>
+          <a:bodyPr vert="horz" lIns="91440" tIns="45720" rIns="91440" bIns="45720" rtlCol="0" anchor="ctr"/>
+          <a:lstStyle/>
+          <a:p>
+            <a:endParaRPr lang="en-US"/>
+          </a:p>
+        </p:txBody>
+      </p:sp>
+      <p:sp>
+        <p:nvSpPr>
+          <p:cNvPr id="5" name="Notes Placeholder 4"/>
+          <p:cNvSpPr>
+            <a:spLocks noGrp="1"/>
+          </p:cNvSpPr>
+          <p:nvPr>
+            <p:ph type="body" sz="quarter" idx="3"/>
+          </p:nvPr>
+        </p:nvSpPr>
+        <p:spPr>
+          <a:xfrm>
+            <a:off x="685800" y="4400550"/>
+            <a:ext cx="5486400" cy="3600450"/>
+          </a:xfrm>
+          <a:prstGeom prst="rect">
+            <a:avLst/>
+          </a:prstGeom>
+        </p:spPr>
+        <p:txBody>
+          <a:bodyPr vert="horz" lIns="91440" tIns="45720" rIns="91440" bIns="45720" rtlCol="0"/>
+          <a:lstStyle/>
+          <a:p>
+            <a:pPr lvl="0"/>
+            <a:r>
+              <a:rPr lang="en-US"/>
+              <a:t>Click to edit Master text styles</a:t>
+            </a:r>
+          </a:p>
+          <a:p>
+            <a:pPr lvl="1"/>
+            <a:r>
+              <a:rPr lang="en-US"/>
+              <a:t>Second level</a:t>
+            </a:r>
+          </a:p>
+          <a:p>
+            <a:pPr lvl="2"/>
+            <a:r>
+              <a:rPr lang="en-US"/>
+              <a:t>Third level</a:t>
+            </a:r>
+          </a:p>
+          <a:p>
+            <a:pPr lvl="3"/>
+            <a:r>
+              <a:rPr lang="en-US"/>
+              <a:t>Fourth level</a:t>
+            </a:r>
+          </a:p>
+          <a:p>
+            <a:pPr lvl="4"/>
+            <a:r>
+              <a:rPr lang="en-US"/>
+              <a:t>Fifth level</a:t>
+            </a:r>
+          </a:p>
+        </p:txBody>
+      </p:sp>
+      <p:sp>
+        <p:nvSpPr>
+          <p:cNvPr id="6" name="Footer Placeholder 5"/>
+          <p:cNvSpPr>
+            <a:spLocks noGrp="1"/>
+          </p:cNvSpPr>
+          <p:nvPr>
+            <p:ph type="ftr" sz="quarter" idx="4"/>
+          </p:nvPr>
+        </p:nvSpPr>
+        <p:spPr>
+          <a:xfrm>
+            <a:off x="0" y="8685213"/>
+            <a:ext cx="2971800" cy="458787"/>
+          </a:xfrm>
+          <a:prstGeom prst="rect">
+            <a:avLst/>
+          </a:prstGeom>
+        </p:spPr>
+        <p:txBody>
+          <a:bodyPr vert="horz" lIns="91440" tIns="45720" rIns="91440" bIns="45720" rtlCol="0" anchor="b"/>
+          <a:lstStyle>
+            <a:lvl1pPr algn="l">
+              <a:defRPr sz="1200"/>
+            </a:lvl1pPr>
+          </a:lstStyle>
+          <a:p>
+            <a:endParaRPr lang="en-US"/>
+          </a:p>
+        </p:txBody>
+      </p:sp>
+      <p:sp>
+        <p:nvSpPr>
+          <p:cNvPr id="7" name="Slide Number Placeholder 6"/>
+          <p:cNvSpPr>
+            <a:spLocks noGrp="1"/>
+          </p:cNvSpPr>
+          <p:nvPr>
+            <p:ph type="sldNum" sz="quarter" idx="5"/>
+          </p:nvPr>
+        </p:nvSpPr>
+        <p:spPr>
+          <a:xfrm>
+            <a:off x="3884613" y="8685213"/>
+            <a:ext cx="2971800" cy="458787"/>
+          </a:xfrm>
+          <a:prstGeom prst="rect">
+            <a:avLst/>
+          </a:prstGeom>
+        </p:spPr>
+        <p:txBody>
+          <a:bodyPr vert="horz" lIns="91440" tIns="45720" rIns="91440" bIns="45720" rtlCol="0" anchor="b"/>
+          <a:lstStyle>
+            <a:lvl1pPr algn="r">
+              <a:defRPr sz="1200"/>
+            </a:lvl1pPr>
+          </a:lstStyle>
+          <a:p>
+            <a:fld id="{2743BBCA-1C12-42F1-8171-35253489D0B3}" type="slidenum">
+              <a:rPr lang="en-US" smtClean="0"/>
+              <a:t>‹#›</a:t>
+            </a:fld>
+            <a:endParaRPr lang="en-US"/>
+          </a:p>
+        </p:txBody>
+      </p:sp>
+    </p:spTree>
+    <p:extLst>
+      <p:ext uri="{BB962C8B-B14F-4D97-AF65-F5344CB8AC3E}">
+        <p14:creationId xmlns:p14="http://schemas.microsoft.com/office/powerpoint/2010/main" val="1985979566"/>
+      </p:ext>
+    </p:extLst>
+  </p:cSld>
+  <p:clrMap bg1="lt1" tx1="dk1" bg2="lt2" tx2="dk2" accent1="accent1" accent2="accent2" accent3="accent3" accent4="accent4" accent5="accent5" accent6="accent6" hlink="hlink" folHlink="folHlink"/>
+  <p:notesStyle>
+    <a:lvl1pPr marL="0" algn="l" defTabSz="914400" rtl="0" eaLnBrk="1" latinLnBrk="0" hangingPunct="1">
+      <a:defRPr sz="1200" kern="1200">
+        <a:solidFill>
+          <a:schemeClr val="tx1"/>
+        </a:solidFill>
+        <a:latin typeface="+mn-lt"/>
+        <a:ea typeface="+mn-ea"/>
+        <a:cs typeface="+mn-cs"/>
+      </a:defRPr>
+    </a:lvl1pPr>
+    <a:lvl2pPr marL="457200" algn="l" defTabSz="914400" rtl="0" eaLnBrk="1" latinLnBrk="0" hangingPunct="1">
+      <a:defRPr sz="1200" kern="1200">
+        <a:solidFill>
+          <a:schemeClr val="tx1"/>
+        </a:solidFill>
+        <a:latin typeface="+mn-lt"/>
+        <a:ea typeface="+mn-ea"/>
+        <a:cs typeface="+mn-cs"/>
+      </a:defRPr>
+    </a:lvl2pPr>
+    <a:lvl3pPr marL="914400" algn="l" defTabSz="914400" rtl="0" eaLnBrk="1" latinLnBrk="0" hangingPunct="1">
+      <a:defRPr sz="1200" kern="1200">
+        <a:solidFill>
+          <a:schemeClr val="tx1"/>
+        </a:solidFill>
+        <a:latin typeface="+mn-lt"/>
+        <a:ea typeface="+mn-ea"/>
+        <a:cs typeface="+mn-cs"/>
+      </a:defRPr>
+    </a:lvl3pPr>
+    <a:lvl4pPr marL="1371600" algn="l" defTabSz="914400" rtl="0" eaLnBrk="1" latinLnBrk="0" hangingPunct="1">
+      <a:defRPr sz="1200" kern="1200">
+        <a:solidFill>
+          <a:schemeClr val="tx1"/>
+        </a:solidFill>
+        <a:latin typeface="+mn-lt"/>
+        <a:ea typeface="+mn-ea"/>
+        <a:cs typeface="+mn-cs"/>
+      </a:defRPr>
+    </a:lvl4pPr>
+    <a:lvl5pPr marL="1828800" algn="l" defTabSz="914400" rtl="0" eaLnBrk="1" latinLnBrk="0" hangingPunct="1">
+      <a:defRPr sz="1200" kern="1200">
+        <a:solidFill>
+          <a:schemeClr val="tx1"/>
+        </a:solidFill>
+        <a:latin typeface="+mn-lt"/>
+        <a:ea typeface="+mn-ea"/>
+        <a:cs typeface="+mn-cs"/>
+      </a:defRPr>
+    </a:lvl5pPr>
+    <a:lvl6pPr marL="2286000" algn="l" defTabSz="914400" rtl="0" eaLnBrk="1" latinLnBrk="0" hangingPunct="1">
+      <a:defRPr sz="1200" kern="1200">
+        <a:solidFill>
+          <a:schemeClr val="tx1"/>
+        </a:solidFill>
+        <a:latin typeface="+mn-lt"/>
+        <a:ea typeface="+mn-ea"/>
+        <a:cs typeface="+mn-cs"/>
+      </a:defRPr>
+    </a:lvl6pPr>
+    <a:lvl7pPr marL="2743200" algn="l" defTabSz="914400" rtl="0" eaLnBrk="1" latinLnBrk="0" hangingPunct="1">
+      <a:defRPr sz="1200" kern="1200">
+        <a:solidFill>
+          <a:schemeClr val="tx1"/>
+        </a:solidFill>
+        <a:latin typeface="+mn-lt"/>
+        <a:ea typeface="+mn-ea"/>
+        <a:cs typeface="+mn-cs"/>
+      </a:defRPr>
+    </a:lvl7pPr>
+    <a:lvl8pPr marL="3200400" algn="l" defTabSz="914400" rtl="0" eaLnBrk="1" latinLnBrk="0" hangingPunct="1">
+      <a:defRPr sz="1200" kern="1200">
+        <a:solidFill>
+          <a:schemeClr val="tx1"/>
+        </a:solidFill>
+        <a:latin typeface="+mn-lt"/>
+        <a:ea typeface="+mn-ea"/>
+        <a:cs typeface="+mn-cs"/>
+      </a:defRPr>
+    </a:lvl8pPr>
+    <a:lvl9pPr marL="3657600" algn="l" defTabSz="914400" rtl="0" eaLnBrk="1" latinLnBrk="0" hangingPunct="1">
+      <a:defRPr sz="1200" kern="1200">
+        <a:solidFill>
+          <a:schemeClr val="tx1"/>
+        </a:solidFill>
+        <a:latin typeface="+mn-lt"/>
+        <a:ea typeface="+mn-ea"/>
+        <a:cs typeface="+mn-cs"/>
+      </a:defRPr>
+    </a:lvl9pPr>
+  </p:notesStyle>
+</p:notesMaster>
 </file>
 
 <file path=ppt/slideLayouts/slideLayout1.xml><?xml version="1.0" encoding="utf-8"?>
@@ -156,10 +521,9 @@
           <a:lstStyle/>
           <a:p>
             <a:r>
-              <a:rPr lang="en-US" smtClean="0"/>
+              <a:rPr lang="en-US"/>
               <a:t>Click to edit Master title style</a:t>
             </a:r>
-            <a:endParaRPr lang="en-US"/>
           </a:p>
         </p:txBody>
       </p:sp>
@@ -275,10 +639,9 @@
           </a:lstStyle>
           <a:p>
             <a:r>
-              <a:rPr lang="en-US" smtClean="0"/>
+              <a:rPr lang="en-US"/>
               <a:t>Click to edit Master subtitle style</a:t>
             </a:r>
-            <a:endParaRPr lang="en-US"/>
           </a:p>
         </p:txBody>
       </p:sp>
@@ -299,7 +662,7 @@
           <a:p>
             <a:fld id="{5BCAD085-E8A6-8845-BD4E-CB4CCA059FC4}" type="datetimeFigureOut">
               <a:rPr lang="en-US" smtClean="0"/>
-              <a:t>1/27/13</a:t>
+              <a:t>5/5/2026</a:t>
             </a:fld>
             <a:endParaRPr lang="en-US"/>
           </a:p>
@@ -393,10 +756,9 @@
           <a:lstStyle/>
           <a:p>
             <a:r>
-              <a:rPr lang="en-US" smtClean="0"/>
+              <a:rPr lang="en-US"/>
               <a:t>Click to edit Master title style</a:t>
             </a:r>
-            <a:endParaRPr lang="en-US"/>
           </a:p>
         </p:txBody>
       </p:sp>
@@ -417,38 +779,37 @@
           <a:p>
             <a:pPr lvl="0"/>
             <a:r>
-              <a:rPr lang="en-US" smtClean="0"/>
+              <a:rPr lang="en-US"/>
               <a:t>Click to edit Master text styles</a:t>
             </a:r>
           </a:p>
           <a:p>
             <a:pPr lvl="1"/>
             <a:r>
-              <a:rPr lang="en-US" smtClean="0"/>
+              <a:rPr lang="en-US"/>
               <a:t>Second level</a:t>
             </a:r>
           </a:p>
           <a:p>
             <a:pPr lvl="2"/>
             <a:r>
-              <a:rPr lang="en-US" smtClean="0"/>
+              <a:rPr lang="en-US"/>
               <a:t>Third level</a:t>
             </a:r>
           </a:p>
           <a:p>
             <a:pPr lvl="3"/>
             <a:r>
-              <a:rPr lang="en-US" smtClean="0"/>
+              <a:rPr lang="en-US"/>
               <a:t>Fourth level</a:t>
             </a:r>
           </a:p>
           <a:p>
             <a:pPr lvl="4"/>
             <a:r>
-              <a:rPr lang="en-US" smtClean="0"/>
+              <a:rPr lang="en-US"/>
               <a:t>Fifth level</a:t>
             </a:r>
-            <a:endParaRPr lang="en-US"/>
           </a:p>
         </p:txBody>
       </p:sp>
@@ -469,7 +830,7 @@
           <a:p>
             <a:fld id="{5BCAD085-E8A6-8845-BD4E-CB4CCA059FC4}" type="datetimeFigureOut">
               <a:rPr lang="en-US" smtClean="0"/>
-              <a:t>1/27/13</a:t>
+              <a:t>5/5/2026</a:t>
             </a:fld>
             <a:endParaRPr lang="en-US"/>
           </a:p>
@@ -568,10 +929,9 @@
           <a:lstStyle/>
           <a:p>
             <a:r>
-              <a:rPr lang="en-US" smtClean="0"/>
+              <a:rPr lang="en-US"/>
               <a:t>Click to edit Master title style</a:t>
             </a:r>
-            <a:endParaRPr lang="en-US"/>
           </a:p>
         </p:txBody>
       </p:sp>
@@ -597,38 +957,37 @@
           <a:p>
             <a:pPr lvl="0"/>
             <a:r>
-              <a:rPr lang="en-US" smtClean="0"/>
+              <a:rPr lang="en-US"/>
               <a:t>Click to edit Master text styles</a:t>
             </a:r>
           </a:p>
           <a:p>
             <a:pPr lvl="1"/>
             <a:r>
-              <a:rPr lang="en-US" smtClean="0"/>
+              <a:rPr lang="en-US"/>
               <a:t>Second level</a:t>
             </a:r>
           </a:p>
           <a:p>
             <a:pPr lvl="2"/>
             <a:r>
-              <a:rPr lang="en-US" smtClean="0"/>
+              <a:rPr lang="en-US"/>
               <a:t>Third level</a:t>
             </a:r>
           </a:p>
           <a:p>
             <a:pPr lvl="3"/>
             <a:r>
-              <a:rPr lang="en-US" smtClean="0"/>
+              <a:rPr lang="en-US"/>
               <a:t>Fourth level</a:t>
             </a:r>
           </a:p>
           <a:p>
             <a:pPr lvl="4"/>
             <a:r>
-              <a:rPr lang="en-US" smtClean="0"/>
+              <a:rPr lang="en-US"/>
               <a:t>Fifth level</a:t>
             </a:r>
-            <a:endParaRPr lang="en-US"/>
           </a:p>
         </p:txBody>
       </p:sp>
@@ -649,7 +1008,7 @@
           <a:p>
             <a:fld id="{5BCAD085-E8A6-8845-BD4E-CB4CCA059FC4}" type="datetimeFigureOut">
               <a:rPr lang="en-US" smtClean="0"/>
-              <a:t>1/27/13</a:t>
+              <a:t>5/5/2026</a:t>
             </a:fld>
             <a:endParaRPr lang="en-US"/>
           </a:p>
@@ -743,10 +1102,9 @@
           <a:lstStyle/>
           <a:p>
             <a:r>
-              <a:rPr lang="en-US" smtClean="0"/>
+              <a:rPr lang="en-US"/>
               <a:t>Click to edit Master title style</a:t>
             </a:r>
-            <a:endParaRPr lang="en-US"/>
           </a:p>
         </p:txBody>
       </p:sp>
@@ -767,38 +1125,37 @@
           <a:p>
             <a:pPr lvl="0"/>
             <a:r>
-              <a:rPr lang="en-US" smtClean="0"/>
+              <a:rPr lang="en-US"/>
               <a:t>Click to edit Master text styles</a:t>
             </a:r>
           </a:p>
           <a:p>
             <a:pPr lvl="1"/>
             <a:r>
-              <a:rPr lang="en-US" smtClean="0"/>
+              <a:rPr lang="en-US"/>
               <a:t>Second level</a:t>
             </a:r>
           </a:p>
           <a:p>
             <a:pPr lvl="2"/>
             <a:r>
-              <a:rPr lang="en-US" smtClean="0"/>
+              <a:rPr lang="en-US"/>
               <a:t>Third level</a:t>
             </a:r>
           </a:p>
           <a:p>
             <a:pPr lvl="3"/>
             <a:r>
-              <a:rPr lang="en-US" smtClean="0"/>
+              <a:rPr lang="en-US"/>
               <a:t>Fourth level</a:t>
             </a:r>
           </a:p>
           <a:p>
             <a:pPr lvl="4"/>
             <a:r>
-              <a:rPr lang="en-US" smtClean="0"/>
+              <a:rPr lang="en-US"/>
               <a:t>Fifth level</a:t>
             </a:r>
-            <a:endParaRPr lang="en-US"/>
           </a:p>
         </p:txBody>
       </p:sp>
@@ -819,7 +1176,7 @@
           <a:p>
             <a:fld id="{5BCAD085-E8A6-8845-BD4E-CB4CCA059FC4}" type="datetimeFigureOut">
               <a:rPr lang="en-US" smtClean="0"/>
-              <a:t>1/27/13</a:t>
+              <a:t>5/5/2026</a:t>
             </a:fld>
             <a:endParaRPr lang="en-US"/>
           </a:p>
@@ -922,10 +1279,9 @@
           </a:lstStyle>
           <a:p>
             <a:r>
-              <a:rPr lang="en-US" smtClean="0"/>
+              <a:rPr lang="en-US"/>
               <a:t>Click to edit Master title style</a:t>
             </a:r>
-            <a:endParaRPr lang="en-US"/>
           </a:p>
         </p:txBody>
       </p:sp>
@@ -1042,7 +1398,7 @@
           <a:p>
             <a:pPr lvl="0"/>
             <a:r>
-              <a:rPr lang="en-US" smtClean="0"/>
+              <a:rPr lang="en-US"/>
               <a:t>Click to edit Master text styles</a:t>
             </a:r>
           </a:p>
@@ -1065,7 +1421,7 @@
           <a:p>
             <a:fld id="{5BCAD085-E8A6-8845-BD4E-CB4CCA059FC4}" type="datetimeFigureOut">
               <a:rPr lang="en-US" smtClean="0"/>
-              <a:t>1/27/13</a:t>
+              <a:t>5/5/2026</a:t>
             </a:fld>
             <a:endParaRPr lang="en-US"/>
           </a:p>
@@ -1159,10 +1515,9 @@
           <a:lstStyle/>
           <a:p>
             <a:r>
-              <a:rPr lang="en-US" smtClean="0"/>
+              <a:rPr lang="en-US"/>
               <a:t>Click to edit Master title style</a:t>
             </a:r>
-            <a:endParaRPr lang="en-US"/>
           </a:p>
         </p:txBody>
       </p:sp>
@@ -1216,38 +1571,37 @@
           <a:p>
             <a:pPr lvl="0"/>
             <a:r>
-              <a:rPr lang="en-US" smtClean="0"/>
+              <a:rPr lang="en-US"/>
               <a:t>Click to edit Master text styles</a:t>
             </a:r>
           </a:p>
           <a:p>
             <a:pPr lvl="1"/>
             <a:r>
-              <a:rPr lang="en-US" smtClean="0"/>
+              <a:rPr lang="en-US"/>
               <a:t>Second level</a:t>
             </a:r>
           </a:p>
           <a:p>
             <a:pPr lvl="2"/>
             <a:r>
-              <a:rPr lang="en-US" smtClean="0"/>
+              <a:rPr lang="en-US"/>
               <a:t>Third level</a:t>
             </a:r>
           </a:p>
           <a:p>
             <a:pPr lvl="3"/>
             <a:r>
-              <a:rPr lang="en-US" smtClean="0"/>
+              <a:rPr lang="en-US"/>
               <a:t>Fourth level</a:t>
             </a:r>
           </a:p>
           <a:p>
             <a:pPr lvl="4"/>
             <a:r>
-              <a:rPr lang="en-US" smtClean="0"/>
+              <a:rPr lang="en-US"/>
               <a:t>Fifth level</a:t>
             </a:r>
-            <a:endParaRPr lang="en-US"/>
           </a:p>
         </p:txBody>
       </p:sp>
@@ -1301,38 +1655,37 @@
           <a:p>
             <a:pPr lvl="0"/>
             <a:r>
-              <a:rPr lang="en-US" smtClean="0"/>
+              <a:rPr lang="en-US"/>
               <a:t>Click to edit Master text styles</a:t>
             </a:r>
           </a:p>
           <a:p>
             <a:pPr lvl="1"/>
             <a:r>
-              <a:rPr lang="en-US" smtClean="0"/>
+              <a:rPr lang="en-US"/>
               <a:t>Second level</a:t>
             </a:r>
           </a:p>
           <a:p>
             <a:pPr lvl="2"/>
             <a:r>
-              <a:rPr lang="en-US" smtClean="0"/>
+              <a:rPr lang="en-US"/>
               <a:t>Third level</a:t>
             </a:r>
           </a:p>
           <a:p>
             <a:pPr lvl="3"/>
             <a:r>
-              <a:rPr lang="en-US" smtClean="0"/>
+              <a:rPr lang="en-US"/>
               <a:t>Fourth level</a:t>
             </a:r>
           </a:p>
           <a:p>
             <a:pPr lvl="4"/>
             <a:r>
-              <a:rPr lang="en-US" smtClean="0"/>
+              <a:rPr lang="en-US"/>
               <a:t>Fifth level</a:t>
             </a:r>
-            <a:endParaRPr lang="en-US"/>
           </a:p>
         </p:txBody>
       </p:sp>
@@ -1353,7 +1706,7 @@
           <a:p>
             <a:fld id="{5BCAD085-E8A6-8845-BD4E-CB4CCA059FC4}" type="datetimeFigureOut">
               <a:rPr lang="en-US" smtClean="0"/>
-              <a:t>1/27/13</a:t>
+              <a:t>5/5/2026</a:t>
             </a:fld>
             <a:endParaRPr lang="en-US"/>
           </a:p>
@@ -1451,10 +1804,9 @@
           </a:lstStyle>
           <a:p>
             <a:r>
-              <a:rPr lang="en-US" smtClean="0"/>
+              <a:rPr lang="en-US"/>
               <a:t>Click to edit Master title style</a:t>
             </a:r>
-            <a:endParaRPr lang="en-US"/>
           </a:p>
         </p:txBody>
       </p:sp>
@@ -1517,7 +1869,7 @@
           <a:p>
             <a:pPr lvl="0"/>
             <a:r>
-              <a:rPr lang="en-US" smtClean="0"/>
+              <a:rPr lang="en-US"/>
               <a:t>Click to edit Master text styles</a:t>
             </a:r>
           </a:p>
@@ -1573,38 +1925,37 @@
           <a:p>
             <a:pPr lvl="0"/>
             <a:r>
-              <a:rPr lang="en-US" smtClean="0"/>
+              <a:rPr lang="en-US"/>
               <a:t>Click to edit Master text styles</a:t>
             </a:r>
           </a:p>
           <a:p>
             <a:pPr lvl="1"/>
             <a:r>
-              <a:rPr lang="en-US" smtClean="0"/>
+              <a:rPr lang="en-US"/>
               <a:t>Second level</a:t>
             </a:r>
           </a:p>
           <a:p>
             <a:pPr lvl="2"/>
             <a:r>
-              <a:rPr lang="en-US" smtClean="0"/>
+              <a:rPr lang="en-US"/>
               <a:t>Third level</a:t>
             </a:r>
           </a:p>
           <a:p>
             <a:pPr lvl="3"/>
             <a:r>
-              <a:rPr lang="en-US" smtClean="0"/>
+              <a:rPr lang="en-US"/>
               <a:t>Fourth level</a:t>
             </a:r>
           </a:p>
           <a:p>
             <a:pPr lvl="4"/>
             <a:r>
-              <a:rPr lang="en-US" smtClean="0"/>
+              <a:rPr lang="en-US"/>
               <a:t>Fifth level</a:t>
             </a:r>
-            <a:endParaRPr lang="en-US"/>
           </a:p>
         </p:txBody>
       </p:sp>
@@ -1667,7 +2018,7 @@
           <a:p>
             <a:pPr lvl="0"/>
             <a:r>
-              <a:rPr lang="en-US" smtClean="0"/>
+              <a:rPr lang="en-US"/>
               <a:t>Click to edit Master text styles</a:t>
             </a:r>
           </a:p>
@@ -1723,38 +2074,37 @@
           <a:p>
             <a:pPr lvl="0"/>
             <a:r>
-              <a:rPr lang="en-US" smtClean="0"/>
+              <a:rPr lang="en-US"/>
               <a:t>Click to edit Master text styles</a:t>
             </a:r>
           </a:p>
           <a:p>
             <a:pPr lvl="1"/>
             <a:r>
-              <a:rPr lang="en-US" smtClean="0"/>
+              <a:rPr lang="en-US"/>
               <a:t>Second level</a:t>
             </a:r>
           </a:p>
           <a:p>
             <a:pPr lvl="2"/>
             <a:r>
-              <a:rPr lang="en-US" smtClean="0"/>
+              <a:rPr lang="en-US"/>
               <a:t>Third level</a:t>
             </a:r>
           </a:p>
           <a:p>
             <a:pPr lvl="3"/>
             <a:r>
-              <a:rPr lang="en-US" smtClean="0"/>
+              <a:rPr lang="en-US"/>
               <a:t>Fourth level</a:t>
             </a:r>
           </a:p>
           <a:p>
             <a:pPr lvl="4"/>
             <a:r>
-              <a:rPr lang="en-US" smtClean="0"/>
+              <a:rPr lang="en-US"/>
               <a:t>Fifth level</a:t>
             </a:r>
-            <a:endParaRPr lang="en-US"/>
           </a:p>
         </p:txBody>
       </p:sp>
@@ -1775,7 +2125,7 @@
           <a:p>
             <a:fld id="{5BCAD085-E8A6-8845-BD4E-CB4CCA059FC4}" type="datetimeFigureOut">
               <a:rPr lang="en-US" smtClean="0"/>
-              <a:t>1/27/13</a:t>
+              <a:t>5/5/2026</a:t>
             </a:fld>
             <a:endParaRPr lang="en-US"/>
           </a:p>
@@ -1869,10 +2219,9 @@
           <a:lstStyle/>
           <a:p>
             <a:r>
-              <a:rPr lang="en-US" smtClean="0"/>
+              <a:rPr lang="en-US"/>
               <a:t>Click to edit Master title style</a:t>
             </a:r>
-            <a:endParaRPr lang="en-US"/>
           </a:p>
         </p:txBody>
       </p:sp>
@@ -1893,7 +2242,7 @@
           <a:p>
             <a:fld id="{5BCAD085-E8A6-8845-BD4E-CB4CCA059FC4}" type="datetimeFigureOut">
               <a:rPr lang="en-US" smtClean="0"/>
-              <a:t>1/27/13</a:t>
+              <a:t>5/5/2026</a:t>
             </a:fld>
             <a:endParaRPr lang="en-US"/>
           </a:p>
@@ -1988,7 +2337,7 @@
           <a:p>
             <a:fld id="{5BCAD085-E8A6-8845-BD4E-CB4CCA059FC4}" type="datetimeFigureOut">
               <a:rPr lang="en-US" smtClean="0"/>
-              <a:t>1/27/13</a:t>
+              <a:t>5/5/2026</a:t>
             </a:fld>
             <a:endParaRPr lang="en-US"/>
           </a:p>
@@ -2091,10 +2440,9 @@
           </a:lstStyle>
           <a:p>
             <a:r>
-              <a:rPr lang="en-US" smtClean="0"/>
+              <a:rPr lang="en-US"/>
               <a:t>Click to edit Master title style</a:t>
             </a:r>
-            <a:endParaRPr lang="en-US"/>
           </a:p>
         </p:txBody>
       </p:sp>
@@ -2148,38 +2496,37 @@
           <a:p>
             <a:pPr lvl="0"/>
             <a:r>
-              <a:rPr lang="en-US" smtClean="0"/>
+              <a:rPr lang="en-US"/>
               <a:t>Click to edit Master text styles</a:t>
             </a:r>
           </a:p>
           <a:p>
             <a:pPr lvl="1"/>
             <a:r>
-              <a:rPr lang="en-US" smtClean="0"/>
+              <a:rPr lang="en-US"/>
               <a:t>Second level</a:t>
             </a:r>
           </a:p>
           <a:p>
             <a:pPr lvl="2"/>
             <a:r>
-              <a:rPr lang="en-US" smtClean="0"/>
+              <a:rPr lang="en-US"/>
               <a:t>Third level</a:t>
             </a:r>
           </a:p>
           <a:p>
             <a:pPr lvl="3"/>
             <a:r>
-              <a:rPr lang="en-US" smtClean="0"/>
+              <a:rPr lang="en-US"/>
               <a:t>Fourth level</a:t>
             </a:r>
           </a:p>
           <a:p>
             <a:pPr lvl="4"/>
             <a:r>
-              <a:rPr lang="en-US" smtClean="0"/>
+              <a:rPr lang="en-US"/>
               <a:t>Fifth level</a:t>
             </a:r>
-            <a:endParaRPr lang="en-US"/>
           </a:p>
         </p:txBody>
       </p:sp>
@@ -2242,7 +2589,7 @@
           <a:p>
             <a:pPr lvl="0"/>
             <a:r>
-              <a:rPr lang="en-US" smtClean="0"/>
+              <a:rPr lang="en-US"/>
               <a:t>Click to edit Master text styles</a:t>
             </a:r>
           </a:p>
@@ -2265,7 +2612,7 @@
           <a:p>
             <a:fld id="{5BCAD085-E8A6-8845-BD4E-CB4CCA059FC4}" type="datetimeFigureOut">
               <a:rPr lang="en-US" smtClean="0"/>
-              <a:t>1/27/13</a:t>
+              <a:t>5/5/2026</a:t>
             </a:fld>
             <a:endParaRPr lang="en-US"/>
           </a:p>
@@ -2368,10 +2715,9 @@
           </a:lstStyle>
           <a:p>
             <a:r>
-              <a:rPr lang="en-US" smtClean="0"/>
+              <a:rPr lang="en-US"/>
               <a:t>Click to edit Master title style</a:t>
             </a:r>
-            <a:endParaRPr lang="en-US"/>
           </a:p>
         </p:txBody>
       </p:sp>
@@ -2495,7 +2841,7 @@
           <a:p>
             <a:pPr lvl="0"/>
             <a:r>
-              <a:rPr lang="en-US" smtClean="0"/>
+              <a:rPr lang="en-US"/>
               <a:t>Click to edit Master text styles</a:t>
             </a:r>
           </a:p>
@@ -2518,7 +2864,7 @@
           <a:p>
             <a:fld id="{5BCAD085-E8A6-8845-BD4E-CB4CCA059FC4}" type="datetimeFigureOut">
               <a:rPr lang="en-US" smtClean="0"/>
-              <a:t>1/27/13</a:t>
+              <a:t>5/5/2026</a:t>
             </a:fld>
             <a:endParaRPr lang="en-US"/>
           </a:p>
@@ -2627,10 +2973,9 @@
           <a:lstStyle/>
           <a:p>
             <a:r>
-              <a:rPr lang="en-US" smtClean="0"/>
+              <a:rPr lang="en-US"/>
               <a:t>Click to edit Master title style</a:t>
             </a:r>
-            <a:endParaRPr lang="en-US"/>
           </a:p>
         </p:txBody>
       </p:sp>
@@ -2661,38 +3006,37 @@
           <a:p>
             <a:pPr lvl="0"/>
             <a:r>
-              <a:rPr lang="en-US" smtClean="0"/>
+              <a:rPr lang="en-US"/>
               <a:t>Click to edit Master text styles</a:t>
             </a:r>
           </a:p>
           <a:p>
             <a:pPr lvl="1"/>
             <a:r>
-              <a:rPr lang="en-US" smtClean="0"/>
+              <a:rPr lang="en-US"/>
               <a:t>Second level</a:t>
             </a:r>
           </a:p>
           <a:p>
             <a:pPr lvl="2"/>
             <a:r>
-              <a:rPr lang="en-US" smtClean="0"/>
+              <a:rPr lang="en-US"/>
               <a:t>Third level</a:t>
             </a:r>
           </a:p>
           <a:p>
             <a:pPr lvl="3"/>
             <a:r>
-              <a:rPr lang="en-US" smtClean="0"/>
+              <a:rPr lang="en-US"/>
               <a:t>Fourth level</a:t>
             </a:r>
           </a:p>
           <a:p>
             <a:pPr lvl="4"/>
             <a:r>
-              <a:rPr lang="en-US" smtClean="0"/>
+              <a:rPr lang="en-US"/>
               <a:t>Fifth level</a:t>
             </a:r>
-            <a:endParaRPr lang="en-US"/>
           </a:p>
         </p:txBody>
       </p:sp>
@@ -2731,7 +3075,7 @@
           <a:p>
             <a:fld id="{5BCAD085-E8A6-8845-BD4E-CB4CCA059FC4}" type="datetimeFigureOut">
               <a:rPr lang="en-US" smtClean="0"/>
-              <a:t>1/27/13</a:t>
+              <a:t>5/5/2026</a:t>
             </a:fld>
             <a:endParaRPr lang="en-US"/>
           </a:p>
@@ -3090,7 +3434,7 @@
 </file>
 
 <file path=ppt/slides/slide1.xml><?xml version="1.0" encoding="utf-8"?>
-<p:sld xmlns:a="http://schemas.openxmlformats.org/drawingml/2006/main" xmlns:p="http://schemas.openxmlformats.org/presentationml/2006/main" xmlns:r="http://schemas.openxmlformats.org/officeDocument/2006/relationships">
+<p:sld xmlns:a="http://schemas.openxmlformats.org/drawingml/2006/main" xmlns:r="http://schemas.openxmlformats.org/officeDocument/2006/relationships" xmlns:p="http://schemas.openxmlformats.org/presentationml/2006/main">
   <p:cSld>
     <p:bg>
       <p:bgPr>
@@ -3106,7 +3450,14 @@
         <p:cNvGrpSpPr/>
         <p:nvPr/>
       </p:nvGrpSpPr>
-      <p:grpSpPr/>
+      <p:grpSpPr>
+        <a:xfrm>
+          <a:off x="0" y="0"/>
+          <a:ext cx="0" cy="0"/>
+          <a:chOff x="0" y="0"/>
+          <a:chExt cx="0" cy="0"/>
+        </a:xfrm>
+      </p:grpSpPr>
       <p:sp>
         <p:nvSpPr>
           <p:cNvPr id="2" name="TextBox 1"/>
@@ -3116,7 +3467,7 @@
         <p:spPr>
           <a:xfrm>
             <a:off x="914400" y="1828800"/>
-            <a:ext cx="10058400" cy="1371600"/>
+            <a:ext cx="10058400" cy="1446550"/>
           </a:xfrm>
           <a:prstGeom prst="rect">
             <a:avLst/>
@@ -3137,12 +3488,10 @@
               </a:defRPr>
             </a:pPr>
             <a:r>
-              <a:t>LLM Infrastructure Acceleration</a:t>
-            </a:r>
-            <a:br/>
-            <a:r>
-              <a:t>for Financial QA</a:t>
-            </a:r>
+              <a:rPr lang="en-US" sz="4400" b="1" dirty="0"/>
+              <a:t>Local Deployment and Infrastructure Acceleration for a Financial QA System</a:t>
+            </a:r>
+            <a:endParaRPr dirty="0"/>
           </a:p>
         </p:txBody>
       </p:sp>
@@ -3154,8 +3503,8 @@
         </p:nvSpPr>
         <p:spPr>
           <a:xfrm>
-            <a:off x="914400" y="3383280"/>
-            <a:ext cx="10058400" cy="1097280"/>
+            <a:off x="857250" y="4348480"/>
+            <a:ext cx="10058400" cy="430887"/>
           </a:xfrm>
           <a:prstGeom prst="rect">
             <a:avLst/>
@@ -3176,11 +3525,12 @@
               </a:defRPr>
             </a:pPr>
             <a:r>
-              <a:t>Local-First RAG System  |  Llama-3.2-3B  |  vLLM + AWQ4 Quantization</a:t>
-            </a:r>
-            <a:br/>
-            <a:r>
-              <a:t>RTX 3090 Ti  |  May 2026</a:t>
+              <a:rPr lang="en-US" dirty="0"/>
+              <a:t>Yuan Zhao</a:t>
+            </a:r>
+            <a:r>
+              <a:rPr dirty="0"/>
+              <a:t>|  May 2026</a:t>
             </a:r>
           </a:p>
         </p:txBody>
@@ -3225,6 +3575,7 @@
           <a:lstStyle/>
           <a:p>
             <a:pPr algn="ctr"/>
+            <a:endParaRPr/>
           </a:p>
         </p:txBody>
       </p:sp>
@@ -3236,8 +3587,8 @@
 </p:sld>
 </file>
 
-<file path=ppt/slides/slide10.xml><?xml version="1.0" encoding="utf-8"?>
-<p:sld xmlns:a="http://schemas.openxmlformats.org/drawingml/2006/main" xmlns:p="http://schemas.openxmlformats.org/presentationml/2006/main" xmlns:r="http://schemas.openxmlformats.org/officeDocument/2006/relationships">
+<file path=ppt/slides/slide2.xml><?xml version="1.0" encoding="utf-8"?>
+<p:sld xmlns:a="http://schemas.openxmlformats.org/drawingml/2006/main" xmlns:r="http://schemas.openxmlformats.org/officeDocument/2006/relationships" xmlns:p="http://schemas.openxmlformats.org/presentationml/2006/main">
   <p:cSld>
     <p:bg>
       <p:bgPr>
@@ -3253,7 +3604,14 @@
         <p:cNvGrpSpPr/>
         <p:nvPr/>
       </p:nvGrpSpPr>
-      <p:grpSpPr/>
+      <p:grpSpPr>
+        <a:xfrm>
+          <a:off x="0" y="0"/>
+          <a:ext cx="0" cy="0"/>
+          <a:chOff x="0" y="0"/>
+          <a:chExt cx="0" cy="0"/>
+        </a:xfrm>
+      </p:grpSpPr>
       <p:sp>
         <p:nvSpPr>
           <p:cNvPr id="2" name="TextBox 1"/>
@@ -3284,7 +3642,8 @@
               </a:defRPr>
             </a:pPr>
             <a:r>
-              <a:t>Key Optimizations Applied</a:t>
+              <a:rPr dirty="0"/>
+              <a:t>System Architecture</a:t>
             </a:r>
           </a:p>
         </p:txBody>
@@ -3297,7 +3656,7 @@
         </p:nvSpPr>
         <p:spPr>
           <a:xfrm>
-            <a:off x="731520" y="1188720"/>
+            <a:off x="706120" y="1854200"/>
             <a:ext cx="1371600" cy="54864"/>
           </a:xfrm>
           <a:prstGeom prst="rect">
@@ -3329,179 +3688,1165 @@
           <a:lstStyle/>
           <a:p>
             <a:pPr algn="ctr"/>
-          </a:p>
-        </p:txBody>
-      </p:sp>
-      <p:sp>
-        <p:nvSpPr>
-          <p:cNvPr id="4" name="TextBox 3"/>
-          <p:cNvSpPr txBox="1"/>
+            <a:endParaRPr/>
+          </a:p>
+        </p:txBody>
+      </p:sp>
+      <p:sp>
+        <p:nvSpPr>
+          <p:cNvPr id="10" name="EngBG"/>
+          <p:cNvSpPr/>
           <p:nvPr/>
         </p:nvSpPr>
         <p:spPr>
           <a:xfrm>
-            <a:off x="731520" y="1463040"/>
-            <a:ext cx="10515600" cy="4572000"/>
+            <a:off x="508000" y="1333500"/>
+            <a:ext cx="11430000" cy="5080000"/>
+          </a:xfrm>
+          <a:prstGeom prst="roundRect">
+            <a:avLst>
+              <a:gd name="adj" fmla="val 2500"/>
+            </a:avLst>
+          </a:prstGeom>
+          <a:solidFill>
+            <a:srgbClr val="F0F4F8"/>
+          </a:solidFill>
+          <a:ln w="12700">
+            <a:solidFill>
+              <a:srgbClr val="C8D6E5"/>
+            </a:solidFill>
+            <a:prstDash val="dash"/>
+          </a:ln>
+        </p:spPr>
+        <p:txBody>
+          <a:bodyPr rIns="152400" bIns="101600" anchor="b"/>
+          <a:lstStyle/>
+          <a:p>
+            <a:pPr algn="r"/>
+            <a:endParaRPr lang="en-US" sz="1000" i="1" dirty="0">
+              <a:solidFill>
+                <a:srgbClr val="8899AA"/>
+              </a:solidFill>
+              <a:latin typeface="Segoe UI"/>
+            </a:endParaRPr>
+          </a:p>
+        </p:txBody>
+      </p:sp>
+      <p:sp>
+        <p:nvSpPr>
+          <p:cNvPr id="11" name="UserQ"/>
+          <p:cNvSpPr/>
+          <p:nvPr/>
+        </p:nvSpPr>
+        <p:spPr>
+          <a:xfrm>
+            <a:off x="673100" y="3370580"/>
+            <a:ext cx="1524000" cy="558800"/>
+          </a:xfrm>
+          <a:prstGeom prst="roundRect">
+            <a:avLst>
+              <a:gd name="adj" fmla="val 30000"/>
+            </a:avLst>
+          </a:prstGeom>
+          <a:solidFill>
+            <a:srgbClr val="1A1A2E"/>
+          </a:solidFill>
+          <a:ln w="0">
+            <a:noFill/>
+          </a:ln>
+          <a:effectLst>
+            <a:outerShdw blurRad="40000" dist="20000" dir="5400000" algn="tl" rotWithShape="0">
+              <a:srgbClr val="000000">
+                <a:alpha val="20000"/>
+              </a:srgbClr>
+            </a:outerShdw>
+          </a:effectLst>
+        </p:spPr>
+        <p:txBody>
+          <a:bodyPr lIns="0" tIns="0" rIns="0" bIns="0" anchor="ctr"/>
+          <a:lstStyle/>
+          <a:p>
+            <a:pPr algn="ctr"/>
+            <a:r>
+              <a:rPr lang="en-US" sz="1200" b="1" dirty="0">
+                <a:solidFill>
+                  <a:srgbClr val="FFFFFF"/>
+                </a:solidFill>
+                <a:latin typeface="Segoe UI"/>
+              </a:rPr>
+              <a:t>User Query</a:t>
+            </a:r>
+          </a:p>
+        </p:txBody>
+      </p:sp>
+      <p:sp>
+        <p:nvSpPr>
+          <p:cNvPr id="12" name="A1"/>
+          <p:cNvSpPr/>
+          <p:nvPr/>
+        </p:nvSpPr>
+        <p:spPr>
+          <a:xfrm>
+            <a:off x="2235200" y="3586480"/>
+            <a:ext cx="355600" cy="127000"/>
+          </a:xfrm>
+          <a:prstGeom prst="rightArrow">
+            <a:avLst>
+              <a:gd name="adj1" fmla="val 50000"/>
+              <a:gd name="adj2" fmla="val 50000"/>
+            </a:avLst>
+          </a:prstGeom>
+          <a:solidFill>
+            <a:srgbClr val="4A90D9"/>
+          </a:solidFill>
+          <a:ln w="0">
+            <a:noFill/>
+          </a:ln>
+        </p:spPr>
+        <p:txBody>
+          <a:bodyPr/>
+          <a:lstStyle/>
+          <a:p>
+            <a:endParaRPr lang="en-US"/>
+          </a:p>
+        </p:txBody>
+      </p:sp>
+      <p:sp>
+        <p:nvSpPr>
+          <p:cNvPr id="13" name="Router"/>
+          <p:cNvSpPr/>
+          <p:nvPr/>
+        </p:nvSpPr>
+        <p:spPr>
+          <a:xfrm>
+            <a:off x="2768600" y="3307080"/>
+            <a:ext cx="1968500" cy="685800"/>
+          </a:xfrm>
+          <a:prstGeom prst="roundRect">
+            <a:avLst>
+              <a:gd name="adj" fmla="val 15000"/>
+            </a:avLst>
+          </a:prstGeom>
+          <a:solidFill>
+            <a:srgbClr val="4A90D9"/>
+          </a:solidFill>
+          <a:ln w="0">
+            <a:noFill/>
+          </a:ln>
+          <a:effectLst>
+            <a:outerShdw blurRad="50000" dist="25000" dir="5400000" algn="tl" rotWithShape="0">
+              <a:srgbClr val="000000">
+                <a:alpha val="22000"/>
+              </a:srgbClr>
+            </a:outerShdw>
+          </a:effectLst>
+        </p:spPr>
+        <p:txBody>
+          <a:bodyPr lIns="0" tIns="0" rIns="0" bIns="0" anchor="ctr"/>
+          <a:lstStyle/>
+          <a:p>
+            <a:pPr algn="ctr"/>
+            <a:r>
+              <a:rPr lang="en-US" sz="1400" b="1" dirty="0">
+                <a:solidFill>
+                  <a:srgbClr val="FFFFFF"/>
+                </a:solidFill>
+                <a:latin typeface="Segoe UI"/>
+              </a:rPr>
+              <a:t>Intent Router</a:t>
+            </a:r>
+          </a:p>
+          <a:p>
+            <a:pPr algn="ctr"/>
+            <a:r>
+              <a:rPr lang="en-US" sz="1000" dirty="0">
+                <a:solidFill>
+                  <a:srgbClr val="D6E4F0"/>
+                </a:solidFill>
+                <a:latin typeface="Segoe UI"/>
+              </a:rPr>
+              <a:t>LoRA Adapter</a:t>
+            </a:r>
+          </a:p>
+        </p:txBody>
+      </p:sp>
+      <p:sp>
+        <p:nvSpPr>
+          <p:cNvPr id="14" name="VL"/>
+          <p:cNvSpPr/>
+          <p:nvPr/>
+        </p:nvSpPr>
+        <p:spPr>
+          <a:xfrm>
+            <a:off x="5054600" y="2354580"/>
+            <a:ext cx="25400" cy="2603500"/>
+          </a:xfrm>
+          <a:prstGeom prst="rect">
+            <a:avLst/>
+          </a:prstGeom>
+          <a:solidFill>
+            <a:srgbClr val="4A90D9">
+              <a:alpha val="40000"/>
+            </a:srgbClr>
+          </a:solidFill>
+          <a:ln w="0">
+            <a:noFill/>
+          </a:ln>
+        </p:spPr>
+        <p:txBody>
+          <a:bodyPr/>
+          <a:lstStyle/>
+          <a:p>
+            <a:endParaRPr lang="en-US"/>
+          </a:p>
+        </p:txBody>
+      </p:sp>
+      <p:sp>
+        <p:nvSpPr>
+          <p:cNvPr id="15" name="HL"/>
+          <p:cNvSpPr/>
+          <p:nvPr/>
+        </p:nvSpPr>
+        <p:spPr>
+          <a:xfrm>
+            <a:off x="4737100" y="3637280"/>
+            <a:ext cx="330200" cy="25400"/>
+          </a:xfrm>
+          <a:prstGeom prst="rect">
+            <a:avLst/>
+          </a:prstGeom>
+          <a:solidFill>
+            <a:srgbClr val="4A90D9"/>
+          </a:solidFill>
+          <a:ln w="0">
+            <a:noFill/>
+          </a:ln>
+        </p:spPr>
+        <p:txBody>
+          <a:bodyPr/>
+          <a:lstStyle/>
+          <a:p>
+            <a:endParaRPr lang="en-US"/>
+          </a:p>
+        </p:txBody>
+      </p:sp>
+      <p:sp>
+        <p:nvSpPr>
+          <p:cNvPr id="16" name="HB"/>
+          <p:cNvSpPr/>
+          <p:nvPr/>
+        </p:nvSpPr>
+        <p:spPr>
+          <a:xfrm>
+            <a:off x="5054600" y="2341880"/>
+            <a:ext cx="254000" cy="25400"/>
+          </a:xfrm>
+          <a:prstGeom prst="rect">
+            <a:avLst/>
+          </a:prstGeom>
+          <a:solidFill>
+            <a:srgbClr val="2ECC71">
+              <a:alpha val="50000"/>
+            </a:srgbClr>
+          </a:solidFill>
+          <a:ln w="0">
+            <a:noFill/>
+          </a:ln>
+        </p:spPr>
+        <p:txBody>
+          <a:bodyPr/>
+          <a:lstStyle/>
+          <a:p>
+            <a:endParaRPr lang="en-US"/>
+          </a:p>
+        </p:txBody>
+      </p:sp>
+      <p:sp>
+        <p:nvSpPr>
+          <p:cNvPr id="17" name="TL"/>
+          <p:cNvSpPr/>
+          <p:nvPr/>
+        </p:nvSpPr>
+        <p:spPr>
+          <a:xfrm>
+            <a:off x="5308600" y="2189480"/>
+            <a:ext cx="1206500" cy="330200"/>
+          </a:xfrm>
+          <a:prstGeom prst="roundRect">
+            <a:avLst>
+              <a:gd name="adj" fmla="val 50000"/>
+            </a:avLst>
+          </a:prstGeom>
+          <a:solidFill>
+            <a:srgbClr val="2ECC71">
+              <a:alpha val="18000"/>
+            </a:srgbClr>
+          </a:solidFill>
+          <a:ln w="9525">
+            <a:solidFill>
+              <a:srgbClr val="2ECC71"/>
+            </a:solidFill>
+          </a:ln>
+        </p:spPr>
+        <p:txBody>
+          <a:bodyPr lIns="0" tIns="0" rIns="0" bIns="0" anchor="ctr"/>
+          <a:lstStyle/>
+          <a:p>
+            <a:pPr algn="ctr"/>
+            <a:r>
+              <a:rPr lang="en-US" sz="900" b="1" dirty="0">
+                <a:solidFill>
+                  <a:srgbClr val="2ECC71"/>
+                </a:solidFill>
+                <a:latin typeface="Segoe UI"/>
+              </a:rPr>
+              <a:t>Type 1: Exact Fact</a:t>
+            </a:r>
+          </a:p>
+        </p:txBody>
+      </p:sp>
+      <p:sp>
+        <p:nvSpPr>
+          <p:cNvPr id="18" name="CA"/>
+          <p:cNvSpPr/>
+          <p:nvPr/>
+        </p:nvSpPr>
+        <p:spPr>
+          <a:xfrm>
+            <a:off x="6540500" y="2291080"/>
+            <a:ext cx="203200" cy="101600"/>
+          </a:xfrm>
+          <a:prstGeom prst="rightArrow">
+            <a:avLst>
+              <a:gd name="adj1" fmla="val 50000"/>
+              <a:gd name="adj2" fmla="val 50000"/>
+            </a:avLst>
+          </a:prstGeom>
+          <a:solidFill>
+            <a:srgbClr val="2ECC71"/>
+          </a:solidFill>
+          <a:ln w="0">
+            <a:noFill/>
+          </a:ln>
+        </p:spPr>
+        <p:txBody>
+          <a:bodyPr/>
+          <a:lstStyle/>
+          <a:p>
+            <a:endParaRPr lang="en-US"/>
+          </a:p>
+        </p:txBody>
+      </p:sp>
+      <p:sp>
+        <p:nvSpPr>
+          <p:cNvPr id="19" name="PB"/>
+          <p:cNvSpPr/>
+          <p:nvPr/>
+        </p:nvSpPr>
+        <p:spPr>
+          <a:xfrm>
+            <a:off x="6705600" y="2125980"/>
+            <a:ext cx="1460500" cy="457200"/>
+          </a:xfrm>
+          <a:prstGeom prst="roundRect">
+            <a:avLst>
+              <a:gd name="adj" fmla="val 15000"/>
+            </a:avLst>
+          </a:prstGeom>
+          <a:solidFill>
+            <a:srgbClr val="FFFFFF"/>
+          </a:solidFill>
+          <a:ln w="12700">
+            <a:solidFill>
+              <a:srgbClr val="2ECC71"/>
+            </a:solidFill>
+          </a:ln>
+        </p:spPr>
+        <p:txBody>
+          <a:bodyPr lIns="0" tIns="0" rIns="0" bIns="0" anchor="ctr"/>
+          <a:lstStyle/>
+          <a:p>
+            <a:pPr algn="ctr"/>
+            <a:r>
+              <a:rPr lang="en-US" sz="1100" b="1" dirty="0">
+                <a:solidFill>
+                  <a:srgbClr val="1A1A2E"/>
+                </a:solidFill>
+                <a:latin typeface="Segoe UI"/>
+              </a:rPr>
+              <a:t>NL2SQL</a:t>
+            </a:r>
+          </a:p>
+        </p:txBody>
+      </p:sp>
+      <p:sp>
+        <p:nvSpPr>
+          <p:cNvPr id="20" name="PA"/>
+          <p:cNvSpPr/>
+          <p:nvPr/>
+        </p:nvSpPr>
+        <p:spPr>
+          <a:xfrm>
+            <a:off x="8204200" y="2291080"/>
+            <a:ext cx="228600" cy="101600"/>
+          </a:xfrm>
+          <a:prstGeom prst="rightArrow">
+            <a:avLst>
+              <a:gd name="adj1" fmla="val 50000"/>
+              <a:gd name="adj2" fmla="val 50000"/>
+            </a:avLst>
+          </a:prstGeom>
+          <a:solidFill>
+            <a:srgbClr val="2ECC71"/>
+          </a:solidFill>
+          <a:ln w="0">
+            <a:noFill/>
+          </a:ln>
+        </p:spPr>
+        <p:txBody>
+          <a:bodyPr/>
+          <a:lstStyle/>
+          <a:p>
+            <a:endParaRPr lang="en-US"/>
+          </a:p>
+        </p:txBody>
+      </p:sp>
+      <p:sp>
+        <p:nvSpPr>
+          <p:cNvPr id="21" name="DS"/>
+          <p:cNvSpPr/>
+          <p:nvPr/>
+        </p:nvSpPr>
+        <p:spPr>
+          <a:xfrm>
+            <a:off x="8483600" y="2087880"/>
+            <a:ext cx="1778000" cy="533400"/>
+          </a:xfrm>
+          <a:prstGeom prst="roundRect">
+            <a:avLst>
+              <a:gd name="adj" fmla="val 15000"/>
+            </a:avLst>
+          </a:prstGeom>
+          <a:solidFill>
+            <a:srgbClr val="2ECC71"/>
+          </a:solidFill>
+          <a:ln w="0">
+            <a:noFill/>
+          </a:ln>
+          <a:effectLst>
+            <a:outerShdw blurRad="30000" dist="15000" dir="5400000" algn="tl" rotWithShape="0">
+              <a:srgbClr val="000000">
+                <a:alpha val="15000"/>
+              </a:srgbClr>
+            </a:outerShdw>
+          </a:effectLst>
+        </p:spPr>
+        <p:txBody>
+          <a:bodyPr lIns="50800" tIns="0" rIns="50800" bIns="0" anchor="ctr"/>
+          <a:lstStyle/>
+          <a:p>
+            <a:pPr algn="ctr"/>
+            <a:r>
+              <a:rPr lang="en-US" sz="1100" b="1" dirty="0">
+                <a:solidFill>
+                  <a:srgbClr val="FFFFFF"/>
+                </a:solidFill>
+                <a:latin typeface="Segoe UI"/>
+              </a:rPr>
+              <a:t>SQLite</a:t>
+            </a:r>
+          </a:p>
+          <a:p>
+            <a:pPr algn="ctr"/>
+            <a:r>
+              <a:rPr lang="en-US" sz="800" dirty="0">
+                <a:solidFill>
+                  <a:srgbClr val="EEEEFF"/>
+                </a:solidFill>
+                <a:latin typeface="Segoe UI"/>
+              </a:rPr>
+              <a:t>40K XBRL rows</a:t>
+            </a:r>
+          </a:p>
+        </p:txBody>
+      </p:sp>
+      <p:sp>
+        <p:nvSpPr>
+          <p:cNvPr id="22" name="DA"/>
+          <p:cNvSpPr/>
+          <p:nvPr/>
+        </p:nvSpPr>
+        <p:spPr>
+          <a:xfrm>
+            <a:off x="10299700" y="2291080"/>
+            <a:ext cx="152400" cy="25400"/>
+          </a:xfrm>
+          <a:prstGeom prst="rect">
+            <a:avLst/>
+          </a:prstGeom>
+          <a:solidFill>
+            <a:srgbClr val="2ECC71">
+              <a:alpha val="35000"/>
+            </a:srgbClr>
+          </a:solidFill>
+          <a:ln w="0">
+            <a:noFill/>
+          </a:ln>
+        </p:spPr>
+        <p:txBody>
+          <a:bodyPr/>
+          <a:lstStyle/>
+          <a:p>
+            <a:endParaRPr lang="en-US"/>
+          </a:p>
+        </p:txBody>
+      </p:sp>
+      <p:sp>
+        <p:nvSpPr>
+          <p:cNvPr id="23" name="HB"/>
+          <p:cNvSpPr/>
+          <p:nvPr/>
+        </p:nvSpPr>
+        <p:spPr>
+          <a:xfrm>
+            <a:off x="5054600" y="3649980"/>
+            <a:ext cx="254000" cy="25400"/>
+          </a:xfrm>
+          <a:prstGeom prst="rect">
+            <a:avLst/>
+          </a:prstGeom>
+          <a:solidFill>
+            <a:srgbClr val="E67E22">
+              <a:alpha val="50000"/>
+            </a:srgbClr>
+          </a:solidFill>
+          <a:ln w="0">
+            <a:noFill/>
+          </a:ln>
+        </p:spPr>
+        <p:txBody>
+          <a:bodyPr/>
+          <a:lstStyle/>
+          <a:p>
+            <a:endParaRPr lang="en-US"/>
+          </a:p>
+        </p:txBody>
+      </p:sp>
+      <p:sp>
+        <p:nvSpPr>
+          <p:cNvPr id="24" name="TL"/>
+          <p:cNvSpPr/>
+          <p:nvPr/>
+        </p:nvSpPr>
+        <p:spPr>
+          <a:xfrm>
+            <a:off x="5308600" y="3497580"/>
+            <a:ext cx="1206500" cy="330200"/>
+          </a:xfrm>
+          <a:prstGeom prst="roundRect">
+            <a:avLst>
+              <a:gd name="adj" fmla="val 50000"/>
+            </a:avLst>
+          </a:prstGeom>
+          <a:solidFill>
+            <a:srgbClr val="E67E22">
+              <a:alpha val="18000"/>
+            </a:srgbClr>
+          </a:solidFill>
+          <a:ln w="9525">
+            <a:solidFill>
+              <a:srgbClr val="E67E22"/>
+            </a:solidFill>
+          </a:ln>
+        </p:spPr>
+        <p:txBody>
+          <a:bodyPr lIns="0" tIns="0" rIns="0" bIns="0" anchor="ctr"/>
+          <a:lstStyle/>
+          <a:p>
+            <a:pPr algn="ctr"/>
+            <a:r>
+              <a:rPr lang="en-US" sz="900" b="1" dirty="0">
+                <a:solidFill>
+                  <a:srgbClr val="E67E22"/>
+                </a:solidFill>
+                <a:latin typeface="Segoe UI"/>
+              </a:rPr>
+              <a:t>Type 2: Qualitative</a:t>
+            </a:r>
+          </a:p>
+        </p:txBody>
+      </p:sp>
+      <p:sp>
+        <p:nvSpPr>
+          <p:cNvPr id="25" name="CA"/>
+          <p:cNvSpPr/>
+          <p:nvPr/>
+        </p:nvSpPr>
+        <p:spPr>
+          <a:xfrm>
+            <a:off x="6540500" y="3599180"/>
+            <a:ext cx="203200" cy="101600"/>
+          </a:xfrm>
+          <a:prstGeom prst="rightArrow">
+            <a:avLst>
+              <a:gd name="adj1" fmla="val 50000"/>
+              <a:gd name="adj2" fmla="val 50000"/>
+            </a:avLst>
+          </a:prstGeom>
+          <a:solidFill>
+            <a:srgbClr val="E67E22"/>
+          </a:solidFill>
+          <a:ln w="0">
+            <a:noFill/>
+          </a:ln>
+        </p:spPr>
+        <p:txBody>
+          <a:bodyPr/>
+          <a:lstStyle/>
+          <a:p>
+            <a:endParaRPr lang="en-US"/>
+          </a:p>
+        </p:txBody>
+      </p:sp>
+      <p:sp>
+        <p:nvSpPr>
+          <p:cNvPr id="26" name="PB"/>
+          <p:cNvSpPr/>
+          <p:nvPr/>
+        </p:nvSpPr>
+        <p:spPr>
+          <a:xfrm>
+            <a:off x="6705600" y="3434080"/>
+            <a:ext cx="1460500" cy="457200"/>
+          </a:xfrm>
+          <a:prstGeom prst="roundRect">
+            <a:avLst>
+              <a:gd name="adj" fmla="val 15000"/>
+            </a:avLst>
+          </a:prstGeom>
+          <a:solidFill>
+            <a:srgbClr val="FFFFFF"/>
+          </a:solidFill>
+          <a:ln w="12700">
+            <a:solidFill>
+              <a:srgbClr val="E67E22"/>
+            </a:solidFill>
+          </a:ln>
+        </p:spPr>
+        <p:txBody>
+          <a:bodyPr lIns="0" tIns="0" rIns="0" bIns="0" anchor="ctr"/>
+          <a:lstStyle/>
+          <a:p>
+            <a:pPr algn="ctr"/>
+            <a:r>
+              <a:rPr lang="en-US" sz="1100" b="1" dirty="0">
+                <a:solidFill>
+                  <a:srgbClr val="1A1A2E"/>
+                </a:solidFill>
+                <a:latin typeface="Segoe UI"/>
+              </a:rPr>
+              <a:t>Query Rewrite</a:t>
+            </a:r>
+          </a:p>
+        </p:txBody>
+      </p:sp>
+      <p:sp>
+        <p:nvSpPr>
+          <p:cNvPr id="27" name="PA"/>
+          <p:cNvSpPr/>
+          <p:nvPr/>
+        </p:nvSpPr>
+        <p:spPr>
+          <a:xfrm>
+            <a:off x="8204200" y="3599180"/>
+            <a:ext cx="228600" cy="101600"/>
+          </a:xfrm>
+          <a:prstGeom prst="rightArrow">
+            <a:avLst>
+              <a:gd name="adj1" fmla="val 50000"/>
+              <a:gd name="adj2" fmla="val 50000"/>
+            </a:avLst>
+          </a:prstGeom>
+          <a:solidFill>
+            <a:srgbClr val="E67E22"/>
+          </a:solidFill>
+          <a:ln w="0">
+            <a:noFill/>
+          </a:ln>
+        </p:spPr>
+        <p:txBody>
+          <a:bodyPr/>
+          <a:lstStyle/>
+          <a:p>
+            <a:endParaRPr lang="en-US"/>
+          </a:p>
+        </p:txBody>
+      </p:sp>
+      <p:sp>
+        <p:nvSpPr>
+          <p:cNvPr id="28" name="DS"/>
+          <p:cNvSpPr/>
+          <p:nvPr/>
+        </p:nvSpPr>
+        <p:spPr>
+          <a:xfrm>
+            <a:off x="8483600" y="3395980"/>
+            <a:ext cx="1778000" cy="533400"/>
+          </a:xfrm>
+          <a:prstGeom prst="roundRect">
+            <a:avLst>
+              <a:gd name="adj" fmla="val 15000"/>
+            </a:avLst>
+          </a:prstGeom>
+          <a:solidFill>
+            <a:srgbClr val="E67E22"/>
+          </a:solidFill>
+          <a:ln w="0">
+            <a:noFill/>
+          </a:ln>
+          <a:effectLst>
+            <a:outerShdw blurRad="30000" dist="15000" dir="5400000" algn="tl" rotWithShape="0">
+              <a:srgbClr val="000000">
+                <a:alpha val="15000"/>
+              </a:srgbClr>
+            </a:outerShdw>
+          </a:effectLst>
+        </p:spPr>
+        <p:txBody>
+          <a:bodyPr lIns="50800" tIns="0" rIns="50800" bIns="0" anchor="ctr"/>
+          <a:lstStyle/>
+          <a:p>
+            <a:pPr algn="ctr"/>
+            <a:r>
+              <a:rPr lang="en-US" sz="1100" b="1" dirty="0">
+                <a:solidFill>
+                  <a:srgbClr val="FFFFFF"/>
+                </a:solidFill>
+                <a:latin typeface="Segoe UI"/>
+              </a:rPr>
+              <a:t>Hybrid RAG</a:t>
+            </a:r>
+          </a:p>
+          <a:p>
+            <a:pPr algn="ctr"/>
+            <a:r>
+              <a:rPr lang="en-US" sz="800" dirty="0">
+                <a:solidFill>
+                  <a:srgbClr val="EEEEFF"/>
+                </a:solidFill>
+                <a:latin typeface="Segoe UI"/>
+              </a:rPr>
+              <a:t>BM25 + Dense + Cross-Encoder</a:t>
+            </a:r>
+          </a:p>
+        </p:txBody>
+      </p:sp>
+      <p:sp>
+        <p:nvSpPr>
+          <p:cNvPr id="29" name="DA"/>
+          <p:cNvSpPr/>
+          <p:nvPr/>
+        </p:nvSpPr>
+        <p:spPr>
+          <a:xfrm>
+            <a:off x="10299700" y="3599180"/>
+            <a:ext cx="152400" cy="25400"/>
+          </a:xfrm>
+          <a:prstGeom prst="rect">
+            <a:avLst/>
+          </a:prstGeom>
+          <a:solidFill>
+            <a:srgbClr val="E67E22">
+              <a:alpha val="35000"/>
+            </a:srgbClr>
+          </a:solidFill>
+          <a:ln w="0">
+            <a:noFill/>
+          </a:ln>
+        </p:spPr>
+        <p:txBody>
+          <a:bodyPr/>
+          <a:lstStyle/>
+          <a:p>
+            <a:endParaRPr lang="en-US"/>
+          </a:p>
+        </p:txBody>
+      </p:sp>
+      <p:sp>
+        <p:nvSpPr>
+          <p:cNvPr id="30" name="HB"/>
+          <p:cNvSpPr/>
+          <p:nvPr/>
+        </p:nvSpPr>
+        <p:spPr>
+          <a:xfrm>
+            <a:off x="5054600" y="4945380"/>
+            <a:ext cx="254000" cy="25400"/>
+          </a:xfrm>
+          <a:prstGeom prst="rect">
+            <a:avLst/>
+          </a:prstGeom>
+          <a:solidFill>
+            <a:srgbClr val="9B59B6">
+              <a:alpha val="50000"/>
+            </a:srgbClr>
+          </a:solidFill>
+          <a:ln w="0">
+            <a:noFill/>
+          </a:ln>
+        </p:spPr>
+        <p:txBody>
+          <a:bodyPr/>
+          <a:lstStyle/>
+          <a:p>
+            <a:endParaRPr lang="en-US"/>
+          </a:p>
+        </p:txBody>
+      </p:sp>
+      <p:sp>
+        <p:nvSpPr>
+          <p:cNvPr id="31" name="TL"/>
+          <p:cNvSpPr/>
+          <p:nvPr/>
+        </p:nvSpPr>
+        <p:spPr>
+          <a:xfrm>
+            <a:off x="5308600" y="4792980"/>
+            <a:ext cx="1206500" cy="330200"/>
+          </a:xfrm>
+          <a:prstGeom prst="roundRect">
+            <a:avLst>
+              <a:gd name="adj" fmla="val 50000"/>
+            </a:avLst>
+          </a:prstGeom>
+          <a:solidFill>
+            <a:srgbClr val="9B59B6">
+              <a:alpha val="18000"/>
+            </a:srgbClr>
+          </a:solidFill>
+          <a:ln w="9525">
+            <a:solidFill>
+              <a:srgbClr val="9B59B6"/>
+            </a:solidFill>
+          </a:ln>
+        </p:spPr>
+        <p:txBody>
+          <a:bodyPr lIns="0" tIns="0" rIns="0" bIns="0" anchor="ctr"/>
+          <a:lstStyle/>
+          <a:p>
+            <a:pPr algn="ctr"/>
+            <a:r>
+              <a:rPr lang="en-US" sz="900" b="1" dirty="0">
+                <a:solidFill>
+                  <a:srgbClr val="9B59B6"/>
+                </a:solidFill>
+                <a:latin typeface="Segoe UI"/>
+              </a:rPr>
+              <a:t>Type 3: Chat</a:t>
+            </a:r>
+          </a:p>
+        </p:txBody>
+      </p:sp>
+      <p:sp>
+        <p:nvSpPr>
+          <p:cNvPr id="32" name="CA"/>
+          <p:cNvSpPr/>
+          <p:nvPr/>
+        </p:nvSpPr>
+        <p:spPr>
+          <a:xfrm>
+            <a:off x="6540500" y="4894580"/>
+            <a:ext cx="203200" cy="101600"/>
+          </a:xfrm>
+          <a:prstGeom prst="rightArrow">
+            <a:avLst>
+              <a:gd name="adj1" fmla="val 50000"/>
+              <a:gd name="adj2" fmla="val 50000"/>
+            </a:avLst>
+          </a:prstGeom>
+          <a:solidFill>
+            <a:srgbClr val="9B59B6"/>
+          </a:solidFill>
+          <a:ln w="0">
+            <a:noFill/>
+          </a:ln>
+        </p:spPr>
+        <p:txBody>
+          <a:bodyPr/>
+          <a:lstStyle/>
+          <a:p>
+            <a:endParaRPr lang="en-US"/>
+          </a:p>
+        </p:txBody>
+      </p:sp>
+      <p:sp>
+        <p:nvSpPr>
+          <p:cNvPr id="33" name="PB"/>
+          <p:cNvSpPr/>
+          <p:nvPr/>
+        </p:nvSpPr>
+        <p:spPr>
+          <a:xfrm>
+            <a:off x="6705600" y="4729480"/>
+            <a:ext cx="1460500" cy="457200"/>
+          </a:xfrm>
+          <a:prstGeom prst="roundRect">
+            <a:avLst>
+              <a:gd name="adj" fmla="val 15000"/>
+            </a:avLst>
+          </a:prstGeom>
+          <a:solidFill>
+            <a:srgbClr val="FFFFFF"/>
+          </a:solidFill>
+          <a:ln w="12700">
+            <a:solidFill>
+              <a:srgbClr val="9B59B6"/>
+            </a:solidFill>
+          </a:ln>
+        </p:spPr>
+        <p:txBody>
+          <a:bodyPr lIns="0" tIns="0" rIns="0" bIns="0" anchor="ctr"/>
+          <a:lstStyle/>
+          <a:p>
+            <a:pPr algn="ctr"/>
+            <a:r>
+              <a:rPr lang="en-US" sz="1100" b="1" dirty="0">
+                <a:solidFill>
+                  <a:srgbClr val="1A1A2E"/>
+                </a:solidFill>
+                <a:latin typeface="Segoe UI"/>
+              </a:rPr>
+              <a:t>Direct Answer</a:t>
+            </a:r>
+          </a:p>
+        </p:txBody>
+      </p:sp>
+      <p:sp>
+        <p:nvSpPr>
+          <p:cNvPr id="34" name="DA3"/>
+          <p:cNvSpPr/>
+          <p:nvPr/>
+        </p:nvSpPr>
+        <p:spPr>
+          <a:xfrm>
+            <a:off x="8204200" y="4945380"/>
+            <a:ext cx="2247900" cy="25400"/>
+          </a:xfrm>
+          <a:prstGeom prst="rect">
+            <a:avLst/>
+          </a:prstGeom>
+          <a:solidFill>
+            <a:srgbClr val="9B59B6">
+              <a:alpha val="35000"/>
+            </a:srgbClr>
+          </a:solidFill>
+          <a:ln w="0">
+            <a:noFill/>
+          </a:ln>
+        </p:spPr>
+        <p:txBody>
+          <a:bodyPr/>
+          <a:lstStyle/>
+          <a:p>
+            <a:endParaRPr lang="en-US"/>
+          </a:p>
+        </p:txBody>
+      </p:sp>
+      <p:sp>
+        <p:nvSpPr>
+          <p:cNvPr id="35" name="Chroma"/>
+          <p:cNvSpPr/>
+          <p:nvPr/>
+        </p:nvSpPr>
+        <p:spPr>
+          <a:xfrm>
+            <a:off x="8547100" y="4132580"/>
+            <a:ext cx="1651000" cy="457200"/>
+          </a:xfrm>
+          <a:prstGeom prst="roundRect">
+            <a:avLst>
+              <a:gd name="adj" fmla="val 15000"/>
+            </a:avLst>
+          </a:prstGeom>
+          <a:solidFill>
+            <a:srgbClr val="E8ECF1"/>
+          </a:solidFill>
+          <a:ln w="12700">
+            <a:solidFill>
+              <a:srgbClr val="E67E22"/>
+            </a:solidFill>
+          </a:ln>
+        </p:spPr>
+        <p:txBody>
+          <a:bodyPr lIns="0" tIns="0" rIns="0" bIns="0" anchor="ctr"/>
+          <a:lstStyle/>
+          <a:p>
+            <a:pPr algn="ctr"/>
+            <a:r>
+              <a:rPr lang="en-US" sz="1000" b="1" dirty="0">
+                <a:solidFill>
+                  <a:srgbClr val="1A1A2E"/>
+                </a:solidFill>
+                <a:latin typeface="Segoe UI"/>
+              </a:rPr>
+              <a:t>ChromaDB</a:t>
+            </a:r>
+          </a:p>
+          <a:p>
+            <a:pPr algn="ctr"/>
+            <a:r>
+              <a:rPr lang="en-US" sz="800" dirty="0">
+                <a:solidFill>
+                  <a:srgbClr val="666666"/>
+                </a:solidFill>
+                <a:latin typeface="Segoe UI"/>
+              </a:rPr>
+              <a:t>516K vector chunks</a:t>
+            </a:r>
+          </a:p>
+        </p:txBody>
+      </p:sp>
+      <p:sp>
+        <p:nvSpPr>
+          <p:cNvPr id="36" name="VC"/>
+          <p:cNvSpPr/>
+          <p:nvPr/>
+        </p:nvSpPr>
+        <p:spPr>
+          <a:xfrm>
+            <a:off x="9359900" y="3929380"/>
+            <a:ext cx="25400" cy="203200"/>
+          </a:xfrm>
+          <a:prstGeom prst="rect">
+            <a:avLst/>
+          </a:prstGeom>
+          <a:solidFill>
+            <a:srgbClr val="E67E22">
+              <a:alpha val="40000"/>
+            </a:srgbClr>
+          </a:solidFill>
+          <a:ln w="0">
+            <a:noFill/>
+          </a:ln>
+        </p:spPr>
+        <p:txBody>
+          <a:bodyPr/>
+          <a:lstStyle/>
+          <a:p>
+            <a:endParaRPr lang="en-US"/>
+          </a:p>
+        </p:txBody>
+      </p:sp>
+      <p:sp>
+        <p:nvSpPr>
+          <p:cNvPr id="37" name="AnsGen"/>
+          <p:cNvSpPr/>
+          <p:nvPr/>
+        </p:nvSpPr>
+        <p:spPr>
+          <a:xfrm>
+            <a:off x="10515600" y="2062480"/>
+            <a:ext cx="1270000" cy="3187700"/>
+          </a:xfrm>
+          <a:prstGeom prst="roundRect">
+            <a:avLst>
+              <a:gd name="adj" fmla="val 12000"/>
+            </a:avLst>
+          </a:prstGeom>
+          <a:solidFill>
+            <a:srgbClr val="1A1A2E"/>
+          </a:solidFill>
+          <a:ln w="0">
+            <a:noFill/>
+          </a:ln>
+          <a:effectLst>
+            <a:outerShdw blurRad="50000" dist="25000" dir="5400000" algn="tl" rotWithShape="0">
+              <a:srgbClr val="000000">
+                <a:alpha val="25000"/>
+              </a:srgbClr>
+            </a:outerShdw>
+          </a:effectLst>
+        </p:spPr>
+        <p:txBody>
+          <a:bodyPr lIns="76200" tIns="0" rIns="76200" bIns="0" anchor="ctr"/>
+          <a:lstStyle/>
+          <a:p>
+            <a:pPr algn="ctr"/>
+            <a:r>
+              <a:rPr lang="en-US" sz="1300" b="1" dirty="0">
+                <a:solidFill>
+                  <a:srgbClr val="FFFFFF"/>
+                </a:solidFill>
+                <a:latin typeface="Segoe UI"/>
+              </a:rPr>
+              <a:t>Answer</a:t>
+            </a:r>
+          </a:p>
+          <a:p>
+            <a:pPr algn="ctr"/>
+            <a:r>
+              <a:rPr lang="en-US" sz="1300" b="1" dirty="0">
+                <a:solidFill>
+                  <a:srgbClr val="FFFFFF"/>
+                </a:solidFill>
+                <a:latin typeface="Segoe UI"/>
+              </a:rPr>
+              <a:t>Generation</a:t>
+            </a:r>
+          </a:p>
+        </p:txBody>
+      </p:sp>
+      <p:sp>
+        <p:nvSpPr>
+          <p:cNvPr id="41" name="T3Sub"/>
+          <p:cNvSpPr/>
+          <p:nvPr/>
+        </p:nvSpPr>
+        <p:spPr>
+          <a:xfrm>
+            <a:off x="6705600" y="5186680"/>
+            <a:ext cx="1460500" cy="203200"/>
           </a:xfrm>
           <a:prstGeom prst="rect">
             <a:avLst/>
           </a:prstGeom>
           <a:noFill/>
-        </p:spPr>
-        <p:txBody>
-          <a:bodyPr wrap="square">
-            <a:spAutoFit/>
-          </a:bodyPr>
-          <a:lstStyle/>
-          <a:p>
-            <a:pPr>
-              <a:spcAft>
-                <a:spcPts val="1200"/>
-              </a:spcAft>
-            </a:pPr>
-            <a:r>
-              <a:rPr sz="2000" b="1">
+          <a:ln w="0">
+            <a:noFill/>
+          </a:ln>
+        </p:spPr>
+        <p:txBody>
+          <a:bodyPr lIns="0" tIns="0" rIns="0" bIns="0" anchor="t"/>
+          <a:lstStyle/>
+          <a:p>
+            <a:pPr algn="ctr"/>
+            <a:r>
+              <a:rPr lang="en-US" sz="800" i="1" dirty="0">
                 <a:solidFill>
-                  <a:srgbClr val="333333"/>
+                  <a:srgbClr val="999999"/>
                 </a:solidFill>
+                <a:latin typeface="Segoe UI"/>
               </a:rPr>
-              <a:t>AWQ4 W4A16 Marlin kernels</a:t>
-            </a:r>
-            <a:r>
-              <a:rPr sz="2000">
-                <a:solidFill>
-                  <a:srgbClr val="333333"/>
-                </a:solidFill>
-              </a:rPr>
-              <a:t> -- 4x weight compression, fused INT4xFP16 GEMM, zero accuracy loss</a:t>
-            </a:r>
-          </a:p>
-          <a:p>
-            <a:pPr>
-              <a:spcAft>
-                <a:spcPts val="1200"/>
-              </a:spcAft>
-            </a:pPr>
-            <a:r>
-              <a:rPr sz="2000" b="1">
-                <a:solidFill>
-                  <a:srgbClr val="333333"/>
-                </a:solidFill>
-              </a:rPr>
-              <a:t>Punica Multi-LoRA</a:t>
-            </a:r>
-            <a:r>
-              <a:rPr sz="2000">
-                <a:solidFill>
-                  <a:srgbClr val="333333"/>
-                </a:solidFill>
-              </a:rPr>
-              <a:t> -- 3 adapters in 1 GPU process via SGMV batched forward pass</a:t>
-            </a:r>
-          </a:p>
-          <a:p>
-            <a:pPr>
-              <a:spcAft>
-                <a:spcPts val="1200"/>
-              </a:spcAft>
-            </a:pPr>
-            <a:r>
-              <a:rPr sz="2000" b="1">
-                <a:solidFill>
-                  <a:srgbClr val="333333"/>
-                </a:solidFill>
-              </a:rPr>
-              <a:t>Cross-encoder on CPU</a:t>
-            </a:r>
-            <a:r>
-              <a:rPr sz="2000">
-                <a:solidFill>
-                  <a:srgbClr val="333333"/>
-                </a:solidFill>
-              </a:rPr>
-              <a:t> -- prevents GPU contention with vLLM; ~200ms for 50 candidates</a:t>
-            </a:r>
-          </a:p>
-          <a:p>
-            <a:pPr>
-              <a:spcAft>
-                <a:spcPts val="1200"/>
-              </a:spcAft>
-            </a:pPr>
-            <a:r>
-              <a:rPr sz="2000" b="1">
-                <a:solidFill>
-                  <a:srgbClr val="333333"/>
-                </a:solidFill>
-              </a:rPr>
-              <a:t>Rerank candidate cap (top-50)</a:t>
-            </a:r>
-            <a:r>
-              <a:rPr sz="2000">
-                <a:solidFill>
-                  <a:srgbClr val="333333"/>
-                </a:solidFill>
-              </a:rPr>
-              <a:t> -- limits cross-encoder work, prevents stalls at high concurrency</a:t>
-            </a:r>
-          </a:p>
-          <a:p>
-            <a:pPr>
-              <a:spcAft>
-                <a:spcPts val="1200"/>
-              </a:spcAft>
-            </a:pPr>
-            <a:r>
-              <a:rPr sz="2000" b="1">
-                <a:solidFill>
-                  <a:srgbClr val="333333"/>
-                </a:solidFill>
-              </a:rPr>
-              <a:t>BM25 index built once</a:t>
-            </a:r>
-            <a:r>
-              <a:rPr sz="2000">
-                <a:solidFill>
-                  <a:srgbClr val="333333"/>
-                </a:solidFill>
-              </a:rPr>
-              <a:t> at startup (516K docs), reused across all queries</a:t>
-            </a:r>
-          </a:p>
-          <a:p>
-            <a:pPr>
-              <a:spcAft>
-                <a:spcPts val="1200"/>
-              </a:spcAft>
-            </a:pPr>
-            <a:r>
-              <a:rPr sz="2000" b="1">
-                <a:solidFill>
-                  <a:srgbClr val="333333"/>
-                </a:solidFill>
-              </a:rPr>
-              <a:t>Domain-specific AWQ calibration</a:t>
-            </a:r>
-            <a:r>
-              <a:rPr sz="2000">
-                <a:solidFill>
-                  <a:srgbClr val="333333"/>
-                </a:solidFill>
-              </a:rPr>
-              <a:t> -- 128 financial conversation samples for quantization</a:t>
-            </a:r>
-          </a:p>
-        </p:txBody>
-      </p:sp>
-      <p:sp>
-        <p:nvSpPr>
-          <p:cNvPr id="5" name="TextBox 4"/>
+              <a:t>No retrieval needed</a:t>
+            </a:r>
+          </a:p>
+        </p:txBody>
+      </p:sp>
+      <p:sp>
+        <p:nvSpPr>
+          <p:cNvPr id="4" name="TextBox 3">
+            <a:extLst>
+              <a:ext uri="{FF2B5EF4-FFF2-40B4-BE49-F238E27FC236}">
+                <a16:creationId xmlns:a16="http://schemas.microsoft.com/office/drawing/2014/main" id="{AEE29435-F6F4-966F-E989-0380ECDC8FBF}"/>
+              </a:ext>
+            </a:extLst>
+          </p:cNvPr>
           <p:cNvSpPr txBox="1"/>
           <p:nvPr/>
         </p:nvSpPr>
         <p:spPr>
           <a:xfrm>
-            <a:off x="731520" y="5943600"/>
+            <a:off x="575096" y="6114627"/>
             <a:ext cx="10058400" cy="640080"/>
           </a:xfrm>
           <a:prstGeom prst="rect">
@@ -3523,12 +4868,18 @@
               </a:defRPr>
             </a:pPr>
             <a:r>
-              <a:t>Speculative decoding with 1B draft model was tested but HURT performance 25x due to HBM bandwidth contention on 3B target</a:t>
+              <a:rPr dirty="0"/>
+              <a:t>92 S&amp;P 100 tickers | 2019-2024 | ~120K text chunks + ~40K structured XBRL rows</a:t>
             </a:r>
           </a:p>
         </p:txBody>
       </p:sp>
     </p:spTree>
+    <p:extLst>
+      <p:ext uri="{BB962C8B-B14F-4D97-AF65-F5344CB8AC3E}">
+        <p14:creationId xmlns:p14="http://schemas.microsoft.com/office/powerpoint/2010/main" val="1628837693"/>
+      </p:ext>
+    </p:extLst>
   </p:cSld>
   <p:clrMapOvr>
     <a:masterClrMapping/>
@@ -3536,8 +4887,8 @@
 </p:sld>
 </file>
 
-<file path=ppt/slides/slide11.xml><?xml version="1.0" encoding="utf-8"?>
-<p:sld xmlns:a="http://schemas.openxmlformats.org/drawingml/2006/main" xmlns:p="http://schemas.openxmlformats.org/presentationml/2006/main" xmlns:r="http://schemas.openxmlformats.org/officeDocument/2006/relationships">
+<file path=ppt/slides/slide3.xml><?xml version="1.0" encoding="utf-8"?>
+<p:sld xmlns:a="http://schemas.openxmlformats.org/drawingml/2006/main" xmlns:r="http://schemas.openxmlformats.org/officeDocument/2006/relationships" xmlns:p="http://schemas.openxmlformats.org/presentationml/2006/main">
   <p:cSld>
     <p:bg>
       <p:bgPr>
@@ -3553,7 +4904,14 @@
         <p:cNvGrpSpPr/>
         <p:nvPr/>
       </p:nvGrpSpPr>
-      <p:grpSpPr/>
+      <p:grpSpPr>
+        <a:xfrm>
+          <a:off x="0" y="0"/>
+          <a:ext cx="0" cy="0"/>
+          <a:chOff x="0" y="0"/>
+          <a:chExt cx="0" cy="0"/>
+        </a:xfrm>
+      </p:grpSpPr>
       <p:sp>
         <p:nvSpPr>
           <p:cNvPr id="2" name="TextBox 1"/>
@@ -3562,8 +4920,8 @@
         </p:nvSpPr>
         <p:spPr>
           <a:xfrm>
-            <a:off x="731520" y="274320"/>
-            <a:ext cx="10058400" cy="731520"/>
+            <a:off x="731520" y="365760"/>
+            <a:ext cx="2079224" cy="584775"/>
           </a:xfrm>
           <a:prstGeom prst="rect">
             <a:avLst/>
@@ -3577,15 +4935,17 @@
           <a:lstStyle/>
           <a:p>
             <a:pPr>
-              <a:defRPr sz="3000" b="1">
+              <a:defRPr sz="3200" b="1">
                 <a:solidFill>
                   <a:srgbClr val="1A1A2E"/>
                 </a:solidFill>
               </a:defRPr>
             </a:pPr>
             <a:r>
-              <a:t>Final Results: AWQ4 vs Cloud (GPT-4o)</a:t>
-            </a:r>
+              <a:rPr lang="en-US" dirty="0"/>
+              <a:t>Motivation</a:t>
+            </a:r>
+            <a:endParaRPr dirty="0"/>
           </a:p>
         </p:txBody>
       </p:sp>
@@ -3597,7 +4957,7 @@
         </p:nvSpPr>
         <p:spPr>
           <a:xfrm>
-            <a:off x="731520" y="1005840"/>
+            <a:off x="731520" y="1188720"/>
             <a:ext cx="1371600" cy="54864"/>
           </a:xfrm>
           <a:prstGeom prst="rect">
@@ -3629,746 +4989,223 @@
           <a:lstStyle/>
           <a:p>
             <a:pPr algn="ctr"/>
-          </a:p>
-        </p:txBody>
-      </p:sp>
-      <p:graphicFrame>
-        <p:nvGraphicFramePr>
-          <p:cNvPr id="4" name="Table 3"/>
-          <p:cNvGraphicFramePr>
-            <a:graphicFrameLocks noGrp="1"/>
-          </p:cNvGraphicFramePr>
+            <a:endParaRPr/>
+          </a:p>
+        </p:txBody>
+      </p:sp>
+      <p:sp>
+        <p:nvSpPr>
+          <p:cNvPr id="4" name="TextBox 3"/>
+          <p:cNvSpPr txBox="1"/>
           <p:nvPr/>
-        </p:nvGraphicFramePr>
-        <p:xfrm>
-          <a:off x="731520" y="1371600"/>
-          <a:ext cx="10515600" cy="4572000"/>
-        </p:xfrm>
-        <a:graphic>
-          <a:graphicData uri="http://schemas.openxmlformats.org/drawingml/2006/table">
-            <a:tbl>
-              <a:tblPr firstRow="1" bandRow="1">
-                <a:tableStyleId>{5C22544A-7EE6-4342-B048-85BDC9FD1C3A}</a:tableStyleId>
-              </a:tblPr>
-              <a:tblGrid>
-                <a:gridCol w="3505200"/>
-                <a:gridCol w="3505200"/>
-                <a:gridCol w="3505200"/>
-              </a:tblGrid>
-              <a:tr h="457200">
-                <a:tc>
-                  <a:txBody>
-                    <a:bodyPr/>
-                    <a:lstStyle/>
-                    <a:p>
-                      <a:pPr algn="ctr">
-                        <a:defRPr sz="1600" b="1">
-                          <a:solidFill>
-                            <a:srgbClr val="FFFFFF"/>
-                          </a:solidFill>
-                        </a:defRPr>
-                      </a:pPr>
-                      <a:r>
-                        <a:t>Metric</a:t>
-                      </a:r>
-                    </a:p>
-                  </a:txBody>
-                  <a:tcPr anchor="ctr">
-                    <a:solidFill>
-                      <a:srgbClr val="006DFD"/>
-                    </a:solidFill>
-                  </a:tcPr>
-                </a:tc>
-                <a:tc>
-                  <a:txBody>
-                    <a:bodyPr/>
-                    <a:lstStyle/>
-                    <a:p>
-                      <a:pPr algn="ctr">
-                        <a:defRPr sz="1600" b="1">
-                          <a:solidFill>
-                            <a:srgbClr val="FFFFFF"/>
-                          </a:solidFill>
-                        </a:defRPr>
-                      </a:pPr>
-                      <a:r>
-                        <a:t>AWQ4 (Local)</a:t>
-                      </a:r>
-                    </a:p>
-                  </a:txBody>
-                  <a:tcPr anchor="ctr">
-                    <a:solidFill>
-                      <a:srgbClr val="006DFD"/>
-                    </a:solidFill>
-                  </a:tcPr>
-                </a:tc>
-                <a:tc>
-                  <a:txBody>
-                    <a:bodyPr/>
-                    <a:lstStyle/>
-                    <a:p>
-                      <a:pPr algn="ctr">
-                        <a:defRPr sz="1600" b="1">
-                          <a:solidFill>
-                            <a:srgbClr val="FFFFFF"/>
-                          </a:solidFill>
-                        </a:defRPr>
-                      </a:pPr>
-                      <a:r>
-                        <a:t>GPT-4o (API)</a:t>
-                      </a:r>
-                    </a:p>
-                  </a:txBody>
-                  <a:tcPr anchor="ctr">
-                    <a:solidFill>
-                      <a:srgbClr val="006DFD"/>
-                    </a:solidFill>
-                  </a:tcPr>
-                </a:tc>
-              </a:tr>
-              <a:tr h="457200">
-                <a:tc>
-                  <a:txBody>
-                    <a:bodyPr/>
-                    <a:lstStyle/>
-                    <a:p>
-                      <a:pPr algn="ctr">
-                        <a:defRPr sz="1500">
-                          <a:solidFill>
-                            <a:srgbClr val="333333"/>
-                          </a:solidFill>
-                        </a:defRPr>
-                      </a:pPr>
-                      <a:r>
-                        <a:t>Composite Accuracy</a:t>
-                      </a:r>
-                    </a:p>
-                  </a:txBody>
-                  <a:tcPr anchor="ctr">
-                    <a:solidFill>
-                      <a:srgbClr val="F0F4F8"/>
-                    </a:solidFill>
-                  </a:tcPr>
-                </a:tc>
-                <a:tc>
-                  <a:txBody>
-                    <a:bodyPr/>
-                    <a:lstStyle/>
-                    <a:p>
-                      <a:pPr algn="ctr">
-                        <a:defRPr sz="1500">
-                          <a:solidFill>
-                            <a:srgbClr val="333333"/>
-                          </a:solidFill>
-                        </a:defRPr>
-                      </a:pPr>
-                      <a:r>
-                        <a:t>0.9038</a:t>
-                      </a:r>
-                    </a:p>
-                  </a:txBody>
-                  <a:tcPr anchor="ctr">
-                    <a:solidFill>
-                      <a:srgbClr val="F0F4F8"/>
-                    </a:solidFill>
-                  </a:tcPr>
-                </a:tc>
-                <a:tc>
-                  <a:txBody>
-                    <a:bodyPr/>
-                    <a:lstStyle/>
-                    <a:p>
-                      <a:pPr algn="ctr">
-                        <a:defRPr sz="1500">
-                          <a:solidFill>
-                            <a:srgbClr val="333333"/>
-                          </a:solidFill>
-                        </a:defRPr>
-                      </a:pPr>
-                      <a:r>
-                        <a:t>0.6467</a:t>
-                      </a:r>
-                    </a:p>
-                  </a:txBody>
-                  <a:tcPr anchor="ctr">
-                    <a:solidFill>
-                      <a:srgbClr val="F0F4F8"/>
-                    </a:solidFill>
-                  </a:tcPr>
-                </a:tc>
-              </a:tr>
-              <a:tr h="457200">
-                <a:tc>
-                  <a:txBody>
-                    <a:bodyPr/>
-                    <a:lstStyle/>
-                    <a:p>
-                      <a:pPr algn="ctr">
-                        <a:defRPr sz="1500">
-                          <a:solidFill>
-                            <a:srgbClr val="333333"/>
-                          </a:solidFill>
-                        </a:defRPr>
-                      </a:pPr>
-                      <a:r>
-                        <a:t>Value Accuracy</a:t>
-                      </a:r>
-                    </a:p>
-                  </a:txBody>
-                  <a:tcPr anchor="ctr">
-                    <a:solidFill>
-                      <a:srgbClr val="FFFFFF"/>
-                    </a:solidFill>
-                  </a:tcPr>
-                </a:tc>
-                <a:tc>
-                  <a:txBody>
-                    <a:bodyPr/>
-                    <a:lstStyle/>
-                    <a:p>
-                      <a:pPr algn="ctr">
-                        <a:defRPr sz="1500">
-                          <a:solidFill>
-                            <a:srgbClr val="333333"/>
-                          </a:solidFill>
-                        </a:defRPr>
-                      </a:pPr>
-                      <a:r>
-                        <a:t>100%</a:t>
-                      </a:r>
-                    </a:p>
-                  </a:txBody>
-                  <a:tcPr anchor="ctr">
-                    <a:solidFill>
-                      <a:srgbClr val="FFFFFF"/>
-                    </a:solidFill>
-                  </a:tcPr>
-                </a:tc>
-                <a:tc>
-                  <a:txBody>
-                    <a:bodyPr/>
-                    <a:lstStyle/>
-                    <a:p>
-                      <a:pPr algn="ctr">
-                        <a:defRPr sz="1500">
-                          <a:solidFill>
-                            <a:srgbClr val="333333"/>
-                          </a:solidFill>
-                        </a:defRPr>
-                      </a:pPr>
-                      <a:r>
-                        <a:t>42.9%</a:t>
-                      </a:r>
-                    </a:p>
-                  </a:txBody>
-                  <a:tcPr anchor="ctr">
-                    <a:solidFill>
-                      <a:srgbClr val="FFFFFF"/>
-                    </a:solidFill>
-                  </a:tcPr>
-                </a:tc>
-              </a:tr>
-              <a:tr h="457200">
-                <a:tc>
-                  <a:txBody>
-                    <a:bodyPr/>
-                    <a:lstStyle/>
-                    <a:p>
-                      <a:pPr algn="ctr">
-                        <a:defRPr sz="1500">
-                          <a:solidFill>
-                            <a:srgbClr val="333333"/>
-                          </a:solidFill>
-                        </a:defRPr>
-                      </a:pPr>
-                      <a:r>
-                        <a:t>Intent Accuracy</a:t>
-                      </a:r>
-                    </a:p>
-                  </a:txBody>
-                  <a:tcPr anchor="ctr">
-                    <a:solidFill>
-                      <a:srgbClr val="F0F4F8"/>
-                    </a:solidFill>
-                  </a:tcPr>
-                </a:tc>
-                <a:tc>
-                  <a:txBody>
-                    <a:bodyPr/>
-                    <a:lstStyle/>
-                    <a:p>
-                      <a:pPr algn="ctr">
-                        <a:defRPr sz="1500">
-                          <a:solidFill>
-                            <a:srgbClr val="333333"/>
-                          </a:solidFill>
-                        </a:defRPr>
-                      </a:pPr>
-                      <a:r>
-                        <a:t>100%</a:t>
-                      </a:r>
-                    </a:p>
-                  </a:txBody>
-                  <a:tcPr anchor="ctr">
-                    <a:solidFill>
-                      <a:srgbClr val="F0F4F8"/>
-                    </a:solidFill>
-                  </a:tcPr>
-                </a:tc>
-                <a:tc>
-                  <a:txBody>
-                    <a:bodyPr/>
-                    <a:lstStyle/>
-                    <a:p>
-                      <a:pPr algn="ctr">
-                        <a:defRPr sz="1500">
-                          <a:solidFill>
-                            <a:srgbClr val="333333"/>
-                          </a:solidFill>
-                        </a:defRPr>
-                      </a:pPr>
-                      <a:r>
-                        <a:t>100%</a:t>
-                      </a:r>
-                    </a:p>
-                  </a:txBody>
-                  <a:tcPr anchor="ctr">
-                    <a:solidFill>
-                      <a:srgbClr val="F0F4F8"/>
-                    </a:solidFill>
-                  </a:tcPr>
-                </a:tc>
-              </a:tr>
-              <a:tr h="457200">
-                <a:tc>
-                  <a:txBody>
-                    <a:bodyPr/>
-                    <a:lstStyle/>
-                    <a:p>
-                      <a:pPr algn="ctr">
-                        <a:defRPr sz="1500">
-                          <a:solidFill>
-                            <a:srgbClr val="333333"/>
-                          </a:solidFill>
-                        </a:defRPr>
-                      </a:pPr>
-                      <a:r>
-                        <a:t>Keyword Hit Rate</a:t>
-                      </a:r>
-                    </a:p>
-                  </a:txBody>
-                  <a:tcPr anchor="ctr">
-                    <a:solidFill>
-                      <a:srgbClr val="FFFFFF"/>
-                    </a:solidFill>
-                  </a:tcPr>
-                </a:tc>
-                <a:tc>
-                  <a:txBody>
-                    <a:bodyPr/>
-                    <a:lstStyle/>
-                    <a:p>
-                      <a:pPr algn="ctr">
-                        <a:defRPr sz="1500">
-                          <a:solidFill>
-                            <a:srgbClr val="333333"/>
-                          </a:solidFill>
-                        </a:defRPr>
-                      </a:pPr>
-                      <a:r>
-                        <a:t>93.9%</a:t>
-                      </a:r>
-                    </a:p>
-                  </a:txBody>
-                  <a:tcPr anchor="ctr">
-                    <a:solidFill>
-                      <a:srgbClr val="FFFFFF"/>
-                    </a:solidFill>
-                  </a:tcPr>
-                </a:tc>
-                <a:tc>
-                  <a:txBody>
-                    <a:bodyPr/>
-                    <a:lstStyle/>
-                    <a:p>
-                      <a:pPr algn="ctr">
-                        <a:defRPr sz="1500">
-                          <a:solidFill>
-                            <a:srgbClr val="333333"/>
-                          </a:solidFill>
-                        </a:defRPr>
-                      </a:pPr>
-                      <a:r>
-                        <a:t>75.7%</a:t>
-                      </a:r>
-                    </a:p>
-                  </a:txBody>
-                  <a:tcPr anchor="ctr">
-                    <a:solidFill>
-                      <a:srgbClr val="FFFFFF"/>
-                    </a:solidFill>
-                  </a:tcPr>
-                </a:tc>
-              </a:tr>
-              <a:tr h="457200">
-                <a:tc>
-                  <a:txBody>
-                    <a:bodyPr/>
-                    <a:lstStyle/>
-                    <a:p>
-                      <a:pPr algn="ctr">
-                        <a:defRPr sz="1500">
-                          <a:solidFill>
-                            <a:srgbClr val="333333"/>
-                          </a:solidFill>
-                        </a:defRPr>
-                      </a:pPr>
-                      <a:r>
-                        <a:t>Fluency (1-5)</a:t>
-                      </a:r>
-                    </a:p>
-                  </a:txBody>
-                  <a:tcPr anchor="ctr">
-                    <a:solidFill>
-                      <a:srgbClr val="F0F4F8"/>
-                    </a:solidFill>
-                  </a:tcPr>
-                </a:tc>
-                <a:tc>
-                  <a:txBody>
-                    <a:bodyPr/>
-                    <a:lstStyle/>
-                    <a:p>
-                      <a:pPr algn="ctr">
-                        <a:defRPr sz="1500">
-                          <a:solidFill>
-                            <a:srgbClr val="333333"/>
-                          </a:solidFill>
-                        </a:defRPr>
-                      </a:pPr>
-                      <a:r>
-                        <a:t>3.4</a:t>
-                      </a:r>
-                    </a:p>
-                  </a:txBody>
-                  <a:tcPr anchor="ctr">
-                    <a:solidFill>
-                      <a:srgbClr val="F0F4F8"/>
-                    </a:solidFill>
-                  </a:tcPr>
-                </a:tc>
-                <a:tc>
-                  <a:txBody>
-                    <a:bodyPr/>
-                    <a:lstStyle/>
-                    <a:p>
-                      <a:pPr algn="ctr">
-                        <a:defRPr sz="1500">
-                          <a:solidFill>
-                            <a:srgbClr val="333333"/>
-                          </a:solidFill>
-                        </a:defRPr>
-                      </a:pPr>
-                      <a:r>
-                        <a:t>4.7</a:t>
-                      </a:r>
-                    </a:p>
-                  </a:txBody>
-                  <a:tcPr anchor="ctr">
-                    <a:solidFill>
-                      <a:srgbClr val="F0F4F8"/>
-                    </a:solidFill>
-                  </a:tcPr>
-                </a:tc>
-              </a:tr>
-              <a:tr h="457200">
-                <a:tc>
-                  <a:txBody>
-                    <a:bodyPr/>
-                    <a:lstStyle/>
-                    <a:p>
-                      <a:pPr algn="ctr">
-                        <a:defRPr sz="1500">
-                          <a:solidFill>
-                            <a:srgbClr val="333333"/>
-                          </a:solidFill>
-                        </a:defRPr>
-                      </a:pPr>
-                      <a:r>
-                        <a:t>Latency p50 (c=1)</a:t>
-                      </a:r>
-                    </a:p>
-                  </a:txBody>
-                  <a:tcPr anchor="ctr">
-                    <a:solidFill>
-                      <a:srgbClr val="FFFFFF"/>
-                    </a:solidFill>
-                  </a:tcPr>
-                </a:tc>
-                <a:tc>
-                  <a:txBody>
-                    <a:bodyPr/>
-                    <a:lstStyle/>
-                    <a:p>
-                      <a:pPr algn="ctr">
-                        <a:defRPr sz="1500">
-                          <a:solidFill>
-                            <a:srgbClr val="333333"/>
-                          </a:solidFill>
-                        </a:defRPr>
-                      </a:pPr>
-                      <a:r>
-                        <a:t>0.53s</a:t>
-                      </a:r>
-                    </a:p>
-                  </a:txBody>
-                  <a:tcPr anchor="ctr">
-                    <a:solidFill>
-                      <a:srgbClr val="FFFFFF"/>
-                    </a:solidFill>
-                  </a:tcPr>
-                </a:tc>
-                <a:tc>
-                  <a:txBody>
-                    <a:bodyPr/>
-                    <a:lstStyle/>
-                    <a:p>
-                      <a:pPr algn="ctr">
-                        <a:defRPr sz="1500">
-                          <a:solidFill>
-                            <a:srgbClr val="333333"/>
-                          </a:solidFill>
-                        </a:defRPr>
-                      </a:pPr>
-                      <a:r>
-                        <a:t>0.85s</a:t>
-                      </a:r>
-                    </a:p>
-                  </a:txBody>
-                  <a:tcPr anchor="ctr">
-                    <a:solidFill>
-                      <a:srgbClr val="FFFFFF"/>
-                    </a:solidFill>
-                  </a:tcPr>
-                </a:tc>
-              </a:tr>
-              <a:tr h="457200">
-                <a:tc>
-                  <a:txBody>
-                    <a:bodyPr/>
-                    <a:lstStyle/>
-                    <a:p>
-                      <a:pPr algn="ctr">
-                        <a:defRPr sz="1500">
-                          <a:solidFill>
-                            <a:srgbClr val="333333"/>
-                          </a:solidFill>
-                        </a:defRPr>
-                      </a:pPr>
-                      <a:r>
-                        <a:t>Peak QPS</a:t>
-                      </a:r>
-                    </a:p>
-                  </a:txBody>
-                  <a:tcPr anchor="ctr">
-                    <a:solidFill>
-                      <a:srgbClr val="F0F4F8"/>
-                    </a:solidFill>
-                  </a:tcPr>
-                </a:tc>
-                <a:tc>
-                  <a:txBody>
-                    <a:bodyPr/>
-                    <a:lstStyle/>
-                    <a:p>
-                      <a:pPr algn="ctr">
-                        <a:defRPr sz="1500">
-                          <a:solidFill>
-                            <a:srgbClr val="333333"/>
-                          </a:solidFill>
-                        </a:defRPr>
-                      </a:pPr>
-                      <a:r>
-                        <a:t>3.46 (c=16)</a:t>
-                      </a:r>
-                    </a:p>
-                  </a:txBody>
-                  <a:tcPr anchor="ctr">
-                    <a:solidFill>
-                      <a:srgbClr val="F0F4F8"/>
-                    </a:solidFill>
-                  </a:tcPr>
-                </a:tc>
-                <a:tc>
-                  <a:txBody>
-                    <a:bodyPr/>
-                    <a:lstStyle/>
-                    <a:p>
-                      <a:pPr algn="ctr">
-                        <a:defRPr sz="1500">
-                          <a:solidFill>
-                            <a:srgbClr val="333333"/>
-                          </a:solidFill>
-                        </a:defRPr>
-                      </a:pPr>
-                      <a:r>
-                        <a:t>7.03 (c=8)</a:t>
-                      </a:r>
-                    </a:p>
-                  </a:txBody>
-                  <a:tcPr anchor="ctr">
-                    <a:solidFill>
-                      <a:srgbClr val="F0F4F8"/>
-                    </a:solidFill>
-                  </a:tcPr>
-                </a:tc>
-              </a:tr>
-              <a:tr h="457200">
-                <a:tc>
-                  <a:txBody>
-                    <a:bodyPr/>
-                    <a:lstStyle/>
-                    <a:p>
-                      <a:pPr algn="ctr">
-                        <a:defRPr sz="1500">
-                          <a:solidFill>
-                            <a:srgbClr val="333333"/>
-                          </a:solidFill>
-                        </a:defRPr>
-                      </a:pPr>
-                      <a:r>
-                        <a:t>Cost per 1K queries</a:t>
-                      </a:r>
-                    </a:p>
-                  </a:txBody>
-                  <a:tcPr anchor="ctr">
-                    <a:solidFill>
-                      <a:srgbClr val="FFFFFF"/>
-                    </a:solidFill>
-                  </a:tcPr>
-                </a:tc>
-                <a:tc>
-                  <a:txBody>
-                    <a:bodyPr/>
-                    <a:lstStyle/>
-                    <a:p>
-                      <a:pPr algn="ctr">
-                        <a:defRPr sz="1500">
-                          <a:solidFill>
-                            <a:srgbClr val="333333"/>
-                          </a:solidFill>
-                        </a:defRPr>
-                      </a:pPr>
-                      <a:r>
-                        <a:t>~$0</a:t>
-                      </a:r>
-                    </a:p>
-                  </a:txBody>
-                  <a:tcPr anchor="ctr">
-                    <a:solidFill>
-                      <a:srgbClr val="FFFFFF"/>
-                    </a:solidFill>
-                  </a:tcPr>
-                </a:tc>
-                <a:tc>
-                  <a:txBody>
-                    <a:bodyPr/>
-                    <a:lstStyle/>
-                    <a:p>
-                      <a:pPr algn="ctr">
-                        <a:defRPr sz="1500">
-                          <a:solidFill>
-                            <a:srgbClr val="333333"/>
-                          </a:solidFill>
-                        </a:defRPr>
-                      </a:pPr>
-                      <a:r>
-                        <a:t>~$15-30</a:t>
-                      </a:r>
-                    </a:p>
-                  </a:txBody>
-                  <a:tcPr anchor="ctr">
-                    <a:solidFill>
-                      <a:srgbClr val="FFFFFF"/>
-                    </a:solidFill>
-                  </a:tcPr>
-                </a:tc>
-              </a:tr>
-              <a:tr h="457200">
-                <a:tc>
-                  <a:txBody>
-                    <a:bodyPr/>
-                    <a:lstStyle/>
-                    <a:p>
-                      <a:pPr algn="ctr">
-                        <a:defRPr sz="1500">
-                          <a:solidFill>
-                            <a:srgbClr val="333333"/>
-                          </a:solidFill>
-                        </a:defRPr>
-                      </a:pPr>
-                      <a:r>
-                        <a:t>Data Privacy</a:t>
-                      </a:r>
-                    </a:p>
-                  </a:txBody>
-                  <a:tcPr anchor="ctr">
-                    <a:solidFill>
-                      <a:srgbClr val="F0F4F8"/>
-                    </a:solidFill>
-                  </a:tcPr>
-                </a:tc>
-                <a:tc>
-                  <a:txBody>
-                    <a:bodyPr/>
-                    <a:lstStyle/>
-                    <a:p>
-                      <a:pPr algn="ctr">
-                        <a:defRPr sz="1500">
-                          <a:solidFill>
-                            <a:srgbClr val="333333"/>
-                          </a:solidFill>
-                        </a:defRPr>
-                      </a:pPr>
-                      <a:r>
-                        <a:t>Fully local</a:t>
-                      </a:r>
-                    </a:p>
-                  </a:txBody>
-                  <a:tcPr anchor="ctr">
-                    <a:solidFill>
-                      <a:srgbClr val="F0F4F8"/>
-                    </a:solidFill>
-                  </a:tcPr>
-                </a:tc>
-                <a:tc>
-                  <a:txBody>
-                    <a:bodyPr/>
-                    <a:lstStyle/>
-                    <a:p>
-                      <a:pPr algn="ctr">
-                        <a:defRPr sz="1500">
-                          <a:solidFill>
-                            <a:srgbClr val="333333"/>
-                          </a:solidFill>
-                        </a:defRPr>
-                      </a:pPr>
-                      <a:r>
-                        <a:t>Sent to OpenAI</a:t>
-                      </a:r>
-                    </a:p>
-                  </a:txBody>
-                  <a:tcPr anchor="ctr">
-                    <a:solidFill>
-                      <a:srgbClr val="F0F4F8"/>
-                    </a:solidFill>
-                  </a:tcPr>
-                </a:tc>
-              </a:tr>
-            </a:tbl>
-          </a:graphicData>
-        </a:graphic>
-      </p:graphicFrame>
+        </p:nvSpPr>
+        <p:spPr>
+          <a:xfrm>
+            <a:off x="731520" y="1463040"/>
+            <a:ext cx="10515600" cy="4555093"/>
+          </a:xfrm>
+          <a:prstGeom prst="rect">
+            <a:avLst/>
+          </a:prstGeom>
+          <a:noFill/>
+        </p:spPr>
+        <p:txBody>
+          <a:bodyPr wrap="square">
+            <a:spAutoFit/>
+          </a:bodyPr>
+          <a:lstStyle/>
+          <a:p>
+            <a:pPr>
+              <a:spcAft>
+                <a:spcPts val="1200"/>
+              </a:spcAft>
+              <a:defRPr sz="2000">
+                <a:solidFill>
+                  <a:srgbClr val="333333"/>
+                </a:solidFill>
+              </a:defRPr>
+            </a:pPr>
+            <a:r>
+              <a:rPr lang="en-US" b="1" dirty="0"/>
+              <a:t>Accuracy:</a:t>
+            </a:r>
+          </a:p>
+          <a:p>
+            <a:pPr>
+              <a:spcAft>
+                <a:spcPts val="1200"/>
+              </a:spcAft>
+            </a:pPr>
+            <a:r>
+              <a:rPr sz="2000" dirty="0">
+                <a:solidFill>
+                  <a:srgbClr val="333333"/>
+                </a:solidFill>
+              </a:rPr>
+              <a:t>Cloud LLM APIs (GPT-4o) have </a:t>
+            </a:r>
+            <a:r>
+              <a:rPr sz="2000" b="1" dirty="0">
+                <a:solidFill>
+                  <a:srgbClr val="333333"/>
+                </a:solidFill>
+              </a:rPr>
+              <a:t>knowledge cutoff issues</a:t>
+            </a:r>
+            <a:r>
+              <a:rPr sz="2000" dirty="0">
+                <a:solidFill>
+                  <a:srgbClr val="333333"/>
+                </a:solidFill>
+              </a:rPr>
+              <a:t> -- miss recent FY2023 data</a:t>
+            </a:r>
+          </a:p>
+          <a:p>
+            <a:pPr>
+              <a:spcAft>
+                <a:spcPts val="1200"/>
+              </a:spcAft>
+            </a:pPr>
+            <a:r>
+              <a:rPr sz="2000" dirty="0">
+                <a:solidFill>
+                  <a:srgbClr val="333333"/>
+                </a:solidFill>
+              </a:rPr>
+              <a:t>Cloud APIs </a:t>
+            </a:r>
+            <a:r>
+              <a:rPr sz="2000" b="1" dirty="0">
+                <a:solidFill>
+                  <a:srgbClr val="333333"/>
+                </a:solidFill>
+              </a:rPr>
+              <a:t>hallucinate financial numbers</a:t>
+            </a:r>
+            <a:r>
+              <a:rPr sz="2000" dirty="0">
+                <a:solidFill>
+                  <a:srgbClr val="333333"/>
+                </a:solidFill>
+              </a:rPr>
+              <a:t> -- 42.9% value accuracy on our benchmark</a:t>
+            </a:r>
+            <a:endParaRPr lang="en-US" sz="2000" dirty="0">
+              <a:solidFill>
+                <a:srgbClr val="333333"/>
+              </a:solidFill>
+            </a:endParaRPr>
+          </a:p>
+          <a:p>
+            <a:pPr>
+              <a:spcAft>
+                <a:spcPts val="1200"/>
+              </a:spcAft>
+            </a:pPr>
+            <a:r>
+              <a:rPr lang="en-US" sz="2000" b="1" dirty="0">
+                <a:solidFill>
+                  <a:srgbClr val="333333"/>
+                </a:solidFill>
+              </a:rPr>
+              <a:t>Privacy:</a:t>
+            </a:r>
+            <a:endParaRPr sz="2000" b="1" dirty="0">
+              <a:solidFill>
+                <a:srgbClr val="333333"/>
+              </a:solidFill>
+            </a:endParaRPr>
+          </a:p>
+          <a:p>
+            <a:pPr>
+              <a:spcAft>
+                <a:spcPts val="1200"/>
+              </a:spcAft>
+              <a:defRPr sz="2000">
+                <a:solidFill>
+                  <a:srgbClr val="333333"/>
+                </a:solidFill>
+              </a:defRPr>
+            </a:pPr>
+            <a:r>
+              <a:rPr lang="en-US" dirty="0"/>
+              <a:t>S</a:t>
+            </a:r>
+            <a:r>
+              <a:rPr dirty="0"/>
+              <a:t>ending proprietary financial queries to external APIs</a:t>
+            </a:r>
+            <a:endParaRPr lang="en-US" dirty="0"/>
+          </a:p>
+          <a:p>
+            <a:pPr>
+              <a:spcAft>
+                <a:spcPts val="1200"/>
+              </a:spcAft>
+              <a:defRPr sz="2000">
+                <a:solidFill>
+                  <a:srgbClr val="333333"/>
+                </a:solidFill>
+              </a:defRPr>
+            </a:pPr>
+            <a:r>
+              <a:rPr lang="en-US" b="1" dirty="0"/>
+              <a:t>Cost:</a:t>
+            </a:r>
+            <a:endParaRPr b="1" dirty="0"/>
+          </a:p>
+          <a:p>
+            <a:pPr>
+              <a:spcAft>
+                <a:spcPts val="1200"/>
+              </a:spcAft>
+            </a:pPr>
+            <a:r>
+              <a:rPr lang="en-US" sz="2000" dirty="0"/>
+              <a:t>GPT-4o: $2.50 / 1M input tokens and $10 / 1M output tokens</a:t>
+            </a:r>
+          </a:p>
+          <a:p>
+            <a:pPr>
+              <a:spcAft>
+                <a:spcPts val="1200"/>
+              </a:spcAft>
+            </a:pPr>
+            <a:r>
+              <a:rPr lang="en-US" sz="2000" b="1" dirty="0">
+                <a:solidFill>
+                  <a:srgbClr val="FF0000"/>
+                </a:solidFill>
+              </a:rPr>
+              <a:t>Speed:</a:t>
+            </a:r>
+          </a:p>
+          <a:p>
+            <a:pPr>
+              <a:spcAft>
+                <a:spcPts val="1200"/>
+              </a:spcAft>
+            </a:pPr>
+            <a:r>
+              <a:rPr lang="en-US" sz="2000" dirty="0"/>
+              <a:t>Run Three different module in a local device with 26GB memory space is challenge.</a:t>
+            </a:r>
+          </a:p>
+          <a:p>
+            <a:pPr>
+              <a:spcAft>
+                <a:spcPts val="1200"/>
+              </a:spcAft>
+            </a:pPr>
+            <a:endParaRPr sz="2000" dirty="0">
+              <a:solidFill>
+                <a:srgbClr val="333333"/>
+              </a:solidFill>
+            </a:endParaRPr>
+          </a:p>
+        </p:txBody>
+      </p:sp>
     </p:spTree>
   </p:cSld>
   <p:clrMapOvr>
@@ -4377,8 +5214,249 @@
 </p:sld>
 </file>
 
-<file path=ppt/slides/slide12.xml><?xml version="1.0" encoding="utf-8"?>
-<p:sld xmlns:a="http://schemas.openxmlformats.org/drawingml/2006/main" xmlns:p="http://schemas.openxmlformats.org/presentationml/2006/main" xmlns:r="http://schemas.openxmlformats.org/officeDocument/2006/relationships">
+<file path=ppt/slides/slide4.xml><?xml version="1.0" encoding="utf-8"?>
+<p:sld xmlns:a="http://schemas.openxmlformats.org/drawingml/2006/main" xmlns:r="http://schemas.openxmlformats.org/officeDocument/2006/relationships" xmlns:p="http://schemas.openxmlformats.org/presentationml/2006/main">
+  <p:cSld>
+    <p:spTree>
+      <p:nvGrpSpPr>
+        <p:cNvPr id="1" name="">
+          <a:extLst>
+            <a:ext uri="{FF2B5EF4-FFF2-40B4-BE49-F238E27FC236}">
+              <a16:creationId xmlns:a16="http://schemas.microsoft.com/office/drawing/2014/main" id="{18827DB6-8C17-B45C-62ED-541CA714F428}"/>
+            </a:ext>
+          </a:extLst>
+        </p:cNvPr>
+        <p:cNvGrpSpPr/>
+        <p:nvPr/>
+      </p:nvGrpSpPr>
+      <p:grpSpPr>
+        <a:xfrm>
+          <a:off x="0" y="0"/>
+          <a:ext cx="0" cy="0"/>
+          <a:chOff x="0" y="0"/>
+          <a:chExt cx="0" cy="0"/>
+        </a:xfrm>
+      </p:grpSpPr>
+      <p:sp>
+        <p:nvSpPr>
+          <p:cNvPr id="2" name="TextBox 1">
+            <a:extLst>
+              <a:ext uri="{FF2B5EF4-FFF2-40B4-BE49-F238E27FC236}">
+                <a16:creationId xmlns:a16="http://schemas.microsoft.com/office/drawing/2014/main" id="{8D08F50E-3B45-62DE-D865-16FCBB00166D}"/>
+              </a:ext>
+            </a:extLst>
+          </p:cNvPr>
+          <p:cNvSpPr txBox="1"/>
+          <p:nvPr/>
+        </p:nvSpPr>
+        <p:spPr>
+          <a:xfrm>
+            <a:off x="731520" y="365760"/>
+            <a:ext cx="7924800" cy="584775"/>
+          </a:xfrm>
+          <a:prstGeom prst="rect">
+            <a:avLst/>
+          </a:prstGeom>
+          <a:noFill/>
+        </p:spPr>
+        <p:txBody>
+          <a:bodyPr wrap="square">
+            <a:spAutoFit/>
+          </a:bodyPr>
+          <a:lstStyle/>
+          <a:p>
+            <a:pPr>
+              <a:defRPr sz="3200" b="1">
+                <a:solidFill>
+                  <a:srgbClr val="1A1A2E"/>
+                </a:solidFill>
+              </a:defRPr>
+            </a:pPr>
+            <a:r>
+              <a:rPr lang="en-US" dirty="0"/>
+              <a:t>vLLM Solve the Problem:</a:t>
+            </a:r>
+            <a:endParaRPr dirty="0"/>
+          </a:p>
+        </p:txBody>
+      </p:sp>
+      <p:sp>
+        <p:nvSpPr>
+          <p:cNvPr id="3" name="Rectangle 2">
+            <a:extLst>
+              <a:ext uri="{FF2B5EF4-FFF2-40B4-BE49-F238E27FC236}">
+                <a16:creationId xmlns:a16="http://schemas.microsoft.com/office/drawing/2014/main" id="{024A7C75-BD40-3FB0-D576-C021E4D5B607}"/>
+              </a:ext>
+            </a:extLst>
+          </p:cNvPr>
+          <p:cNvSpPr/>
+          <p:nvPr/>
+        </p:nvSpPr>
+        <p:spPr>
+          <a:xfrm>
+            <a:off x="731520" y="1188720"/>
+            <a:ext cx="1371600" cy="54864"/>
+          </a:xfrm>
+          <a:prstGeom prst="rect">
+            <a:avLst/>
+          </a:prstGeom>
+          <a:solidFill>
+            <a:srgbClr val="006DFD"/>
+          </a:solidFill>
+          <a:ln>
+            <a:noFill/>
+          </a:ln>
+        </p:spPr>
+        <p:style>
+          <a:lnRef idx="1">
+            <a:schemeClr val="accent1"/>
+          </a:lnRef>
+          <a:fillRef idx="3">
+            <a:schemeClr val="accent1"/>
+          </a:fillRef>
+          <a:effectRef idx="2">
+            <a:schemeClr val="accent1"/>
+          </a:effectRef>
+          <a:fontRef idx="minor">
+            <a:schemeClr val="lt1"/>
+          </a:fontRef>
+        </p:style>
+        <p:txBody>
+          <a:bodyPr rtlCol="0" anchor="ctr"/>
+          <a:lstStyle/>
+          <a:p>
+            <a:pPr algn="ctr"/>
+            <a:endParaRPr/>
+          </a:p>
+        </p:txBody>
+      </p:sp>
+      <p:sp>
+        <p:nvSpPr>
+          <p:cNvPr id="5" name="TextBox 4">
+            <a:extLst>
+              <a:ext uri="{FF2B5EF4-FFF2-40B4-BE49-F238E27FC236}">
+                <a16:creationId xmlns:a16="http://schemas.microsoft.com/office/drawing/2014/main" id="{AAA5AA6A-124B-7731-4E38-24783D64DE52}"/>
+              </a:ext>
+            </a:extLst>
+          </p:cNvPr>
+          <p:cNvSpPr txBox="1"/>
+          <p:nvPr/>
+        </p:nvSpPr>
+        <p:spPr>
+          <a:xfrm>
+            <a:off x="4646506" y="2602654"/>
+            <a:ext cx="1612054" cy="707886"/>
+          </a:xfrm>
+          <a:prstGeom prst="rect">
+            <a:avLst/>
+          </a:prstGeom>
+          <a:solidFill>
+            <a:schemeClr val="tx2">
+              <a:lumMod val="40000"/>
+              <a:lumOff val="60000"/>
+            </a:schemeClr>
+          </a:solidFill>
+        </p:spPr>
+        <p:txBody>
+          <a:bodyPr wrap="square" rtlCol="0">
+            <a:spAutoFit/>
+          </a:bodyPr>
+          <a:lstStyle/>
+          <a:p>
+            <a:r>
+              <a:rPr lang="en-US" sz="4000" dirty="0">
+                <a:latin typeface="Arial" panose="020B0604020202020204" pitchFamily="34" charset="0"/>
+                <a:cs typeface="Arial" panose="020B0604020202020204" pitchFamily="34" charset="0"/>
+              </a:rPr>
+              <a:t>LLM</a:t>
+            </a:r>
+          </a:p>
+        </p:txBody>
+      </p:sp>
+      <p:cxnSp>
+        <p:nvCxnSpPr>
+          <p:cNvPr id="7" name="Straight Arrow Connector 6">
+            <a:extLst>
+              <a:ext uri="{FF2B5EF4-FFF2-40B4-BE49-F238E27FC236}">
+                <a16:creationId xmlns:a16="http://schemas.microsoft.com/office/drawing/2014/main" id="{636775D8-A919-189F-88BC-F23AEA5900C9}"/>
+              </a:ext>
+            </a:extLst>
+          </p:cNvPr>
+          <p:cNvCxnSpPr/>
+          <p:nvPr/>
+        </p:nvCxnSpPr>
+        <p:spPr>
+          <a:xfrm>
+            <a:off x="3075093" y="3027680"/>
+            <a:ext cx="1490134" cy="0"/>
+          </a:xfrm>
+          <a:prstGeom prst="straightConnector1">
+            <a:avLst/>
+          </a:prstGeom>
+          <a:ln>
+            <a:tailEnd type="triangle"/>
+          </a:ln>
+        </p:spPr>
+        <p:style>
+          <a:lnRef idx="2">
+            <a:schemeClr val="accent1"/>
+          </a:lnRef>
+          <a:fillRef idx="0">
+            <a:schemeClr val="accent1"/>
+          </a:fillRef>
+          <a:effectRef idx="1">
+            <a:schemeClr val="accent1"/>
+          </a:effectRef>
+          <a:fontRef idx="minor">
+            <a:schemeClr val="tx1"/>
+          </a:fontRef>
+        </p:style>
+      </p:cxnSp>
+      <p:pic>
+        <p:nvPicPr>
+          <p:cNvPr id="11" name="Picture 10">
+            <a:extLst>
+              <a:ext uri="{FF2B5EF4-FFF2-40B4-BE49-F238E27FC236}">
+                <a16:creationId xmlns:a16="http://schemas.microsoft.com/office/drawing/2014/main" id="{D97EAC82-D245-7E79-0677-392E42F11653}"/>
+              </a:ext>
+            </a:extLst>
+          </p:cNvPr>
+          <p:cNvPicPr>
+            <a:picLocks noChangeAspect="1"/>
+          </p:cNvPicPr>
+          <p:nvPr/>
+        </p:nvPicPr>
+        <p:blipFill>
+          <a:blip r:embed="rId2"/>
+          <a:stretch>
+            <a:fillRect/>
+          </a:stretch>
+        </p:blipFill>
+        <p:spPr>
+          <a:xfrm>
+            <a:off x="944880" y="1481769"/>
+            <a:ext cx="9421707" cy="5169974"/>
+          </a:xfrm>
+          <a:prstGeom prst="rect">
+            <a:avLst/>
+          </a:prstGeom>
+        </p:spPr>
+      </p:pic>
+    </p:spTree>
+    <p:extLst>
+      <p:ext uri="{BB962C8B-B14F-4D97-AF65-F5344CB8AC3E}">
+        <p14:creationId xmlns:p14="http://schemas.microsoft.com/office/powerpoint/2010/main" val="234855830"/>
+      </p:ext>
+    </p:extLst>
+  </p:cSld>
+  <p:clrMapOvr>
+    <a:masterClrMapping/>
+  </p:clrMapOvr>
+</p:sld>
+</file>
+
+<file path=ppt/slides/slide5.xml><?xml version="1.0" encoding="utf-8"?>
+<p:sld xmlns:a="http://schemas.openxmlformats.org/drawingml/2006/main" xmlns:r="http://schemas.openxmlformats.org/officeDocument/2006/relationships" xmlns:p="http://schemas.openxmlformats.org/presentationml/2006/main">
   <p:cSld>
     <p:bg>
       <p:bgPr>
@@ -4394,7 +5472,14 @@
         <p:cNvGrpSpPr/>
         <p:nvPr/>
       </p:nvGrpSpPr>
-      <p:grpSpPr/>
+      <p:grpSpPr>
+        <a:xfrm>
+          <a:off x="0" y="0"/>
+          <a:ext cx="0" cy="0"/>
+          <a:chOff x="0" y="0"/>
+          <a:chExt cx="0" cy="0"/>
+        </a:xfrm>
+      </p:grpSpPr>
       <p:sp>
         <p:nvSpPr>
           <p:cNvPr id="2" name="TextBox 1"/>
@@ -4403,8 +5488,8 @@
         </p:nvSpPr>
         <p:spPr>
           <a:xfrm>
-            <a:off x="731520" y="365760"/>
-            <a:ext cx="10058400" cy="822960"/>
+            <a:off x="731520" y="274320"/>
+            <a:ext cx="10058400" cy="731520"/>
           </a:xfrm>
           <a:prstGeom prst="rect">
             <a:avLst/>
@@ -4418,14 +5503,14 @@
           <a:lstStyle/>
           <a:p>
             <a:pPr>
-              <a:defRPr sz="3200" b="1">
+              <a:defRPr sz="3000" b="1">
                 <a:solidFill>
                   <a:srgbClr val="1A1A2E"/>
                 </a:solidFill>
               </a:defRPr>
             </a:pPr>
             <a:r>
-              <a:t>Where to Improve &amp; Next Steps</a:t>
+              <a:t>Quantization Strategy: FP16 vs INT8 vs AWQ4</a:t>
             </a:r>
           </a:p>
         </p:txBody>
@@ -4438,7 +5523,7 @@
         </p:nvSpPr>
         <p:spPr>
           <a:xfrm>
-            <a:off x="731520" y="1188720"/>
+            <a:off x="731520" y="1005840"/>
             <a:ext cx="1371600" cy="54864"/>
           </a:xfrm>
           <a:prstGeom prst="rect">
@@ -4470,905 +5555,7 @@
           <a:lstStyle/>
           <a:p>
             <a:pPr algn="ctr"/>
-          </a:p>
-        </p:txBody>
-      </p:sp>
-      <p:sp>
-        <p:nvSpPr>
-          <p:cNvPr id="4" name="TextBox 3"/>
-          <p:cNvSpPr txBox="1"/>
-          <p:nvPr/>
-        </p:nvSpPr>
-        <p:spPr>
-          <a:xfrm>
-            <a:off x="731520" y="1463040"/>
-            <a:ext cx="10515600" cy="4572000"/>
-          </a:xfrm>
-          <a:prstGeom prst="rect">
-            <a:avLst/>
-          </a:prstGeom>
-          <a:noFill/>
-        </p:spPr>
-        <p:txBody>
-          <a:bodyPr wrap="square">
-            <a:spAutoFit/>
-          </a:bodyPr>
-          <a:lstStyle/>
-          <a:p>
-            <a:pPr>
-              <a:spcAft>
-                <a:spcPts val="1200"/>
-              </a:spcAft>
-            </a:pPr>
-            <a:r>
-              <a:rPr sz="2000" b="1">
-                <a:solidFill>
-                  <a:srgbClr val="333333"/>
-                </a:solidFill>
-              </a:rPr>
-              <a:t>Type2 RAG latency (5-11s)</a:t>
-            </a:r>
-            <a:r>
-              <a:rPr sz="2000">
-                <a:solidFill>
-                  <a:srgbClr val="333333"/>
-                </a:solidFill>
-              </a:rPr>
-              <a:t> -- main bottleneck; async parallel retrieval + lighter reranker</a:t>
-            </a:r>
-          </a:p>
-          <a:p>
-            <a:pPr>
-              <a:spcAft>
-                <a:spcPts val="1200"/>
-              </a:spcAft>
-            </a:pPr>
-            <a:r>
-              <a:rPr sz="2000" b="1">
-                <a:solidFill>
-                  <a:srgbClr val="333333"/>
-                </a:solidFill>
-              </a:rPr>
-              <a:t>Fluency gap</a:t>
-            </a:r>
-            <a:r>
-              <a:rPr sz="2000">
-                <a:solidFill>
-                  <a:srgbClr val="333333"/>
-                </a:solidFill>
-              </a:rPr>
-              <a:t> (3.4 vs 4.7) -- fine-tune answer generator on GPT-4o-distilled data</a:t>
-            </a:r>
-          </a:p>
-          <a:p>
-            <a:pPr>
-              <a:spcAft>
-                <a:spcPts val="1200"/>
-              </a:spcAft>
-            </a:pPr>
-            <a:r>
-              <a:rPr sz="2000" b="1">
-                <a:solidFill>
-                  <a:srgbClr val="333333"/>
-                </a:solidFill>
-              </a:rPr>
-              <a:t>Streaming</a:t>
-            </a:r>
-            <a:r>
-              <a:rPr sz="2000">
-                <a:solidFill>
-                  <a:srgbClr val="333333"/>
-                </a:solidFill>
-              </a:rPr>
-              <a:t> -- add SSE via vLLM async iterator for perceived latency improvement</a:t>
-            </a:r>
-          </a:p>
-          <a:p>
-            <a:pPr>
-              <a:spcAft>
-                <a:spcPts val="1200"/>
-              </a:spcAft>
-            </a:pPr>
-            <a:r>
-              <a:rPr sz="2000" b="1">
-                <a:solidFill>
-                  <a:srgbClr val="333333"/>
-                </a:solidFill>
-              </a:rPr>
-              <a:t>Context window</a:t>
-            </a:r>
-            <a:r>
-              <a:rPr sz="2000">
-                <a:solidFill>
-                  <a:srgbClr val="333333"/>
-                </a:solidFill>
-              </a:rPr>
-              <a:t> -- upgrade to 32K+ model (Llama-3.1-8B) for more retrieved chunks</a:t>
-            </a:r>
-          </a:p>
-          <a:p>
-            <a:pPr>
-              <a:spcAft>
-                <a:spcPts val="1200"/>
-              </a:spcAft>
-            </a:pPr>
-            <a:r>
-              <a:rPr sz="2000" b="1">
-                <a:solidFill>
-                  <a:srgbClr val="333333"/>
-                </a:solidFill>
-              </a:rPr>
-              <a:t>Multi-GPU scaling</a:t>
-            </a:r>
-            <a:r>
-              <a:rPr sz="2000">
-                <a:solidFill>
-                  <a:srgbClr val="333333"/>
-                </a:solidFill>
-              </a:rPr>
-              <a:t> -- tensor parallelism or load-balanced vLLM for &gt;5 QPS</a:t>
-            </a:r>
-          </a:p>
-          <a:p>
-            <a:pPr>
-              <a:spcAft>
-                <a:spcPts val="1200"/>
-              </a:spcAft>
-            </a:pPr>
-            <a:r>
-              <a:rPr sz="2000" b="1">
-                <a:solidFill>
-                  <a:srgbClr val="333333"/>
-                </a:solidFill>
-              </a:rPr>
-              <a:t>Evaluation coverage</a:t>
-            </a:r>
-            <a:r>
-              <a:rPr sz="2000">
-                <a:solidFill>
-                  <a:srgbClr val="333333"/>
-                </a:solidFill>
-              </a:rPr>
-              <a:t> -- expand from 52 to 200+ cases with adversarial examples</a:t>
-            </a:r>
-          </a:p>
-          <a:p>
-            <a:pPr>
-              <a:spcAft>
-                <a:spcPts val="1200"/>
-              </a:spcAft>
-              <a:defRPr sz="2000">
-                <a:solidFill>
-                  <a:srgbClr val="333333"/>
-                </a:solidFill>
-              </a:defRPr>
-            </a:pPr>
-          </a:p>
-          <a:p>
-            <a:pPr>
-              <a:spcAft>
-                <a:spcPts val="1200"/>
-              </a:spcAft>
-            </a:pPr>
-            <a:r>
-              <a:rPr sz="2000" b="1">
-                <a:solidFill>
-                  <a:srgbClr val="333333"/>
-                </a:solidFill>
-              </a:rPr>
-              <a:t>Conclusion:</a:t>
-            </a:r>
-            <a:r>
-              <a:rPr sz="2000">
-                <a:solidFill>
-                  <a:srgbClr val="333333"/>
-                </a:solidFill>
-              </a:rPr>
-              <a:t> A local 3B model with AWQ4 + vLLM achieves 0.90 accuracy,</a:t>
-            </a:r>
-          </a:p>
-          <a:p>
-            <a:pPr>
-              <a:spcAft>
-                <a:spcPts val="1200"/>
-              </a:spcAft>
-              <a:defRPr sz="2000">
-                <a:solidFill>
-                  <a:srgbClr val="333333"/>
-                </a:solidFill>
-              </a:defRPr>
-            </a:pPr>
-            <a:r>
-              <a:t>100% value accuracy, and 0.53s latency -- beating GPT-4o on financial QA at $0/query.</a:t>
-            </a:r>
-          </a:p>
-        </p:txBody>
-      </p:sp>
-    </p:spTree>
-  </p:cSld>
-  <p:clrMapOvr>
-    <a:masterClrMapping/>
-  </p:clrMapOvr>
-</p:sld>
-</file>
-
-<file path=ppt/slides/slide2.xml><?xml version="1.0" encoding="utf-8"?>
-<p:sld xmlns:a="http://schemas.openxmlformats.org/drawingml/2006/main" xmlns:p="http://schemas.openxmlformats.org/presentationml/2006/main" xmlns:r="http://schemas.openxmlformats.org/officeDocument/2006/relationships">
-  <p:cSld>
-    <p:bg>
-      <p:bgPr>
-        <a:solidFill>
-          <a:srgbClr val="FFFFFF"/>
-        </a:solidFill>
-        <a:effectLst/>
-      </p:bgPr>
-    </p:bg>
-    <p:spTree>
-      <p:nvGrpSpPr>
-        <p:cNvPr id="1" name=""/>
-        <p:cNvGrpSpPr/>
-        <p:nvPr/>
-      </p:nvGrpSpPr>
-      <p:grpSpPr/>
-      <p:sp>
-        <p:nvSpPr>
-          <p:cNvPr id="2" name="TextBox 1"/>
-          <p:cNvSpPr txBox="1"/>
-          <p:nvPr/>
-        </p:nvSpPr>
-        <p:spPr>
-          <a:xfrm>
-            <a:off x="731520" y="365760"/>
-            <a:ext cx="10058400" cy="822960"/>
-          </a:xfrm>
-          <a:prstGeom prst="rect">
-            <a:avLst/>
-          </a:prstGeom>
-          <a:noFill/>
-        </p:spPr>
-        <p:txBody>
-          <a:bodyPr wrap="none">
-            <a:spAutoFit/>
-          </a:bodyPr>
-          <a:lstStyle/>
-          <a:p>
-            <a:pPr>
-              <a:defRPr sz="3200" b="1">
-                <a:solidFill>
-                  <a:srgbClr val="1A1A2E"/>
-                </a:solidFill>
-              </a:defRPr>
-            </a:pPr>
-            <a:r>
-              <a:t>Problem &amp; Motivation</a:t>
-            </a:r>
-          </a:p>
-        </p:txBody>
-      </p:sp>
-      <p:sp>
-        <p:nvSpPr>
-          <p:cNvPr id="3" name="Rectangle 2"/>
-          <p:cNvSpPr/>
-          <p:nvPr/>
-        </p:nvSpPr>
-        <p:spPr>
-          <a:xfrm>
-            <a:off x="731520" y="1188720"/>
-            <a:ext cx="1371600" cy="54864"/>
-          </a:xfrm>
-          <a:prstGeom prst="rect">
-            <a:avLst/>
-          </a:prstGeom>
-          <a:solidFill>
-            <a:srgbClr val="006DFD"/>
-          </a:solidFill>
-          <a:ln>
-            <a:noFill/>
-          </a:ln>
-        </p:spPr>
-        <p:style>
-          <a:lnRef idx="1">
-            <a:schemeClr val="accent1"/>
-          </a:lnRef>
-          <a:fillRef idx="3">
-            <a:schemeClr val="accent1"/>
-          </a:fillRef>
-          <a:effectRef idx="2">
-            <a:schemeClr val="accent1"/>
-          </a:effectRef>
-          <a:fontRef idx="minor">
-            <a:schemeClr val="lt1"/>
-          </a:fontRef>
-        </p:style>
-        <p:txBody>
-          <a:bodyPr rtlCol="0" anchor="ctr"/>
-          <a:lstStyle/>
-          <a:p>
-            <a:pPr algn="ctr"/>
-          </a:p>
-        </p:txBody>
-      </p:sp>
-      <p:sp>
-        <p:nvSpPr>
-          <p:cNvPr id="4" name="TextBox 3"/>
-          <p:cNvSpPr txBox="1"/>
-          <p:nvPr/>
-        </p:nvSpPr>
-        <p:spPr>
-          <a:xfrm>
-            <a:off x="731520" y="1463040"/>
-            <a:ext cx="10515600" cy="4572000"/>
-          </a:xfrm>
-          <a:prstGeom prst="rect">
-            <a:avLst/>
-          </a:prstGeom>
-          <a:noFill/>
-        </p:spPr>
-        <p:txBody>
-          <a:bodyPr wrap="square">
-            <a:spAutoFit/>
-          </a:bodyPr>
-          <a:lstStyle/>
-          <a:p>
-            <a:pPr>
-              <a:spcAft>
-                <a:spcPts val="1200"/>
-              </a:spcAft>
-              <a:defRPr sz="2000">
-                <a:solidFill>
-                  <a:srgbClr val="333333"/>
-                </a:solidFill>
-              </a:defRPr>
-            </a:pPr>
-            <a:r>
-              <a:t>Financial analysts need fast, accurate answers from SEC filings (10-K, 10-Q, 8-K)</a:t>
-            </a:r>
-          </a:p>
-          <a:p>
-            <a:pPr>
-              <a:spcAft>
-                <a:spcPts val="1200"/>
-              </a:spcAft>
-            </a:pPr>
-            <a:r>
-              <a:rPr sz="2000">
-                <a:solidFill>
-                  <a:srgbClr val="333333"/>
-                </a:solidFill>
-              </a:rPr>
-              <a:t>Cloud LLM APIs (GPT-4o) have </a:t>
-            </a:r>
-            <a:r>
-              <a:rPr sz="2000" b="1">
-                <a:solidFill>
-                  <a:srgbClr val="333333"/>
-                </a:solidFill>
-              </a:rPr>
-              <a:t>knowledge cutoff issues</a:t>
-            </a:r>
-            <a:r>
-              <a:rPr sz="2000">
-                <a:solidFill>
-                  <a:srgbClr val="333333"/>
-                </a:solidFill>
-              </a:rPr>
-              <a:t> -- miss recent FY2023 data</a:t>
-            </a:r>
-          </a:p>
-          <a:p>
-            <a:pPr>
-              <a:spcAft>
-                <a:spcPts val="1200"/>
-              </a:spcAft>
-            </a:pPr>
-            <a:r>
-              <a:rPr sz="2000">
-                <a:solidFill>
-                  <a:srgbClr val="333333"/>
-                </a:solidFill>
-              </a:rPr>
-              <a:t>Cloud APIs </a:t>
-            </a:r>
-            <a:r>
-              <a:rPr sz="2000" b="1">
-                <a:solidFill>
-                  <a:srgbClr val="333333"/>
-                </a:solidFill>
-              </a:rPr>
-              <a:t>hallucinate financial numbers</a:t>
-            </a:r>
-            <a:r>
-              <a:rPr sz="2000">
-                <a:solidFill>
-                  <a:srgbClr val="333333"/>
-                </a:solidFill>
-              </a:rPr>
-              <a:t> -- 42.9% value accuracy on our benchmark</a:t>
-            </a:r>
-          </a:p>
-          <a:p>
-            <a:pPr>
-              <a:spcAft>
-                <a:spcPts val="1200"/>
-              </a:spcAft>
-              <a:defRPr sz="2000">
-                <a:solidFill>
-                  <a:srgbClr val="333333"/>
-                </a:solidFill>
-              </a:defRPr>
-            </a:pPr>
-            <a:r>
-              <a:t>Privacy concerns: sending proprietary financial queries to external APIs</a:t>
-            </a:r>
-          </a:p>
-          <a:p>
-            <a:pPr>
-              <a:spcAft>
-                <a:spcPts val="1200"/>
-              </a:spcAft>
-            </a:pPr>
-            <a:r>
-              <a:rPr sz="2000">
-                <a:solidFill>
-                  <a:srgbClr val="333333"/>
-                </a:solidFill>
-              </a:rPr>
-              <a:t>Goal: </a:t>
-            </a:r>
-            <a:r>
-              <a:rPr sz="2000" b="1">
-                <a:solidFill>
-                  <a:srgbClr val="333333"/>
-                </a:solidFill>
-              </a:rPr>
-              <a:t>local-first system</a:t>
-            </a:r>
-            <a:r>
-              <a:rPr sz="2000">
-                <a:solidFill>
-                  <a:srgbClr val="333333"/>
-                </a:solidFill>
-              </a:rPr>
-              <a:t> on a single GPU that beats cloud accuracy at lower cost</a:t>
-            </a:r>
-          </a:p>
-        </p:txBody>
-      </p:sp>
-      <p:sp>
-        <p:nvSpPr>
-          <p:cNvPr id="5" name="TextBox 4"/>
-          <p:cNvSpPr txBox="1"/>
-          <p:nvPr/>
-        </p:nvSpPr>
-        <p:spPr>
-          <a:xfrm>
-            <a:off x="731520" y="5943600"/>
-            <a:ext cx="10058400" cy="640080"/>
-          </a:xfrm>
-          <a:prstGeom prst="rect">
-            <a:avLst/>
-          </a:prstGeom>
-          <a:noFill/>
-        </p:spPr>
-        <p:txBody>
-          <a:bodyPr wrap="square">
-            <a:spAutoFit/>
-          </a:bodyPr>
-          <a:lstStyle/>
-          <a:p>
-            <a:pPr>
-              <a:defRPr sz="1400" i="1">
-                <a:solidFill>
-                  <a:srgbClr val="AAAABB"/>
-                </a:solidFill>
-              </a:defRPr>
-            </a:pPr>
-            <a:r>
-              <a:t>92 S&amp;P 100 tickers | 2019-2024 | ~120K text chunks + ~40K structured XBRL rows</a:t>
-            </a:r>
-          </a:p>
-        </p:txBody>
-      </p:sp>
-    </p:spTree>
-  </p:cSld>
-  <p:clrMapOvr>
-    <a:masterClrMapping/>
-  </p:clrMapOvr>
-</p:sld>
-</file>
-
-<file path=ppt/slides/slide3.xml><?xml version="1.0" encoding="utf-8"?>
-<p:sld xmlns:a="http://schemas.openxmlformats.org/drawingml/2006/main" xmlns:p="http://schemas.openxmlformats.org/presentationml/2006/main" xmlns:r="http://schemas.openxmlformats.org/officeDocument/2006/relationships">
-  <p:cSld>
-    <p:bg>
-      <p:bgPr>
-        <a:solidFill>
-          <a:srgbClr val="FFFFFF"/>
-        </a:solidFill>
-        <a:effectLst/>
-      </p:bgPr>
-    </p:bg>
-    <p:spTree>
-      <p:nvGrpSpPr>
-        <p:cNvPr id="1" name=""/>
-        <p:cNvGrpSpPr/>
-        <p:nvPr/>
-      </p:nvGrpSpPr>
-      <p:grpSpPr/>
-      <p:sp>
-        <p:nvSpPr>
-          <p:cNvPr id="2" name="TextBox 1"/>
-          <p:cNvSpPr txBox="1"/>
-          <p:nvPr/>
-        </p:nvSpPr>
-        <p:spPr>
-          <a:xfrm>
-            <a:off x="731520" y="365760"/>
-            <a:ext cx="10058400" cy="822960"/>
-          </a:xfrm>
-          <a:prstGeom prst="rect">
-            <a:avLst/>
-          </a:prstGeom>
-          <a:noFill/>
-        </p:spPr>
-        <p:txBody>
-          <a:bodyPr wrap="none">
-            <a:spAutoFit/>
-          </a:bodyPr>
-          <a:lstStyle/>
-          <a:p>
-            <a:pPr>
-              <a:defRPr sz="3200" b="1">
-                <a:solidFill>
-                  <a:srgbClr val="1A1A2E"/>
-                </a:solidFill>
-              </a:defRPr>
-            </a:pPr>
-            <a:r>
-              <a:t>System Architecture</a:t>
-            </a:r>
-          </a:p>
-        </p:txBody>
-      </p:sp>
-      <p:sp>
-        <p:nvSpPr>
-          <p:cNvPr id="3" name="Rectangle 2"/>
-          <p:cNvSpPr/>
-          <p:nvPr/>
-        </p:nvSpPr>
-        <p:spPr>
-          <a:xfrm>
-            <a:off x="731520" y="1188720"/>
-            <a:ext cx="1371600" cy="54864"/>
-          </a:xfrm>
-          <a:prstGeom prst="rect">
-            <a:avLst/>
-          </a:prstGeom>
-          <a:solidFill>
-            <a:srgbClr val="006DFD"/>
-          </a:solidFill>
-          <a:ln>
-            <a:noFill/>
-          </a:ln>
-        </p:spPr>
-        <p:style>
-          <a:lnRef idx="1">
-            <a:schemeClr val="accent1"/>
-          </a:lnRef>
-          <a:fillRef idx="3">
-            <a:schemeClr val="accent1"/>
-          </a:fillRef>
-          <a:effectRef idx="2">
-            <a:schemeClr val="accent1"/>
-          </a:effectRef>
-          <a:fontRef idx="minor">
-            <a:schemeClr val="lt1"/>
-          </a:fontRef>
-        </p:style>
-        <p:txBody>
-          <a:bodyPr rtlCol="0" anchor="ctr"/>
-          <a:lstStyle/>
-          <a:p>
-            <a:pPr algn="ctr"/>
-          </a:p>
-        </p:txBody>
-      </p:sp>
-      <p:sp>
-        <p:nvSpPr>
-          <p:cNvPr id="4" name="TextBox 3"/>
-          <p:cNvSpPr txBox="1"/>
-          <p:nvPr/>
-        </p:nvSpPr>
-        <p:spPr>
-          <a:xfrm>
-            <a:off x="731520" y="1463040"/>
-            <a:ext cx="10515600" cy="4572000"/>
-          </a:xfrm>
-          <a:prstGeom prst="rect">
-            <a:avLst/>
-          </a:prstGeom>
-          <a:noFill/>
-        </p:spPr>
-        <p:txBody>
-          <a:bodyPr wrap="square">
-            <a:spAutoFit/>
-          </a:bodyPr>
-          <a:lstStyle/>
-          <a:p>
-            <a:pPr>
-              <a:spcAft>
-                <a:spcPts val="1200"/>
-              </a:spcAft>
-            </a:pPr>
-            <a:r>
-              <a:rPr sz="2000" b="1">
-                <a:solidFill>
-                  <a:srgbClr val="333333"/>
-                </a:solidFill>
-              </a:rPr>
-              <a:t>3-stage pipeline:</a:t>
-            </a:r>
-            <a:r>
-              <a:rPr sz="2000">
-                <a:solidFill>
-                  <a:srgbClr val="333333"/>
-                </a:solidFill>
-              </a:rPr>
-              <a:t> Intent Classification -&gt; Retrieval -&gt; Answer Generation</a:t>
-            </a:r>
-          </a:p>
-          <a:p>
-            <a:pPr>
-              <a:spcAft>
-                <a:spcPts val="1200"/>
-              </a:spcAft>
-            </a:pPr>
-            <a:r>
-              <a:rPr sz="2000" b="1">
-                <a:solidFill>
-                  <a:srgbClr val="333333"/>
-                </a:solidFill>
-              </a:rPr>
-              <a:t>Intent Router</a:t>
-            </a:r>
-            <a:r>
-              <a:rPr sz="2000">
-                <a:solidFill>
-                  <a:srgbClr val="333333"/>
-                </a:solidFill>
-              </a:rPr>
-              <a:t> (LoRA adapter): classifies query as Type1/Type2/Type3</a:t>
-            </a:r>
-          </a:p>
-          <a:p>
-            <a:pPr>
-              <a:spcAft>
-                <a:spcPts val="1200"/>
-              </a:spcAft>
-              <a:defRPr sz="2000">
-                <a:solidFill>
-                  <a:srgbClr val="333333"/>
-                </a:solidFill>
-              </a:defRPr>
-            </a:pPr>
-            <a:r>
-              <a:t>  Type1 (exact fact) -&gt; NL2SQL -&gt; SQLite (XBRL financial data)</a:t>
-            </a:r>
-          </a:p>
-          <a:p>
-            <a:pPr>
-              <a:spcAft>
-                <a:spcPts val="1200"/>
-              </a:spcAft>
-              <a:defRPr sz="2000">
-                <a:solidFill>
-                  <a:srgbClr val="333333"/>
-                </a:solidFill>
-              </a:defRPr>
-            </a:pPr>
-            <a:r>
-              <a:t>  Type2 (qualitative) -&gt; Query Rewrite -&gt; Hybrid RAG (BM25 + Dense + Cross-Encoder)</a:t>
-            </a:r>
-          </a:p>
-          <a:p>
-            <a:pPr>
-              <a:spcAft>
-                <a:spcPts val="1200"/>
-              </a:spcAft>
-              <a:defRPr sz="2000">
-                <a:solidFill>
-                  <a:srgbClr val="333333"/>
-                </a:solidFill>
-              </a:defRPr>
-            </a:pPr>
-            <a:r>
-              <a:t>  Type3 (chat) -&gt; Direct answer, no retrieval</a:t>
-            </a:r>
-          </a:p>
-          <a:p>
-            <a:pPr>
-              <a:spcAft>
-                <a:spcPts val="1200"/>
-              </a:spcAft>
-            </a:pPr>
-            <a:r>
-              <a:rPr sz="2000" b="1">
-                <a:solidFill>
-                  <a:srgbClr val="333333"/>
-                </a:solidFill>
-              </a:rPr>
-              <a:t>vLLM + Punica Multi-LoRA:</a:t>
-            </a:r>
-            <a:r>
-              <a:rPr sz="2000">
-                <a:solidFill>
-                  <a:srgbClr val="333333"/>
-                </a:solidFill>
-              </a:rPr>
-              <a:t> 3 adapters share one GPU process</a:t>
-            </a:r>
-          </a:p>
-          <a:p>
-            <a:pPr>
-              <a:spcAft>
-                <a:spcPts val="1200"/>
-              </a:spcAft>
-            </a:pPr>
-            <a:r>
-              <a:rPr sz="2000" b="1">
-                <a:solidFill>
-                  <a:srgbClr val="333333"/>
-                </a:solidFill>
-              </a:rPr>
-              <a:t>Data stores:</a:t>
-            </a:r>
-            <a:r>
-              <a:rPr sz="2000">
-                <a:solidFill>
-                  <a:srgbClr val="333333"/>
-                </a:solidFill>
-              </a:rPr>
-              <a:t> ChromaDB (516K chunks) + SQLite (40K financial rows)</a:t>
-            </a:r>
-          </a:p>
-        </p:txBody>
-      </p:sp>
-      <p:sp>
-        <p:nvSpPr>
-          <p:cNvPr id="5" name="TextBox 4"/>
-          <p:cNvSpPr txBox="1"/>
-          <p:nvPr/>
-        </p:nvSpPr>
-        <p:spPr>
-          <a:xfrm>
-            <a:off x="731520" y="5943600"/>
-            <a:ext cx="10058400" cy="640080"/>
-          </a:xfrm>
-          <a:prstGeom prst="rect">
-            <a:avLst/>
-          </a:prstGeom>
-          <a:noFill/>
-        </p:spPr>
-        <p:txBody>
-          <a:bodyPr wrap="square">
-            <a:spAutoFit/>
-          </a:bodyPr>
-          <a:lstStyle/>
-          <a:p>
-            <a:pPr>
-              <a:defRPr sz="1400" i="1">
-                <a:solidFill>
-                  <a:srgbClr val="AAAABB"/>
-                </a:solidFill>
-              </a:defRPr>
-            </a:pPr>
-            <a:r>
-              <a:t>All 3 LoRA adapters (intent, rewriter, nl2sql) served via Punica SGMV kernels in a single vLLM process</a:t>
-            </a:r>
-          </a:p>
-        </p:txBody>
-      </p:sp>
-    </p:spTree>
-  </p:cSld>
-  <p:clrMapOvr>
-    <a:masterClrMapping/>
-  </p:clrMapOvr>
-</p:sld>
-</file>
-
-<file path=ppt/slides/slide4.xml><?xml version="1.0" encoding="utf-8"?>
-<p:sld xmlns:a="http://schemas.openxmlformats.org/drawingml/2006/main" xmlns:p="http://schemas.openxmlformats.org/presentationml/2006/main" xmlns:r="http://schemas.openxmlformats.org/officeDocument/2006/relationships">
-  <p:cSld>
-    <p:bg>
-      <p:bgPr>
-        <a:solidFill>
-          <a:srgbClr val="FFFFFF"/>
-        </a:solidFill>
-        <a:effectLst/>
-      </p:bgPr>
-    </p:bg>
-    <p:spTree>
-      <p:nvGrpSpPr>
-        <p:cNvPr id="1" name=""/>
-        <p:cNvGrpSpPr/>
-        <p:nvPr/>
-      </p:nvGrpSpPr>
-      <p:grpSpPr/>
-      <p:sp>
-        <p:nvSpPr>
-          <p:cNvPr id="2" name="TextBox 1"/>
-          <p:cNvSpPr txBox="1"/>
-          <p:nvPr/>
-        </p:nvSpPr>
-        <p:spPr>
-          <a:xfrm>
-            <a:off x="731520" y="274320"/>
-            <a:ext cx="10058400" cy="731520"/>
-          </a:xfrm>
-          <a:prstGeom prst="rect">
-            <a:avLst/>
-          </a:prstGeom>
-          <a:noFill/>
-        </p:spPr>
-        <p:txBody>
-          <a:bodyPr wrap="none">
-            <a:spAutoFit/>
-          </a:bodyPr>
-          <a:lstStyle/>
-          <a:p>
-            <a:pPr>
-              <a:defRPr sz="3000" b="1">
-                <a:solidFill>
-                  <a:srgbClr val="1A1A2E"/>
-                </a:solidFill>
-              </a:defRPr>
-            </a:pPr>
-            <a:r>
-              <a:t>Quantization Strategy: FP16 vs INT8 vs AWQ4</a:t>
-            </a:r>
-          </a:p>
-        </p:txBody>
-      </p:sp>
-      <p:sp>
-        <p:nvSpPr>
-          <p:cNvPr id="3" name="Rectangle 2"/>
-          <p:cNvSpPr/>
-          <p:nvPr/>
-        </p:nvSpPr>
-        <p:spPr>
-          <a:xfrm>
-            <a:off x="731520" y="1005840"/>
-            <a:ext cx="1371600" cy="54864"/>
-          </a:xfrm>
-          <a:prstGeom prst="rect">
-            <a:avLst/>
-          </a:prstGeom>
-          <a:solidFill>
-            <a:srgbClr val="006DFD"/>
-          </a:solidFill>
-          <a:ln>
-            <a:noFill/>
-          </a:ln>
-        </p:spPr>
-        <p:style>
-          <a:lnRef idx="1">
-            <a:schemeClr val="accent1"/>
-          </a:lnRef>
-          <a:fillRef idx="3">
-            <a:schemeClr val="accent1"/>
-          </a:fillRef>
-          <a:effectRef idx="2">
-            <a:schemeClr val="accent1"/>
-          </a:effectRef>
-          <a:fontRef idx="minor">
-            <a:schemeClr val="lt1"/>
-          </a:fontRef>
-        </p:style>
-        <p:txBody>
-          <a:bodyPr rtlCol="0" anchor="ctr"/>
-          <a:lstStyle/>
-          <a:p>
-            <a:pPr algn="ctr"/>
+            <a:endParaRPr/>
           </a:p>
         </p:txBody>
       </p:sp>
@@ -5378,11 +5565,17 @@
           <p:cNvGraphicFramePr>
             <a:graphicFrameLocks noGrp="1"/>
           </p:cNvGraphicFramePr>
-          <p:nvPr/>
+          <p:nvPr>
+            <p:extLst>
+              <p:ext uri="{D42A27DB-BD31-4B8C-83A1-F6EECF244321}">
+                <p14:modId xmlns:p14="http://schemas.microsoft.com/office/powerpoint/2010/main" val="3923338273"/>
+              </p:ext>
+            </p:extLst>
+          </p:nvPr>
         </p:nvGraphicFramePr>
         <p:xfrm>
-          <a:off x="731520" y="1371600"/>
-          <a:ext cx="10515600" cy="1828800"/>
+          <a:off x="1889760" y="2406650"/>
+          <a:ext cx="8412480" cy="1828800"/>
         </p:xfrm>
         <a:graphic>
           <a:graphicData uri="http://schemas.openxmlformats.org/drawingml/2006/table">
@@ -5391,11 +5584,34 @@
                 <a:tableStyleId>{5C22544A-7EE6-4342-B048-85BDC9FD1C3A}</a:tableStyleId>
               </a:tblPr>
               <a:tblGrid>
-                <a:gridCol w="2103120"/>
-                <a:gridCol w="2103120"/>
-                <a:gridCol w="2103120"/>
-                <a:gridCol w="2103120"/>
-                <a:gridCol w="2103120"/>
+                <a:gridCol w="2103120">
+                  <a:extLst>
+                    <a:ext uri="{9D8B030D-6E8A-4147-A177-3AD203B41FA5}">
+                      <a16:colId xmlns:a16="http://schemas.microsoft.com/office/drawing/2014/main" val="20000"/>
+                    </a:ext>
+                  </a:extLst>
+                </a:gridCol>
+                <a:gridCol w="2103120">
+                  <a:extLst>
+                    <a:ext uri="{9D8B030D-6E8A-4147-A177-3AD203B41FA5}">
+                      <a16:colId xmlns:a16="http://schemas.microsoft.com/office/drawing/2014/main" val="20002"/>
+                    </a:ext>
+                  </a:extLst>
+                </a:gridCol>
+                <a:gridCol w="2103120">
+                  <a:extLst>
+                    <a:ext uri="{9D8B030D-6E8A-4147-A177-3AD203B41FA5}">
+                      <a16:colId xmlns:a16="http://schemas.microsoft.com/office/drawing/2014/main" val="20003"/>
+                    </a:ext>
+                  </a:extLst>
+                </a:gridCol>
+                <a:gridCol w="2103120">
+                  <a:extLst>
+                    <a:ext uri="{9D8B030D-6E8A-4147-A177-3AD203B41FA5}">
+                      <a16:colId xmlns:a16="http://schemas.microsoft.com/office/drawing/2014/main" val="20004"/>
+                    </a:ext>
+                  </a:extLst>
+                </a:gridCol>
               </a:tblGrid>
               <a:tr h="457200">
                 <a:tc>
@@ -5434,29 +5650,7 @@
                         </a:defRPr>
                       </a:pPr>
                       <a:r>
-                        <a:t>Technique</a:t>
-                      </a:r>
-                    </a:p>
-                  </a:txBody>
-                  <a:tcPr anchor="ctr">
-                    <a:solidFill>
-                      <a:srgbClr val="006DFD"/>
-                    </a:solidFill>
-                  </a:tcPr>
-                </a:tc>
-                <a:tc>
-                  <a:txBody>
-                    <a:bodyPr/>
-                    <a:lstStyle/>
-                    <a:p>
-                      <a:pPr algn="ctr">
-                        <a:defRPr sz="1600" b="1">
-                          <a:solidFill>
-                            <a:srgbClr val="FFFFFF"/>
-                          </a:solidFill>
-                        </a:defRPr>
-                      </a:pPr>
-                      <a:r>
+                        <a:rPr dirty="0"/>
                         <a:t>Weight Size</a:t>
                       </a:r>
                     </a:p>
@@ -5513,6 +5707,11 @@
                     </a:solidFill>
                   </a:tcPr>
                 </a:tc>
+                <a:extLst>
+                  <a:ext uri="{0D108BD9-81ED-4DB2-BD59-A6C34878D82A}">
+                    <a16:rowId xmlns:a16="http://schemas.microsoft.com/office/drawing/2014/main" val="10000"/>
+                  </a:ext>
+                </a:extLst>
               </a:tr>
               <a:tr h="457200">
                 <a:tc>
@@ -5529,29 +5728,6 @@
                       </a:pPr>
                       <a:r>
                         <a:t>FP16</a:t>
-                      </a:r>
-                    </a:p>
-                  </a:txBody>
-                  <a:tcPr anchor="ctr">
-                    <a:solidFill>
-                      <a:srgbClr val="F0F4F8"/>
-                    </a:solidFill>
-                  </a:tcPr>
-                </a:tc>
-                <a:tc>
-                  <a:txBody>
-                    <a:bodyPr/>
-                    <a:lstStyle/>
-                    <a:p>
-                      <a:pPr algn="ctr">
-                        <a:defRPr sz="1500">
-                          <a:solidFill>
-                            <a:srgbClr val="333333"/>
-                          </a:solidFill>
-                        </a:defRPr>
-                      </a:pPr>
-                      <a:r>
-                        <a:t>bfloat16, no compression</a:t>
                       </a:r>
                     </a:p>
                   </a:txBody>
@@ -5630,6 +5806,11 @@
                     </a:solidFill>
                   </a:tcPr>
                 </a:tc>
+                <a:extLst>
+                  <a:ext uri="{0D108BD9-81ED-4DB2-BD59-A6C34878D82A}">
+                    <a16:rowId xmlns:a16="http://schemas.microsoft.com/office/drawing/2014/main" val="10001"/>
+                  </a:ext>
+                </a:extLst>
               </a:tr>
               <a:tr h="457200">
                 <a:tc>
@@ -5646,29 +5827,6 @@
                       </a:pPr>
                       <a:r>
                         <a:t>INT8</a:t>
-                      </a:r>
-                    </a:p>
-                  </a:txBody>
-                  <a:tcPr anchor="ctr">
-                    <a:solidFill>
-                      <a:srgbClr val="FFFFFF"/>
-                    </a:solidFill>
-                  </a:tcPr>
-                </a:tc>
-                <a:tc>
-                  <a:txBody>
-                    <a:bodyPr/>
-                    <a:lstStyle/>
-                    <a:p>
-                      <a:pPr algn="ctr">
-                        <a:defRPr sz="1500">
-                          <a:solidFill>
-                            <a:srgbClr val="333333"/>
-                          </a:solidFill>
-                        </a:defRPr>
-                      </a:pPr>
-                      <a:r>
-                        <a:t>bitsandbytes LLM.int8() dequant</a:t>
                       </a:r>
                     </a:p>
                   </a:txBody>
@@ -5747,6 +5905,11 @@
                     </a:solidFill>
                   </a:tcPr>
                 </a:tc>
+                <a:extLst>
+                  <a:ext uri="{0D108BD9-81ED-4DB2-BD59-A6C34878D82A}">
+                    <a16:rowId xmlns:a16="http://schemas.microsoft.com/office/drawing/2014/main" val="10002"/>
+                  </a:ext>
+                </a:extLst>
               </a:tr>
               <a:tr h="457200">
                 <a:tc>
@@ -5785,29 +5948,7 @@
                         </a:defRPr>
                       </a:pPr>
                       <a:r>
-                        <a:t>W4A16 Marlin fused INT4xFP16 GEMM</a:t>
-                      </a:r>
-                    </a:p>
-                  </a:txBody>
-                  <a:tcPr anchor="ctr">
-                    <a:solidFill>
-                      <a:srgbClr val="F0F4F8"/>
-                    </a:solidFill>
-                  </a:tcPr>
-                </a:tc>
-                <a:tc>
-                  <a:txBody>
-                    <a:bodyPr/>
-                    <a:lstStyle/>
-                    <a:p>
-                      <a:pPr algn="ctr">
-                        <a:defRPr sz="1500">
-                          <a:solidFill>
-                            <a:srgbClr val="333333"/>
-                          </a:solidFill>
-                        </a:defRPr>
-                      </a:pPr>
-                      <a:r>
+                        <a:rPr dirty="0"/>
                         <a:t>4-bit</a:t>
                       </a:r>
                     </a:p>
@@ -5854,6 +5995,7 @@
                         </a:defRPr>
                       </a:pPr>
                       <a:r>
+                        <a:rPr dirty="0"/>
                         <a:t>~22.5 GB</a:t>
                       </a:r>
                     </a:p>
@@ -5864,6 +6006,11 @@
                     </a:solidFill>
                   </a:tcPr>
                 </a:tc>
+                <a:extLst>
+                  <a:ext uri="{0D108BD9-81ED-4DB2-BD59-A6C34878D82A}">
+                    <a16:rowId xmlns:a16="http://schemas.microsoft.com/office/drawing/2014/main" val="10003"/>
+                  </a:ext>
+                </a:extLst>
               </a:tr>
             </a:tbl>
           </a:graphicData>
@@ -5877,8 +6024,8 @@
 </p:sld>
 </file>
 
-<file path=ppt/slides/slide5.xml><?xml version="1.0" encoding="utf-8"?>
-<p:sld xmlns:a="http://schemas.openxmlformats.org/drawingml/2006/main" xmlns:p="http://schemas.openxmlformats.org/presentationml/2006/main" xmlns:r="http://schemas.openxmlformats.org/officeDocument/2006/relationships">
+<file path=ppt/slides/slide6.xml><?xml version="1.0" encoding="utf-8"?>
+<p:sld xmlns:a="http://schemas.openxmlformats.org/drawingml/2006/main" xmlns:r="http://schemas.openxmlformats.org/officeDocument/2006/relationships" xmlns:p="http://schemas.openxmlformats.org/presentationml/2006/main">
   <p:cSld>
     <p:bg>
       <p:bgPr>
@@ -5894,7 +6041,14 @@
         <p:cNvGrpSpPr/>
         <p:nvPr/>
       </p:nvGrpSpPr>
-      <p:grpSpPr/>
+      <p:grpSpPr>
+        <a:xfrm>
+          <a:off x="0" y="0"/>
+          <a:ext cx="0" cy="0"/>
+          <a:chOff x="0" y="0"/>
+          <a:chExt cx="0" cy="0"/>
+        </a:xfrm>
+      </p:grpSpPr>
       <p:sp>
         <p:nvSpPr>
           <p:cNvPr id="2" name="TextBox 1"/>
@@ -5904,7 +6058,7 @@
         <p:spPr>
           <a:xfrm>
             <a:off x="731520" y="274320"/>
-            <a:ext cx="10058400" cy="731520"/>
+            <a:ext cx="9739076" cy="553998"/>
           </a:xfrm>
           <a:prstGeom prst="rect">
             <a:avLst/>
@@ -5925,8 +6079,14 @@
               </a:defRPr>
             </a:pPr>
             <a:r>
+              <a:rPr dirty="0"/>
               <a:t>Accuracy: Unified 52-Case Benchmark</a:t>
             </a:r>
+            <a:r>
+              <a:rPr lang="en-US" dirty="0"/>
+              <a:t> Compare with GPT-4o</a:t>
+            </a:r>
+            <a:endParaRPr dirty="0"/>
           </a:p>
         </p:txBody>
       </p:sp>
@@ -5970,6 +6130,7 @@
           <a:lstStyle/>
           <a:p>
             <a:pPr algn="ctr"/>
+            <a:endParaRPr/>
           </a:p>
         </p:txBody>
       </p:sp>
@@ -6040,8 +6201,8 @@
 </p:sld>
 </file>
 
-<file path=ppt/slides/slide6.xml><?xml version="1.0" encoding="utf-8"?>
-<p:sld xmlns:a="http://schemas.openxmlformats.org/drawingml/2006/main" xmlns:p="http://schemas.openxmlformats.org/presentationml/2006/main" xmlns:r="http://schemas.openxmlformats.org/officeDocument/2006/relationships">
+<file path=ppt/slides/slide7.xml><?xml version="1.0" encoding="utf-8"?>
+<p:sld xmlns:a="http://schemas.openxmlformats.org/drawingml/2006/main" xmlns:r="http://schemas.openxmlformats.org/officeDocument/2006/relationships" xmlns:p="http://schemas.openxmlformats.org/presentationml/2006/main">
   <p:cSld>
     <p:bg>
       <p:bgPr>
@@ -6057,7 +6218,14 @@
         <p:cNvGrpSpPr/>
         <p:nvPr/>
       </p:nvGrpSpPr>
-      <p:grpSpPr/>
+      <p:grpSpPr>
+        <a:xfrm>
+          <a:off x="0" y="0"/>
+          <a:ext cx="0" cy="0"/>
+          <a:chOff x="0" y="0"/>
+          <a:chExt cx="0" cy="0"/>
+        </a:xfrm>
+      </p:grpSpPr>
       <p:sp>
         <p:nvSpPr>
           <p:cNvPr id="2" name="TextBox 1"/>
@@ -6067,7 +6235,7 @@
         <p:spPr>
           <a:xfrm>
             <a:off x="731520" y="274320"/>
-            <a:ext cx="10058400" cy="731520"/>
+            <a:ext cx="6388928" cy="553998"/>
           </a:xfrm>
           <a:prstGeom prst="rect">
             <a:avLst/>
@@ -6088,8 +6256,18 @@
               </a:defRPr>
             </a:pPr>
             <a:r>
-              <a:t>Accuracy Detail: Intent / Value / Keyword</a:t>
-            </a:r>
+              <a:rPr lang="en-US" dirty="0"/>
+              <a:t>Performance</a:t>
+            </a:r>
+            <a:r>
+              <a:rPr dirty="0"/>
+              <a:t>:</a:t>
+            </a:r>
+            <a:r>
+              <a:rPr lang="en-US" dirty="0"/>
+              <a:t> Throughput  and Latency</a:t>
+            </a:r>
+            <a:endParaRPr dirty="0"/>
           </a:p>
         </p:txBody>
       </p:sp>
@@ -6133,12 +6311,19 @@
           <a:lstStyle/>
           <a:p>
             <a:pPr algn="ctr"/>
+            <a:endParaRPr/>
           </a:p>
         </p:txBody>
       </p:sp>
       <p:pic>
         <p:nvPicPr>
-          <p:cNvPr id="4" name="Picture 3" descr="accuracy_detail.png"/>
+          <p:cNvPr id="6" name="Picture 5">
+            <a:extLst>
+              <a:ext uri="{FF2B5EF4-FFF2-40B4-BE49-F238E27FC236}">
+                <a16:creationId xmlns:a16="http://schemas.microsoft.com/office/drawing/2014/main" id="{3529D159-7C72-B92A-25E6-BDD25FCC9976}"/>
+              </a:ext>
+            </a:extLst>
+          </p:cNvPr>
           <p:cNvPicPr>
             <a:picLocks noChangeAspect="1"/>
           </p:cNvPicPr>
@@ -6152,8 +6337,8 @@
         </p:blipFill>
         <p:spPr>
           <a:xfrm>
-            <a:off x="731520" y="1280160"/>
-            <a:ext cx="10515600" cy="4754880"/>
+            <a:off x="731520" y="1941955"/>
+            <a:ext cx="9859857" cy="3812289"/>
           </a:xfrm>
           <a:prstGeom prst="rect">
             <a:avLst/>
@@ -6162,14 +6347,20 @@
       </p:pic>
       <p:sp>
         <p:nvSpPr>
-          <p:cNvPr id="5" name="TextBox 4"/>
+          <p:cNvPr id="7" name="TextBox 6">
+            <a:extLst>
+              <a:ext uri="{FF2B5EF4-FFF2-40B4-BE49-F238E27FC236}">
+                <a16:creationId xmlns:a16="http://schemas.microsoft.com/office/drawing/2014/main" id="{AEC1B600-5EA6-96D5-6AD7-832577DFC105}"/>
+              </a:ext>
+            </a:extLst>
+          </p:cNvPr>
           <p:cNvSpPr txBox="1"/>
           <p:nvPr/>
         </p:nvSpPr>
         <p:spPr>
           <a:xfrm>
-            <a:off x="731520" y="6126480"/>
-            <a:ext cx="10058400" cy="548640"/>
+            <a:off x="482600" y="6089650"/>
+            <a:ext cx="10255250" cy="369332"/>
           </a:xfrm>
           <a:prstGeom prst="rect">
             <a:avLst/>
@@ -6177,20 +6368,18 @@
           <a:noFill/>
         </p:spPr>
         <p:txBody>
-          <a:bodyPr wrap="square">
+          <a:bodyPr wrap="square" rtlCol="0">
             <a:spAutoFit/>
           </a:bodyPr>
           <a:lstStyle/>
           <a:p>
-            <a:pPr>
-              <a:defRPr sz="1400" i="1">
+            <a:r>
+              <a:rPr lang="en-US" dirty="0">
                 <a:solidFill>
-                  <a:srgbClr val="AAAABB"/>
+                  <a:srgbClr val="FF0000"/>
                 </a:solidFill>
-              </a:defRPr>
-            </a:pPr>
-            <a:r>
-              <a:t>All local configs achieve 100% value accuracy (numbers from SQLite/XBRL). GPT-4o has best fluency (4.7/5) but worst value accuracy (42.9%).</a:t>
+              </a:rPr>
+              <a:t>AWQ4 have best performance in local device.</a:t>
             </a:r>
           </a:p>
         </p:txBody>
@@ -6203,8 +6392,8 @@
 </p:sld>
 </file>
 
-<file path=ppt/slides/slide7.xml><?xml version="1.0" encoding="utf-8"?>
-<p:sld xmlns:a="http://schemas.openxmlformats.org/drawingml/2006/main" xmlns:p="http://schemas.openxmlformats.org/presentationml/2006/main" xmlns:r="http://schemas.openxmlformats.org/officeDocument/2006/relationships">
+<file path=ppt/slides/slide8.xml><?xml version="1.0" encoding="utf-8"?>
+<p:sld xmlns:a="http://schemas.openxmlformats.org/drawingml/2006/main" xmlns:r="http://schemas.openxmlformats.org/officeDocument/2006/relationships" xmlns:p="http://schemas.openxmlformats.org/presentationml/2006/main">
   <p:cSld>
     <p:bg>
       <p:bgPr>
@@ -6220,7 +6409,14 @@
         <p:cNvGrpSpPr/>
         <p:nvPr/>
       </p:nvGrpSpPr>
-      <p:grpSpPr/>
+      <p:grpSpPr>
+        <a:xfrm>
+          <a:off x="0" y="0"/>
+          <a:ext cx="0" cy="0"/>
+          <a:chOff x="0" y="0"/>
+          <a:chExt cx="0" cy="0"/>
+        </a:xfrm>
+      </p:grpSpPr>
       <p:sp>
         <p:nvSpPr>
           <p:cNvPr id="2" name="TextBox 1"/>
@@ -6251,7 +6447,7 @@
               </a:defRPr>
             </a:pPr>
             <a:r>
-              <a:t>Throughput: QPS vs Concurrency</a:t>
+              <a:t>Final Results: AWQ4 vs Cloud (GPT-4o)</a:t>
             </a:r>
           </a:p>
         </p:txBody>
@@ -6296,68 +6492,855 @@
           <a:lstStyle/>
           <a:p>
             <a:pPr algn="ctr"/>
-          </a:p>
-        </p:txBody>
-      </p:sp>
-      <p:pic>
-        <p:nvPicPr>
-          <p:cNvPr id="4" name="Picture 3" descr="throughput_comparison.png"/>
-          <p:cNvPicPr>
-            <a:picLocks noChangeAspect="1"/>
-          </p:cNvPicPr>
-          <p:nvPr/>
-        </p:nvPicPr>
-        <p:blipFill>
-          <a:blip r:embed="rId2"/>
-          <a:stretch>
-            <a:fillRect/>
-          </a:stretch>
-        </p:blipFill>
-        <p:spPr>
-          <a:xfrm>
-            <a:off x="731520" y="1280160"/>
-            <a:ext cx="10515600" cy="4754880"/>
-          </a:xfrm>
-          <a:prstGeom prst="rect">
-            <a:avLst/>
-          </a:prstGeom>
-        </p:spPr>
-      </p:pic>
-      <p:sp>
-        <p:nvSpPr>
-          <p:cNvPr id="5" name="TextBox 4"/>
-          <p:cNvSpPr txBox="1"/>
-          <p:nvPr/>
-        </p:nvSpPr>
-        <p:spPr>
-          <a:xfrm>
-            <a:off x="731520" y="6126480"/>
-            <a:ext cx="10058400" cy="548640"/>
-          </a:xfrm>
-          <a:prstGeom prst="rect">
-            <a:avLst/>
-          </a:prstGeom>
-          <a:noFill/>
-        </p:spPr>
-        <p:txBody>
-          <a:bodyPr wrap="square">
-            <a:spAutoFit/>
-          </a:bodyPr>
-          <a:lstStyle/>
-          <a:p>
-            <a:pPr>
-              <a:defRPr sz="1400" i="1">
-                <a:solidFill>
-                  <a:srgbClr val="AAAABB"/>
-                </a:solidFill>
-              </a:defRPr>
-            </a:pPr>
-            <a:r>
-              <a:t>AWQ4 is the best local option at every concurrency level. INT8 degrades severely at c=4 (0.19 QPS) due to runtime dequantization overhead.</a:t>
-            </a:r>
-          </a:p>
-        </p:txBody>
-      </p:sp>
+            <a:endParaRPr/>
+          </a:p>
+        </p:txBody>
+      </p:sp>
+      <p:graphicFrame>
+        <p:nvGraphicFramePr>
+          <p:cNvPr id="4" name="Table 3"/>
+          <p:cNvGraphicFramePr>
+            <a:graphicFrameLocks noGrp="1"/>
+          </p:cNvGraphicFramePr>
+          <p:nvPr>
+            <p:extLst>
+              <p:ext uri="{D42A27DB-BD31-4B8C-83A1-F6EECF244321}">
+                <p14:modId xmlns:p14="http://schemas.microsoft.com/office/powerpoint/2010/main" val="3272000034"/>
+              </p:ext>
+            </p:extLst>
+          </p:nvPr>
+        </p:nvGraphicFramePr>
+        <p:xfrm>
+          <a:off x="731520" y="1371600"/>
+          <a:ext cx="10515600" cy="4572000"/>
+        </p:xfrm>
+        <a:graphic>
+          <a:graphicData uri="http://schemas.openxmlformats.org/drawingml/2006/table">
+            <a:tbl>
+              <a:tblPr firstRow="1" bandRow="1">
+                <a:tableStyleId>{5C22544A-7EE6-4342-B048-85BDC9FD1C3A}</a:tableStyleId>
+              </a:tblPr>
+              <a:tblGrid>
+                <a:gridCol w="3505200">
+                  <a:extLst>
+                    <a:ext uri="{9D8B030D-6E8A-4147-A177-3AD203B41FA5}">
+                      <a16:colId xmlns:a16="http://schemas.microsoft.com/office/drawing/2014/main" val="20000"/>
+                    </a:ext>
+                  </a:extLst>
+                </a:gridCol>
+                <a:gridCol w="3505200">
+                  <a:extLst>
+                    <a:ext uri="{9D8B030D-6E8A-4147-A177-3AD203B41FA5}">
+                      <a16:colId xmlns:a16="http://schemas.microsoft.com/office/drawing/2014/main" val="20001"/>
+                    </a:ext>
+                  </a:extLst>
+                </a:gridCol>
+                <a:gridCol w="3505200">
+                  <a:extLst>
+                    <a:ext uri="{9D8B030D-6E8A-4147-A177-3AD203B41FA5}">
+                      <a16:colId xmlns:a16="http://schemas.microsoft.com/office/drawing/2014/main" val="20002"/>
+                    </a:ext>
+                  </a:extLst>
+                </a:gridCol>
+              </a:tblGrid>
+              <a:tr h="457200">
+                <a:tc>
+                  <a:txBody>
+                    <a:bodyPr/>
+                    <a:lstStyle/>
+                    <a:p>
+                      <a:pPr algn="ctr">
+                        <a:defRPr sz="1600" b="1">
+                          <a:solidFill>
+                            <a:srgbClr val="FFFFFF"/>
+                          </a:solidFill>
+                        </a:defRPr>
+                      </a:pPr>
+                      <a:r>
+                        <a:t>Metric</a:t>
+                      </a:r>
+                    </a:p>
+                  </a:txBody>
+                  <a:tcPr anchor="ctr">
+                    <a:solidFill>
+                      <a:srgbClr val="006DFD"/>
+                    </a:solidFill>
+                  </a:tcPr>
+                </a:tc>
+                <a:tc>
+                  <a:txBody>
+                    <a:bodyPr/>
+                    <a:lstStyle/>
+                    <a:p>
+                      <a:pPr algn="ctr">
+                        <a:defRPr sz="1600" b="1">
+                          <a:solidFill>
+                            <a:srgbClr val="FFFFFF"/>
+                          </a:solidFill>
+                        </a:defRPr>
+                      </a:pPr>
+                      <a:r>
+                        <a:t>AWQ4 (Local)</a:t>
+                      </a:r>
+                    </a:p>
+                  </a:txBody>
+                  <a:tcPr anchor="ctr">
+                    <a:solidFill>
+                      <a:srgbClr val="006DFD"/>
+                    </a:solidFill>
+                  </a:tcPr>
+                </a:tc>
+                <a:tc>
+                  <a:txBody>
+                    <a:bodyPr/>
+                    <a:lstStyle/>
+                    <a:p>
+                      <a:pPr algn="ctr">
+                        <a:defRPr sz="1600" b="1">
+                          <a:solidFill>
+                            <a:srgbClr val="FFFFFF"/>
+                          </a:solidFill>
+                        </a:defRPr>
+                      </a:pPr>
+                      <a:r>
+                        <a:t>GPT-4o (API)</a:t>
+                      </a:r>
+                    </a:p>
+                  </a:txBody>
+                  <a:tcPr anchor="ctr">
+                    <a:solidFill>
+                      <a:srgbClr val="006DFD"/>
+                    </a:solidFill>
+                  </a:tcPr>
+                </a:tc>
+                <a:extLst>
+                  <a:ext uri="{0D108BD9-81ED-4DB2-BD59-A6C34878D82A}">
+                    <a16:rowId xmlns:a16="http://schemas.microsoft.com/office/drawing/2014/main" val="10000"/>
+                  </a:ext>
+                </a:extLst>
+              </a:tr>
+              <a:tr h="457200">
+                <a:tc>
+                  <a:txBody>
+                    <a:bodyPr/>
+                    <a:lstStyle/>
+                    <a:p>
+                      <a:pPr algn="ctr">
+                        <a:defRPr sz="1500">
+                          <a:solidFill>
+                            <a:srgbClr val="333333"/>
+                          </a:solidFill>
+                        </a:defRPr>
+                      </a:pPr>
+                      <a:r>
+                        <a:t>Composite Accuracy</a:t>
+                      </a:r>
+                    </a:p>
+                  </a:txBody>
+                  <a:tcPr anchor="ctr">
+                    <a:solidFill>
+                      <a:srgbClr val="F0F4F8"/>
+                    </a:solidFill>
+                  </a:tcPr>
+                </a:tc>
+                <a:tc>
+                  <a:txBody>
+                    <a:bodyPr/>
+                    <a:lstStyle/>
+                    <a:p>
+                      <a:pPr algn="ctr">
+                        <a:defRPr sz="1500">
+                          <a:solidFill>
+                            <a:srgbClr val="333333"/>
+                          </a:solidFill>
+                        </a:defRPr>
+                      </a:pPr>
+                      <a:r>
+                        <a:rPr dirty="0">
+                          <a:solidFill>
+                            <a:srgbClr val="FF0000"/>
+                          </a:solidFill>
+                        </a:rPr>
+                        <a:t>0.9038</a:t>
+                      </a:r>
+                    </a:p>
+                  </a:txBody>
+                  <a:tcPr anchor="ctr">
+                    <a:solidFill>
+                      <a:srgbClr val="F0F4F8"/>
+                    </a:solidFill>
+                  </a:tcPr>
+                </a:tc>
+                <a:tc>
+                  <a:txBody>
+                    <a:bodyPr/>
+                    <a:lstStyle/>
+                    <a:p>
+                      <a:pPr algn="ctr">
+                        <a:defRPr sz="1500">
+                          <a:solidFill>
+                            <a:srgbClr val="333333"/>
+                          </a:solidFill>
+                        </a:defRPr>
+                      </a:pPr>
+                      <a:r>
+                        <a:rPr dirty="0">
+                          <a:solidFill>
+                            <a:srgbClr val="FF0000"/>
+                          </a:solidFill>
+                        </a:rPr>
+                        <a:t>0.6467</a:t>
+                      </a:r>
+                    </a:p>
+                  </a:txBody>
+                  <a:tcPr anchor="ctr">
+                    <a:solidFill>
+                      <a:srgbClr val="F0F4F8"/>
+                    </a:solidFill>
+                  </a:tcPr>
+                </a:tc>
+                <a:extLst>
+                  <a:ext uri="{0D108BD9-81ED-4DB2-BD59-A6C34878D82A}">
+                    <a16:rowId xmlns:a16="http://schemas.microsoft.com/office/drawing/2014/main" val="10001"/>
+                  </a:ext>
+                </a:extLst>
+              </a:tr>
+              <a:tr h="457200">
+                <a:tc>
+                  <a:txBody>
+                    <a:bodyPr/>
+                    <a:lstStyle/>
+                    <a:p>
+                      <a:pPr algn="ctr">
+                        <a:defRPr sz="1500">
+                          <a:solidFill>
+                            <a:srgbClr val="333333"/>
+                          </a:solidFill>
+                        </a:defRPr>
+                      </a:pPr>
+                      <a:r>
+                        <a:t>Value Accuracy</a:t>
+                      </a:r>
+                    </a:p>
+                  </a:txBody>
+                  <a:tcPr anchor="ctr">
+                    <a:solidFill>
+                      <a:srgbClr val="FFFFFF"/>
+                    </a:solidFill>
+                  </a:tcPr>
+                </a:tc>
+                <a:tc>
+                  <a:txBody>
+                    <a:bodyPr/>
+                    <a:lstStyle/>
+                    <a:p>
+                      <a:pPr algn="ctr">
+                        <a:defRPr sz="1500">
+                          <a:solidFill>
+                            <a:srgbClr val="333333"/>
+                          </a:solidFill>
+                        </a:defRPr>
+                      </a:pPr>
+                      <a:r>
+                        <a:t>100%</a:t>
+                      </a:r>
+                    </a:p>
+                  </a:txBody>
+                  <a:tcPr anchor="ctr">
+                    <a:solidFill>
+                      <a:srgbClr val="FFFFFF"/>
+                    </a:solidFill>
+                  </a:tcPr>
+                </a:tc>
+                <a:tc>
+                  <a:txBody>
+                    <a:bodyPr/>
+                    <a:lstStyle/>
+                    <a:p>
+                      <a:pPr algn="ctr">
+                        <a:defRPr sz="1500">
+                          <a:solidFill>
+                            <a:srgbClr val="333333"/>
+                          </a:solidFill>
+                        </a:defRPr>
+                      </a:pPr>
+                      <a:r>
+                        <a:rPr dirty="0"/>
+                        <a:t>42.9%</a:t>
+                      </a:r>
+                    </a:p>
+                  </a:txBody>
+                  <a:tcPr anchor="ctr">
+                    <a:solidFill>
+                      <a:srgbClr val="FFFFFF"/>
+                    </a:solidFill>
+                  </a:tcPr>
+                </a:tc>
+                <a:extLst>
+                  <a:ext uri="{0D108BD9-81ED-4DB2-BD59-A6C34878D82A}">
+                    <a16:rowId xmlns:a16="http://schemas.microsoft.com/office/drawing/2014/main" val="10002"/>
+                  </a:ext>
+                </a:extLst>
+              </a:tr>
+              <a:tr h="457200">
+                <a:tc>
+                  <a:txBody>
+                    <a:bodyPr/>
+                    <a:lstStyle/>
+                    <a:p>
+                      <a:pPr algn="ctr">
+                        <a:defRPr sz="1500">
+                          <a:solidFill>
+                            <a:srgbClr val="333333"/>
+                          </a:solidFill>
+                        </a:defRPr>
+                      </a:pPr>
+                      <a:r>
+                        <a:t>Intent Accuracy</a:t>
+                      </a:r>
+                    </a:p>
+                  </a:txBody>
+                  <a:tcPr anchor="ctr">
+                    <a:solidFill>
+                      <a:srgbClr val="F0F4F8"/>
+                    </a:solidFill>
+                  </a:tcPr>
+                </a:tc>
+                <a:tc>
+                  <a:txBody>
+                    <a:bodyPr/>
+                    <a:lstStyle/>
+                    <a:p>
+                      <a:pPr algn="ctr">
+                        <a:defRPr sz="1500">
+                          <a:solidFill>
+                            <a:srgbClr val="333333"/>
+                          </a:solidFill>
+                        </a:defRPr>
+                      </a:pPr>
+                      <a:r>
+                        <a:t>100%</a:t>
+                      </a:r>
+                    </a:p>
+                  </a:txBody>
+                  <a:tcPr anchor="ctr">
+                    <a:solidFill>
+                      <a:srgbClr val="F0F4F8"/>
+                    </a:solidFill>
+                  </a:tcPr>
+                </a:tc>
+                <a:tc>
+                  <a:txBody>
+                    <a:bodyPr/>
+                    <a:lstStyle/>
+                    <a:p>
+                      <a:pPr algn="ctr">
+                        <a:defRPr sz="1500">
+                          <a:solidFill>
+                            <a:srgbClr val="333333"/>
+                          </a:solidFill>
+                        </a:defRPr>
+                      </a:pPr>
+                      <a:r>
+                        <a:t>100%</a:t>
+                      </a:r>
+                    </a:p>
+                  </a:txBody>
+                  <a:tcPr anchor="ctr">
+                    <a:solidFill>
+                      <a:srgbClr val="F0F4F8"/>
+                    </a:solidFill>
+                  </a:tcPr>
+                </a:tc>
+                <a:extLst>
+                  <a:ext uri="{0D108BD9-81ED-4DB2-BD59-A6C34878D82A}">
+                    <a16:rowId xmlns:a16="http://schemas.microsoft.com/office/drawing/2014/main" val="10003"/>
+                  </a:ext>
+                </a:extLst>
+              </a:tr>
+              <a:tr h="457200">
+                <a:tc>
+                  <a:txBody>
+                    <a:bodyPr/>
+                    <a:lstStyle/>
+                    <a:p>
+                      <a:pPr algn="ctr">
+                        <a:defRPr sz="1500">
+                          <a:solidFill>
+                            <a:srgbClr val="333333"/>
+                          </a:solidFill>
+                        </a:defRPr>
+                      </a:pPr>
+                      <a:r>
+                        <a:rPr dirty="0"/>
+                        <a:t>Keyword Hit Rate</a:t>
+                      </a:r>
+                    </a:p>
+                  </a:txBody>
+                  <a:tcPr anchor="ctr">
+                    <a:solidFill>
+                      <a:srgbClr val="FFFFFF"/>
+                    </a:solidFill>
+                  </a:tcPr>
+                </a:tc>
+                <a:tc>
+                  <a:txBody>
+                    <a:bodyPr/>
+                    <a:lstStyle/>
+                    <a:p>
+                      <a:pPr algn="ctr">
+                        <a:defRPr sz="1500">
+                          <a:solidFill>
+                            <a:srgbClr val="333333"/>
+                          </a:solidFill>
+                        </a:defRPr>
+                      </a:pPr>
+                      <a:r>
+                        <a:t>93.9%</a:t>
+                      </a:r>
+                    </a:p>
+                  </a:txBody>
+                  <a:tcPr anchor="ctr">
+                    <a:solidFill>
+                      <a:srgbClr val="FFFFFF"/>
+                    </a:solidFill>
+                  </a:tcPr>
+                </a:tc>
+                <a:tc>
+                  <a:txBody>
+                    <a:bodyPr/>
+                    <a:lstStyle/>
+                    <a:p>
+                      <a:pPr algn="ctr">
+                        <a:defRPr sz="1500">
+                          <a:solidFill>
+                            <a:srgbClr val="333333"/>
+                          </a:solidFill>
+                        </a:defRPr>
+                      </a:pPr>
+                      <a:r>
+                        <a:t>75.7%</a:t>
+                      </a:r>
+                    </a:p>
+                  </a:txBody>
+                  <a:tcPr anchor="ctr">
+                    <a:solidFill>
+                      <a:srgbClr val="FFFFFF"/>
+                    </a:solidFill>
+                  </a:tcPr>
+                </a:tc>
+                <a:extLst>
+                  <a:ext uri="{0D108BD9-81ED-4DB2-BD59-A6C34878D82A}">
+                    <a16:rowId xmlns:a16="http://schemas.microsoft.com/office/drawing/2014/main" val="10004"/>
+                  </a:ext>
+                </a:extLst>
+              </a:tr>
+              <a:tr h="457200">
+                <a:tc>
+                  <a:txBody>
+                    <a:bodyPr/>
+                    <a:lstStyle/>
+                    <a:p>
+                      <a:pPr algn="ctr">
+                        <a:defRPr sz="1500">
+                          <a:solidFill>
+                            <a:srgbClr val="333333"/>
+                          </a:solidFill>
+                        </a:defRPr>
+                      </a:pPr>
+                      <a:r>
+                        <a:rPr dirty="0"/>
+                        <a:t>Fluency (1-5)</a:t>
+                      </a:r>
+                    </a:p>
+                  </a:txBody>
+                  <a:tcPr anchor="ctr">
+                    <a:solidFill>
+                      <a:srgbClr val="F0F4F8"/>
+                    </a:solidFill>
+                  </a:tcPr>
+                </a:tc>
+                <a:tc>
+                  <a:txBody>
+                    <a:bodyPr/>
+                    <a:lstStyle/>
+                    <a:p>
+                      <a:pPr algn="ctr">
+                        <a:defRPr sz="1500">
+                          <a:solidFill>
+                            <a:srgbClr val="333333"/>
+                          </a:solidFill>
+                        </a:defRPr>
+                      </a:pPr>
+                      <a:r>
+                        <a:t>3.4</a:t>
+                      </a:r>
+                    </a:p>
+                  </a:txBody>
+                  <a:tcPr anchor="ctr">
+                    <a:solidFill>
+                      <a:srgbClr val="F0F4F8"/>
+                    </a:solidFill>
+                  </a:tcPr>
+                </a:tc>
+                <a:tc>
+                  <a:txBody>
+                    <a:bodyPr/>
+                    <a:lstStyle/>
+                    <a:p>
+                      <a:pPr algn="ctr">
+                        <a:defRPr sz="1500">
+                          <a:solidFill>
+                            <a:srgbClr val="333333"/>
+                          </a:solidFill>
+                        </a:defRPr>
+                      </a:pPr>
+                      <a:r>
+                        <a:t>4.7</a:t>
+                      </a:r>
+                    </a:p>
+                  </a:txBody>
+                  <a:tcPr anchor="ctr">
+                    <a:solidFill>
+                      <a:srgbClr val="F0F4F8"/>
+                    </a:solidFill>
+                  </a:tcPr>
+                </a:tc>
+                <a:extLst>
+                  <a:ext uri="{0D108BD9-81ED-4DB2-BD59-A6C34878D82A}">
+                    <a16:rowId xmlns:a16="http://schemas.microsoft.com/office/drawing/2014/main" val="10005"/>
+                  </a:ext>
+                </a:extLst>
+              </a:tr>
+              <a:tr h="457200">
+                <a:tc>
+                  <a:txBody>
+                    <a:bodyPr/>
+                    <a:lstStyle/>
+                    <a:p>
+                      <a:pPr algn="ctr">
+                        <a:defRPr sz="1500">
+                          <a:solidFill>
+                            <a:srgbClr val="333333"/>
+                          </a:solidFill>
+                        </a:defRPr>
+                      </a:pPr>
+                      <a:r>
+                        <a:t>Latency p50 (c=1)</a:t>
+                      </a:r>
+                    </a:p>
+                  </a:txBody>
+                  <a:tcPr anchor="ctr">
+                    <a:solidFill>
+                      <a:srgbClr val="FFFFFF"/>
+                    </a:solidFill>
+                  </a:tcPr>
+                </a:tc>
+                <a:tc>
+                  <a:txBody>
+                    <a:bodyPr/>
+                    <a:lstStyle/>
+                    <a:p>
+                      <a:pPr algn="ctr">
+                        <a:defRPr sz="1500">
+                          <a:solidFill>
+                            <a:srgbClr val="333333"/>
+                          </a:solidFill>
+                        </a:defRPr>
+                      </a:pPr>
+                      <a:r>
+                        <a:t>0.53s</a:t>
+                      </a:r>
+                    </a:p>
+                  </a:txBody>
+                  <a:tcPr anchor="ctr">
+                    <a:solidFill>
+                      <a:srgbClr val="FFFFFF"/>
+                    </a:solidFill>
+                  </a:tcPr>
+                </a:tc>
+                <a:tc>
+                  <a:txBody>
+                    <a:bodyPr/>
+                    <a:lstStyle/>
+                    <a:p>
+                      <a:pPr algn="ctr">
+                        <a:defRPr sz="1500">
+                          <a:solidFill>
+                            <a:srgbClr val="333333"/>
+                          </a:solidFill>
+                        </a:defRPr>
+                      </a:pPr>
+                      <a:r>
+                        <a:t>0.85s</a:t>
+                      </a:r>
+                    </a:p>
+                  </a:txBody>
+                  <a:tcPr anchor="ctr">
+                    <a:solidFill>
+                      <a:srgbClr val="FFFFFF"/>
+                    </a:solidFill>
+                  </a:tcPr>
+                </a:tc>
+                <a:extLst>
+                  <a:ext uri="{0D108BD9-81ED-4DB2-BD59-A6C34878D82A}">
+                    <a16:rowId xmlns:a16="http://schemas.microsoft.com/office/drawing/2014/main" val="10006"/>
+                  </a:ext>
+                </a:extLst>
+              </a:tr>
+              <a:tr h="457200">
+                <a:tc>
+                  <a:txBody>
+                    <a:bodyPr/>
+                    <a:lstStyle/>
+                    <a:p>
+                      <a:pPr algn="ctr">
+                        <a:defRPr sz="1500">
+                          <a:solidFill>
+                            <a:srgbClr val="333333"/>
+                          </a:solidFill>
+                        </a:defRPr>
+                      </a:pPr>
+                      <a:r>
+                        <a:t>Peak QPS</a:t>
+                      </a:r>
+                    </a:p>
+                  </a:txBody>
+                  <a:tcPr anchor="ctr">
+                    <a:solidFill>
+                      <a:srgbClr val="F0F4F8"/>
+                    </a:solidFill>
+                  </a:tcPr>
+                </a:tc>
+                <a:tc>
+                  <a:txBody>
+                    <a:bodyPr/>
+                    <a:lstStyle/>
+                    <a:p>
+                      <a:pPr algn="ctr">
+                        <a:defRPr sz="1500">
+                          <a:solidFill>
+                            <a:srgbClr val="333333"/>
+                          </a:solidFill>
+                        </a:defRPr>
+                      </a:pPr>
+                      <a:r>
+                        <a:rPr dirty="0">
+                          <a:solidFill>
+                            <a:srgbClr val="FF0000"/>
+                          </a:solidFill>
+                        </a:rPr>
+                        <a:t>3.46 (c=16)</a:t>
+                      </a:r>
+                    </a:p>
+                  </a:txBody>
+                  <a:tcPr anchor="ctr">
+                    <a:solidFill>
+                      <a:srgbClr val="F0F4F8"/>
+                    </a:solidFill>
+                  </a:tcPr>
+                </a:tc>
+                <a:tc>
+                  <a:txBody>
+                    <a:bodyPr/>
+                    <a:lstStyle/>
+                    <a:p>
+                      <a:pPr algn="ctr">
+                        <a:defRPr sz="1500">
+                          <a:solidFill>
+                            <a:srgbClr val="333333"/>
+                          </a:solidFill>
+                        </a:defRPr>
+                      </a:pPr>
+                      <a:r>
+                        <a:rPr dirty="0">
+                          <a:solidFill>
+                            <a:srgbClr val="FF0000"/>
+                          </a:solidFill>
+                        </a:rPr>
+                        <a:t>7.03 (c=8)</a:t>
+                      </a:r>
+                    </a:p>
+                  </a:txBody>
+                  <a:tcPr anchor="ctr">
+                    <a:solidFill>
+                      <a:srgbClr val="F0F4F8"/>
+                    </a:solidFill>
+                  </a:tcPr>
+                </a:tc>
+                <a:extLst>
+                  <a:ext uri="{0D108BD9-81ED-4DB2-BD59-A6C34878D82A}">
+                    <a16:rowId xmlns:a16="http://schemas.microsoft.com/office/drawing/2014/main" val="10007"/>
+                  </a:ext>
+                </a:extLst>
+              </a:tr>
+              <a:tr h="457200">
+                <a:tc>
+                  <a:txBody>
+                    <a:bodyPr/>
+                    <a:lstStyle/>
+                    <a:p>
+                      <a:pPr algn="ctr">
+                        <a:defRPr sz="1500">
+                          <a:solidFill>
+                            <a:srgbClr val="333333"/>
+                          </a:solidFill>
+                        </a:defRPr>
+                      </a:pPr>
+                      <a:r>
+                        <a:t>Cost per 1K queries</a:t>
+                      </a:r>
+                    </a:p>
+                  </a:txBody>
+                  <a:tcPr anchor="ctr">
+                    <a:solidFill>
+                      <a:srgbClr val="FFFFFF"/>
+                    </a:solidFill>
+                  </a:tcPr>
+                </a:tc>
+                <a:tc>
+                  <a:txBody>
+                    <a:bodyPr/>
+                    <a:lstStyle/>
+                    <a:p>
+                      <a:pPr algn="ctr">
+                        <a:defRPr sz="1500">
+                          <a:solidFill>
+                            <a:srgbClr val="333333"/>
+                          </a:solidFill>
+                        </a:defRPr>
+                      </a:pPr>
+                      <a:r>
+                        <a:rPr dirty="0">
+                          <a:solidFill>
+                            <a:srgbClr val="FF0000"/>
+                          </a:solidFill>
+                        </a:rPr>
+                        <a:t>~$0</a:t>
+                      </a:r>
+                    </a:p>
+                  </a:txBody>
+                  <a:tcPr anchor="ctr">
+                    <a:solidFill>
+                      <a:srgbClr val="FFFFFF"/>
+                    </a:solidFill>
+                  </a:tcPr>
+                </a:tc>
+                <a:tc>
+                  <a:txBody>
+                    <a:bodyPr/>
+                    <a:lstStyle/>
+                    <a:p>
+                      <a:pPr algn="ctr">
+                        <a:defRPr sz="1500">
+                          <a:solidFill>
+                            <a:srgbClr val="333333"/>
+                          </a:solidFill>
+                        </a:defRPr>
+                      </a:pPr>
+                      <a:r>
+                        <a:rPr dirty="0">
+                          <a:solidFill>
+                            <a:srgbClr val="FF0000"/>
+                          </a:solidFill>
+                        </a:rPr>
+                        <a:t>~$15-30</a:t>
+                      </a:r>
+                    </a:p>
+                  </a:txBody>
+                  <a:tcPr anchor="ctr">
+                    <a:solidFill>
+                      <a:srgbClr val="FFFFFF"/>
+                    </a:solidFill>
+                  </a:tcPr>
+                </a:tc>
+                <a:extLst>
+                  <a:ext uri="{0D108BD9-81ED-4DB2-BD59-A6C34878D82A}">
+                    <a16:rowId xmlns:a16="http://schemas.microsoft.com/office/drawing/2014/main" val="10008"/>
+                  </a:ext>
+                </a:extLst>
+              </a:tr>
+              <a:tr h="457200">
+                <a:tc>
+                  <a:txBody>
+                    <a:bodyPr/>
+                    <a:lstStyle/>
+                    <a:p>
+                      <a:pPr algn="ctr">
+                        <a:defRPr sz="1500">
+                          <a:solidFill>
+                            <a:srgbClr val="333333"/>
+                          </a:solidFill>
+                        </a:defRPr>
+                      </a:pPr>
+                      <a:r>
+                        <a:t>Data Privacy</a:t>
+                      </a:r>
+                    </a:p>
+                  </a:txBody>
+                  <a:tcPr anchor="ctr">
+                    <a:solidFill>
+                      <a:srgbClr val="F0F4F8"/>
+                    </a:solidFill>
+                  </a:tcPr>
+                </a:tc>
+                <a:tc>
+                  <a:txBody>
+                    <a:bodyPr/>
+                    <a:lstStyle/>
+                    <a:p>
+                      <a:pPr algn="ctr">
+                        <a:defRPr sz="1500">
+                          <a:solidFill>
+                            <a:srgbClr val="333333"/>
+                          </a:solidFill>
+                        </a:defRPr>
+                      </a:pPr>
+                      <a:r>
+                        <a:t>Fully local</a:t>
+                      </a:r>
+                    </a:p>
+                  </a:txBody>
+                  <a:tcPr anchor="ctr">
+                    <a:solidFill>
+                      <a:srgbClr val="F0F4F8"/>
+                    </a:solidFill>
+                  </a:tcPr>
+                </a:tc>
+                <a:tc>
+                  <a:txBody>
+                    <a:bodyPr/>
+                    <a:lstStyle/>
+                    <a:p>
+                      <a:pPr algn="ctr">
+                        <a:defRPr sz="1500">
+                          <a:solidFill>
+                            <a:srgbClr val="333333"/>
+                          </a:solidFill>
+                        </a:defRPr>
+                      </a:pPr>
+                      <a:r>
+                        <a:rPr dirty="0"/>
+                        <a:t>Sent to OpenAI</a:t>
+                      </a:r>
+                    </a:p>
+                  </a:txBody>
+                  <a:tcPr anchor="ctr">
+                    <a:solidFill>
+                      <a:srgbClr val="F0F4F8"/>
+                    </a:solidFill>
+                  </a:tcPr>
+                </a:tc>
+                <a:extLst>
+                  <a:ext uri="{0D108BD9-81ED-4DB2-BD59-A6C34878D82A}">
+                    <a16:rowId xmlns:a16="http://schemas.microsoft.com/office/drawing/2014/main" val="10009"/>
+                  </a:ext>
+                </a:extLst>
+              </a:tr>
+            </a:tbl>
+          </a:graphicData>
+        </a:graphic>
+      </p:graphicFrame>
     </p:spTree>
   </p:cSld>
   <p:clrMapOvr>
@@ -6366,8 +7349,8 @@
 </p:sld>
 </file>
 
-<file path=ppt/slides/slide8.xml><?xml version="1.0" encoding="utf-8"?>
-<p:sld xmlns:a="http://schemas.openxmlformats.org/drawingml/2006/main" xmlns:p="http://schemas.openxmlformats.org/presentationml/2006/main" xmlns:r="http://schemas.openxmlformats.org/officeDocument/2006/relationships">
+<file path=ppt/slides/slide9.xml><?xml version="1.0" encoding="utf-8"?>
+<p:sld xmlns:a="http://schemas.openxmlformats.org/drawingml/2006/main" xmlns:r="http://schemas.openxmlformats.org/officeDocument/2006/relationships" xmlns:p="http://schemas.openxmlformats.org/presentationml/2006/main">
   <p:cSld>
     <p:bg>
       <p:bgPr>
@@ -6383,7 +7366,14 @@
         <p:cNvGrpSpPr/>
         <p:nvPr/>
       </p:nvGrpSpPr>
-      <p:grpSpPr/>
+      <p:grpSpPr>
+        <a:xfrm>
+          <a:off x="0" y="0"/>
+          <a:ext cx="0" cy="0"/>
+          <a:chOff x="0" y="0"/>
+          <a:chExt cx="0" cy="0"/>
+        </a:xfrm>
+      </p:grpSpPr>
       <p:sp>
         <p:nvSpPr>
           <p:cNvPr id="2" name="TextBox 1"/>
@@ -6392,8 +7382,8 @@
         </p:nvSpPr>
         <p:spPr>
           <a:xfrm>
-            <a:off x="731520" y="274320"/>
-            <a:ext cx="10058400" cy="731520"/>
+            <a:off x="731520" y="365760"/>
+            <a:ext cx="4468083" cy="584775"/>
           </a:xfrm>
           <a:prstGeom prst="rect">
             <a:avLst/>
@@ -6407,15 +7397,25 @@
           <a:lstStyle/>
           <a:p>
             <a:pPr>
-              <a:defRPr sz="3000" b="1">
+              <a:defRPr sz="3200" b="1">
                 <a:solidFill>
                   <a:srgbClr val="1A1A2E"/>
                 </a:solidFill>
               </a:defRPr>
             </a:pPr>
             <a:r>
-              <a:t>Latency: Median Response Time vs Concurrency</a:t>
-            </a:r>
+              <a:rPr lang="en-US" dirty="0"/>
+              <a:t>Conclusion </a:t>
+            </a:r>
+            <a:r>
+              <a:rPr dirty="0"/>
+              <a:t>&amp; </a:t>
+            </a:r>
+            <a:r>
+              <a:rPr lang="en-US" dirty="0"/>
+              <a:t>Future Plan</a:t>
+            </a:r>
+            <a:endParaRPr dirty="0"/>
           </a:p>
         </p:txBody>
       </p:sp>
@@ -6427,7 +7427,7 @@
         </p:nvSpPr>
         <p:spPr>
           <a:xfrm>
-            <a:off x="731520" y="1005840"/>
+            <a:off x="731520" y="1188720"/>
             <a:ext cx="1371600" cy="54864"/>
           </a:xfrm>
           <a:prstGeom prst="rect">
@@ -6459,43 +7459,20 @@
           <a:lstStyle/>
           <a:p>
             <a:pPr algn="ctr"/>
-          </a:p>
-        </p:txBody>
-      </p:sp>
-      <p:pic>
-        <p:nvPicPr>
-          <p:cNvPr id="4" name="Picture 3" descr="latency_comparison.png"/>
-          <p:cNvPicPr>
-            <a:picLocks noChangeAspect="1"/>
-          </p:cNvPicPr>
-          <p:nvPr/>
-        </p:nvPicPr>
-        <p:blipFill>
-          <a:blip r:embed="rId2"/>
-          <a:stretch>
-            <a:fillRect/>
-          </a:stretch>
-        </p:blipFill>
-        <p:spPr>
-          <a:xfrm>
-            <a:off x="731520" y="1280160"/>
-            <a:ext cx="10515600" cy="4754880"/>
-          </a:xfrm>
-          <a:prstGeom prst="rect">
-            <a:avLst/>
-          </a:prstGeom>
-        </p:spPr>
-      </p:pic>
-      <p:sp>
-        <p:nvSpPr>
-          <p:cNvPr id="5" name="TextBox 4"/>
+            <a:endParaRPr/>
+          </a:p>
+        </p:txBody>
+      </p:sp>
+      <p:sp>
+        <p:nvSpPr>
+          <p:cNvPr id="4" name="TextBox 3"/>
           <p:cNvSpPr txBox="1"/>
           <p:nvPr/>
         </p:nvSpPr>
         <p:spPr>
           <a:xfrm>
-            <a:off x="731520" y="6126480"/>
-            <a:ext cx="10058400" cy="548640"/>
+            <a:off x="731520" y="1575852"/>
+            <a:ext cx="10515600" cy="2708434"/>
           </a:xfrm>
           <a:prstGeom prst="rect">
             <a:avLst/>
@@ -6509,181 +7486,230 @@
           <a:lstStyle/>
           <a:p>
             <a:pPr>
-              <a:defRPr sz="1400" i="1">
+              <a:spcAft>
+                <a:spcPts val="1200"/>
+              </a:spcAft>
+            </a:pPr>
+            <a:r>
+              <a:rPr sz="2000" b="1" dirty="0">
                 <a:solidFill>
-                  <a:srgbClr val="AAAABB"/>
+                  <a:srgbClr val="333333"/>
+                </a:solidFill>
+              </a:rPr>
+              <a:t>Conclusion:</a:t>
+            </a:r>
+            <a:r>
+              <a:rPr sz="2000" dirty="0">
+                <a:solidFill>
+                  <a:srgbClr val="333333"/>
+                </a:solidFill>
+              </a:rPr>
+              <a:t> </a:t>
+            </a:r>
+            <a:endParaRPr lang="en-US" sz="2000" dirty="0">
+              <a:solidFill>
+                <a:srgbClr val="333333"/>
+              </a:solidFill>
+            </a:endParaRPr>
+          </a:p>
+          <a:p>
+            <a:pPr>
+              <a:spcAft>
+                <a:spcPts val="1200"/>
+              </a:spcAft>
+            </a:pPr>
+            <a:r>
+              <a:rPr sz="2000" dirty="0">
+                <a:solidFill>
+                  <a:srgbClr val="333333"/>
+                </a:solidFill>
+              </a:rPr>
+              <a:t>A local 3B model with </a:t>
+            </a:r>
+            <a:r>
+              <a:rPr lang="en-US" sz="2000" dirty="0">
+                <a:solidFill>
+                  <a:srgbClr val="333333"/>
+                </a:solidFill>
+              </a:rPr>
+              <a:t>LoRA SFT and </a:t>
+            </a:r>
+            <a:r>
+              <a:rPr sz="2000" dirty="0">
+                <a:solidFill>
+                  <a:srgbClr val="333333"/>
+                </a:solidFill>
+              </a:rPr>
+              <a:t>AWQ4 </a:t>
+            </a:r>
+            <a:r>
+              <a:rPr lang="en-US" sz="2000" dirty="0">
+                <a:solidFill>
+                  <a:srgbClr val="333333"/>
+                </a:solidFill>
+              </a:rPr>
+              <a:t>Quantization </a:t>
+            </a:r>
+            <a:r>
+              <a:rPr sz="2000" dirty="0">
+                <a:solidFill>
+                  <a:srgbClr val="333333"/>
+                </a:solidFill>
+              </a:rPr>
+              <a:t>+ vLLM achieves 0.90 accuracy,</a:t>
+            </a:r>
+          </a:p>
+          <a:p>
+            <a:pPr>
+              <a:spcAft>
+                <a:spcPts val="1200"/>
+              </a:spcAft>
+              <a:defRPr sz="2000">
+                <a:solidFill>
+                  <a:srgbClr val="333333"/>
                 </a:solidFill>
               </a:defRPr>
             </a:pPr>
             <a:r>
-              <a:t>AWQ4 maintains flat ~2.6s p50 at c=4-16. INT8 spikes to 24.6s at c=8. GPT-4o has lowest latency but worst accuracy.</a:t>
-            </a:r>
-          </a:p>
-        </p:txBody>
-      </p:sp>
-    </p:spTree>
-  </p:cSld>
-  <p:clrMapOvr>
-    <a:masterClrMapping/>
-  </p:clrMapOvr>
-</p:sld>
-</file>
-
-<file path=ppt/slides/slide9.xml><?xml version="1.0" encoding="utf-8"?>
-<p:sld xmlns:a="http://schemas.openxmlformats.org/drawingml/2006/main" xmlns:p="http://schemas.openxmlformats.org/presentationml/2006/main" xmlns:r="http://schemas.openxmlformats.org/officeDocument/2006/relationships">
-  <p:cSld>
-    <p:bg>
-      <p:bgPr>
-        <a:solidFill>
-          <a:srgbClr val="FFFFFF"/>
-        </a:solidFill>
-        <a:effectLst/>
-      </p:bgPr>
-    </p:bg>
-    <p:spTree>
-      <p:nvGrpSpPr>
-        <p:cNvPr id="1" name=""/>
-        <p:cNvGrpSpPr/>
-        <p:nvPr/>
-      </p:nvGrpSpPr>
-      <p:grpSpPr/>
-      <p:sp>
-        <p:nvSpPr>
-          <p:cNvPr id="2" name="TextBox 1"/>
-          <p:cNvSpPr txBox="1"/>
-          <p:nvPr/>
-        </p:nvSpPr>
-        <p:spPr>
-          <a:xfrm>
-            <a:off x="731520" y="274320"/>
-            <a:ext cx="10058400" cy="731520"/>
-          </a:xfrm>
-          <a:prstGeom prst="rect">
-            <a:avLst/>
-          </a:prstGeom>
-          <a:noFill/>
-        </p:spPr>
-        <p:txBody>
-          <a:bodyPr wrap="none">
-            <a:spAutoFit/>
-          </a:bodyPr>
-          <a:lstStyle/>
+              <a:rPr dirty="0"/>
+              <a:t>100% value accuracy, and 0.53s latency -- beating GPT-4o on financial QA at $0/query.</a:t>
+            </a:r>
+            <a:endParaRPr lang="en-US" b="1" dirty="0"/>
+          </a:p>
           <a:p>
             <a:pPr>
-              <a:defRPr sz="3000" b="1">
+              <a:spcAft>
+                <a:spcPts val="1200"/>
+              </a:spcAft>
+              <a:defRPr sz="2000">
                 <a:solidFill>
-                  <a:srgbClr val="1A1A2E"/>
+                  <a:srgbClr val="333333"/>
                 </a:solidFill>
               </a:defRPr>
             </a:pPr>
             <a:r>
-              <a:t>End-to-End Pipeline Latency</a:t>
-            </a:r>
-          </a:p>
-        </p:txBody>
-      </p:sp>
-      <p:sp>
-        <p:nvSpPr>
-          <p:cNvPr id="3" name="Rectangle 2"/>
-          <p:cNvSpPr/>
+              <a:rPr lang="en-US" b="1" dirty="0"/>
+              <a:t>Future Plan:</a:t>
+            </a:r>
+          </a:p>
+          <a:p>
+            <a:pPr>
+              <a:spcAft>
+                <a:spcPts val="1200"/>
+              </a:spcAft>
+            </a:pPr>
+            <a:r>
+              <a:rPr lang="en-US" sz="2000" dirty="0">
+                <a:solidFill>
+                  <a:srgbClr val="333333"/>
+                </a:solidFill>
+              </a:rPr>
+              <a:t>Fluency gap – larger scale answer generator </a:t>
+            </a:r>
+          </a:p>
+          <a:p>
+            <a:pPr>
+              <a:spcAft>
+                <a:spcPts val="1200"/>
+              </a:spcAft>
+            </a:pPr>
+            <a:r>
+              <a:rPr lang="en-US" sz="2000" dirty="0">
+                <a:solidFill>
+                  <a:srgbClr val="333333"/>
+                </a:solidFill>
+              </a:rPr>
+              <a:t>Multi-GPU scaling -- tensor parallelism or load-balanced vLLM for &gt;5 QPS</a:t>
+            </a:r>
+          </a:p>
+        </p:txBody>
+      </p:sp>
+      <p:grpSp>
+        <p:nvGrpSpPr>
+          <p:cNvPr id="7" name="Group 6">
+            <a:extLst>
+              <a:ext uri="{FF2B5EF4-FFF2-40B4-BE49-F238E27FC236}">
+                <a16:creationId xmlns:a16="http://schemas.microsoft.com/office/drawing/2014/main" id="{4DDF6C7A-1664-10B4-C151-1FCE918B6FA8}"/>
+              </a:ext>
+            </a:extLst>
+          </p:cNvPr>
+          <p:cNvGrpSpPr/>
           <p:nvPr/>
-        </p:nvSpPr>
-        <p:spPr>
-          <a:xfrm>
-            <a:off x="731520" y="1005840"/>
-            <a:ext cx="1371600" cy="54864"/>
-          </a:xfrm>
-          <a:prstGeom prst="rect">
-            <a:avLst/>
-          </a:prstGeom>
-          <a:solidFill>
-            <a:srgbClr val="006DFD"/>
-          </a:solidFill>
-          <a:ln>
+        </p:nvGrpSpPr>
+        <p:grpSpPr>
+          <a:xfrm>
+            <a:off x="5028882" y="4458495"/>
+            <a:ext cx="1920875" cy="2132131"/>
+            <a:chOff x="5262038" y="4534695"/>
+            <a:chExt cx="1920875" cy="2132131"/>
+          </a:xfrm>
+        </p:grpSpPr>
+        <p:pic>
+          <p:nvPicPr>
+            <p:cNvPr id="5" name="Picture 4">
+              <a:extLst>
+                <a:ext uri="{FF2B5EF4-FFF2-40B4-BE49-F238E27FC236}">
+                  <a16:creationId xmlns:a16="http://schemas.microsoft.com/office/drawing/2014/main" id="{80058A88-586A-E4FE-1DEB-2E73AF5A478A}"/>
+                </a:ext>
+              </a:extLst>
+            </p:cNvPr>
+            <p:cNvPicPr>
+              <a:picLocks noChangeAspect="1"/>
+            </p:cNvPicPr>
+            <p:nvPr/>
+          </p:nvPicPr>
+          <p:blipFill>
+            <a:blip r:embed="rId2"/>
+            <a:stretch>
+              <a:fillRect/>
+            </a:stretch>
+          </p:blipFill>
+          <p:spPr>
+            <a:xfrm>
+              <a:off x="5262038" y="4534695"/>
+              <a:ext cx="1920875" cy="1920875"/>
+            </a:xfrm>
+            <a:prstGeom prst="rect">
+              <a:avLst/>
+            </a:prstGeom>
+          </p:spPr>
+        </p:pic>
+        <p:sp>
+          <p:nvSpPr>
+            <p:cNvPr id="6" name="TextBox 5">
+              <a:extLst>
+                <a:ext uri="{FF2B5EF4-FFF2-40B4-BE49-F238E27FC236}">
+                  <a16:creationId xmlns:a16="http://schemas.microsoft.com/office/drawing/2014/main" id="{B76BB204-DDF7-629B-1E10-B1EB8A684A15}"/>
+                </a:ext>
+              </a:extLst>
+            </p:cNvPr>
+            <p:cNvSpPr txBox="1"/>
+            <p:nvPr/>
+          </p:nvSpPr>
+          <p:spPr>
+            <a:xfrm>
+              <a:off x="5599653" y="6297494"/>
+              <a:ext cx="1245647" cy="369332"/>
+            </a:xfrm>
+            <a:prstGeom prst="rect">
+              <a:avLst/>
+            </a:prstGeom>
             <a:noFill/>
-          </a:ln>
-        </p:spPr>
-        <p:style>
-          <a:lnRef idx="1">
-            <a:schemeClr val="accent1"/>
-          </a:lnRef>
-          <a:fillRef idx="3">
-            <a:schemeClr val="accent1"/>
-          </a:fillRef>
-          <a:effectRef idx="2">
-            <a:schemeClr val="accent1"/>
-          </a:effectRef>
-          <a:fontRef idx="minor">
-            <a:schemeClr val="lt1"/>
-          </a:fontRef>
-        </p:style>
-        <p:txBody>
-          <a:bodyPr rtlCol="0" anchor="ctr"/>
-          <a:lstStyle/>
-          <a:p>
-            <a:pPr algn="ctr"/>
-          </a:p>
-        </p:txBody>
-      </p:sp>
-      <p:pic>
-        <p:nvPicPr>
-          <p:cNvPr id="4" name="Picture 3" descr="pipeline_latency.png"/>
-          <p:cNvPicPr>
-            <a:picLocks noChangeAspect="1"/>
-          </p:cNvPicPr>
-          <p:nvPr/>
-        </p:nvPicPr>
-        <p:blipFill>
-          <a:blip r:embed="rId2"/>
-          <a:stretch>
-            <a:fillRect/>
-          </a:stretch>
-        </p:blipFill>
-        <p:spPr>
-          <a:xfrm>
-            <a:off x="731520" y="1280160"/>
-            <a:ext cx="10515600" cy="4754880"/>
-          </a:xfrm>
-          <a:prstGeom prst="rect">
-            <a:avLst/>
-          </a:prstGeom>
-        </p:spPr>
-      </p:pic>
-      <p:sp>
-        <p:nvSpPr>
-          <p:cNvPr id="5" name="TextBox 4"/>
-          <p:cNvSpPr txBox="1"/>
-          <p:nvPr/>
-        </p:nvSpPr>
-        <p:spPr>
-          <a:xfrm>
-            <a:off x="731520" y="6126480"/>
-            <a:ext cx="10058400" cy="548640"/>
-          </a:xfrm>
-          <a:prstGeom prst="rect">
-            <a:avLst/>
-          </a:prstGeom>
-          <a:noFill/>
-        </p:spPr>
-        <p:txBody>
-          <a:bodyPr wrap="square">
-            <a:spAutoFit/>
-          </a:bodyPr>
-          <a:lstStyle/>
-          <a:p>
-            <a:pPr>
-              <a:defRPr sz="1400" i="1">
-                <a:solidFill>
-                  <a:srgbClr val="AAAABB"/>
-                </a:solidFill>
-              </a:defRPr>
-            </a:pPr>
-            <a:r>
-              <a:t>AWQ4 p50 = 0.8s (Type1 queries resolve in &lt;1s via SQL). INT8 p95 = 71.9s due to bitsandbytes JIT compilation on early requests.</a:t>
-            </a:r>
-          </a:p>
-        </p:txBody>
-      </p:sp>
+          </p:spPr>
+          <p:txBody>
+            <a:bodyPr wrap="square" rtlCol="0">
+              <a:spAutoFit/>
+            </a:bodyPr>
+            <a:lstStyle/>
+            <a:p>
+              <a:r>
+                <a:rPr lang="en-US" dirty="0"/>
+                <a:t>Github Link</a:t>
+              </a:r>
+            </a:p>
+          </p:txBody>
+        </p:sp>
+      </p:grpSp>
     </p:spTree>
   </p:cSld>
   <p:clrMapOvr>
@@ -7010,4 +8036,356 @@
   </a:objectDefaults>
   <a:extraClrSchemeLst/>
 </a:theme>
+</file>
+
+<file path=ppt/theme/theme2.xml><?xml version="1.0" encoding="utf-8"?>
+<a:theme xmlns:a="http://schemas.openxmlformats.org/drawingml/2006/main" name="Office Theme">
+  <a:themeElements>
+    <a:clrScheme name="Office">
+      <a:dk1>
+        <a:sysClr val="windowText" lastClr="000000"/>
+      </a:dk1>
+      <a:lt1>
+        <a:sysClr val="window" lastClr="FFFFFF"/>
+      </a:lt1>
+      <a:dk2>
+        <a:srgbClr val="0E2841"/>
+      </a:dk2>
+      <a:lt2>
+        <a:srgbClr val="E8E8E8"/>
+      </a:lt2>
+      <a:accent1>
+        <a:srgbClr val="156082"/>
+      </a:accent1>
+      <a:accent2>
+        <a:srgbClr val="E97132"/>
+      </a:accent2>
+      <a:accent3>
+        <a:srgbClr val="196B24"/>
+      </a:accent3>
+      <a:accent4>
+        <a:srgbClr val="0F9ED5"/>
+      </a:accent4>
+      <a:accent5>
+        <a:srgbClr val="A02B93"/>
+      </a:accent5>
+      <a:accent6>
+        <a:srgbClr val="4EA72E"/>
+      </a:accent6>
+      <a:hlink>
+        <a:srgbClr val="467886"/>
+      </a:hlink>
+      <a:folHlink>
+        <a:srgbClr val="96607D"/>
+      </a:folHlink>
+    </a:clrScheme>
+    <a:fontScheme name="Office">
+      <a:majorFont>
+        <a:latin typeface="Aptos Display" panose="02110004020202020204"/>
+        <a:ea typeface=""/>
+        <a:cs typeface=""/>
+        <a:font script="Jpan" typeface="游ゴシック Light"/>
+        <a:font script="Hang" typeface="맑은 고딕"/>
+        <a:font script="Hans" typeface="等线 Light"/>
+        <a:font script="Hant" typeface="新細明體"/>
+        <a:font script="Arab" typeface="Times New Roman"/>
+        <a:font script="Hebr" typeface="Times New Roman"/>
+        <a:font script="Thai" typeface="Angsana New"/>
+        <a:font script="Ethi" typeface="Nyala"/>
+        <a:font script="Beng" typeface="Vrinda"/>
+        <a:font script="Gujr" typeface="Shruti"/>
+        <a:font script="Khmr" typeface="MoolBoran"/>
+        <a:font script="Knda" typeface="Tunga"/>
+        <a:font script="Guru" typeface="Raavi"/>
+        <a:font script="Cans" typeface="Euphemia"/>
+        <a:font script="Cher" typeface="Plantagenet Cherokee"/>
+        <a:font script="Yiii" typeface="Microsoft Yi Baiti"/>
+        <a:font script="Tibt" typeface="Microsoft Himalaya"/>
+        <a:font script="Thaa" typeface="MV Boli"/>
+        <a:font script="Deva" typeface="Mangal"/>
+        <a:font script="Telu" typeface="Gautami"/>
+        <a:font script="Taml" typeface="Latha"/>
+        <a:font script="Syrc" typeface="Estrangelo Edessa"/>
+        <a:font script="Orya" typeface="Kalinga"/>
+        <a:font script="Mlym" typeface="Kartika"/>
+        <a:font script="Laoo" typeface="DokChampa"/>
+        <a:font script="Sinh" typeface="Iskoola Pota"/>
+        <a:font script="Mong" typeface="Mongolian Baiti"/>
+        <a:font script="Viet" typeface="Times New Roman"/>
+        <a:font script="Uigh" typeface="Microsoft Uighur"/>
+        <a:font script="Geor" typeface="Sylfaen"/>
+        <a:font script="Armn" typeface="Arial"/>
+        <a:font script="Bugi" typeface="Leelawadee UI"/>
+        <a:font script="Bopo" typeface="Microsoft JhengHei"/>
+        <a:font script="Java" typeface="Javanese Text"/>
+        <a:font script="Lisu" typeface="Segoe UI"/>
+        <a:font script="Mymr" typeface="Myanmar Text"/>
+        <a:font script="Nkoo" typeface="Ebrima"/>
+        <a:font script="Olck" typeface="Nirmala UI"/>
+        <a:font script="Osma" typeface="Ebrima"/>
+        <a:font script="Phag" typeface="Phagspa"/>
+        <a:font script="Syrn" typeface="Estrangelo Edessa"/>
+        <a:font script="Syrj" typeface="Estrangelo Edessa"/>
+        <a:font script="Syre" typeface="Estrangelo Edessa"/>
+        <a:font script="Sora" typeface="Nirmala UI"/>
+        <a:font script="Tale" typeface="Microsoft Tai Le"/>
+        <a:font script="Talu" typeface="Microsoft New Tai Lue"/>
+        <a:font script="Tfng" typeface="Ebrima"/>
+      </a:majorFont>
+      <a:minorFont>
+        <a:latin typeface="Aptos" panose="02110004020202020204"/>
+        <a:ea typeface=""/>
+        <a:cs typeface=""/>
+        <a:font script="Jpan" typeface="游ゴシック"/>
+        <a:font script="Hang" typeface="맑은 고딕"/>
+        <a:font script="Hans" typeface="等线"/>
+        <a:font script="Hant" typeface="新細明體"/>
+        <a:font script="Arab" typeface="Arial"/>
+        <a:font script="Hebr" typeface="Arial"/>
+        <a:font script="Thai" typeface="Cordia New"/>
+        <a:font script="Ethi" typeface="Nyala"/>
+        <a:font script="Beng" typeface="Vrinda"/>
+        <a:font script="Gujr" typeface="Shruti"/>
+        <a:font script="Khmr" typeface="DaunPenh"/>
+        <a:font script="Knda" typeface="Tunga"/>
+        <a:font script="Guru" typeface="Raavi"/>
+        <a:font script="Cans" typeface="Euphemia"/>
+        <a:font script="Cher" typeface="Plantagenet Cherokee"/>
+        <a:font script="Yiii" typeface="Microsoft Yi Baiti"/>
+        <a:font script="Tibt" typeface="Microsoft Himalaya"/>
+        <a:font script="Thaa" typeface="MV Boli"/>
+        <a:font script="Deva" typeface="Mangal"/>
+        <a:font script="Telu" typeface="Gautami"/>
+        <a:font script="Taml" typeface="Latha"/>
+        <a:font script="Syrc" typeface="Estrangelo Edessa"/>
+        <a:font script="Orya" typeface="Kalinga"/>
+        <a:font script="Mlym" typeface="Kartika"/>
+        <a:font script="Laoo" typeface="DokChampa"/>
+        <a:font script="Sinh" typeface="Iskoola Pota"/>
+        <a:font script="Mong" typeface="Mongolian Baiti"/>
+        <a:font script="Viet" typeface="Arial"/>
+        <a:font script="Uigh" typeface="Microsoft Uighur"/>
+        <a:font script="Geor" typeface="Sylfaen"/>
+        <a:font script="Armn" typeface="Arial"/>
+        <a:font script="Bugi" typeface="Leelawadee UI"/>
+        <a:font script="Bopo" typeface="Microsoft JhengHei"/>
+        <a:font script="Java" typeface="Javanese Text"/>
+        <a:font script="Lisu" typeface="Segoe UI"/>
+        <a:font script="Mymr" typeface="Myanmar Text"/>
+        <a:font script="Nkoo" typeface="Ebrima"/>
+        <a:font script="Olck" typeface="Nirmala UI"/>
+        <a:font script="Osma" typeface="Ebrima"/>
+        <a:font script="Phag" typeface="Phagspa"/>
+        <a:font script="Syrn" typeface="Estrangelo Edessa"/>
+        <a:font script="Syrj" typeface="Estrangelo Edessa"/>
+        <a:font script="Syre" typeface="Estrangelo Edessa"/>
+        <a:font script="Sora" typeface="Nirmala UI"/>
+        <a:font script="Tale" typeface="Microsoft Tai Le"/>
+        <a:font script="Talu" typeface="Microsoft New Tai Lue"/>
+        <a:font script="Tfng" typeface="Ebrima"/>
+      </a:minorFont>
+    </a:fontScheme>
+    <a:fmtScheme name="Office">
+      <a:fillStyleLst>
+        <a:solidFill>
+          <a:schemeClr val="phClr"/>
+        </a:solidFill>
+        <a:gradFill rotWithShape="1">
+          <a:gsLst>
+            <a:gs pos="0">
+              <a:schemeClr val="phClr">
+                <a:lumMod val="110000"/>
+                <a:satMod val="105000"/>
+                <a:tint val="67000"/>
+              </a:schemeClr>
+            </a:gs>
+            <a:gs pos="50000">
+              <a:schemeClr val="phClr">
+                <a:lumMod val="105000"/>
+                <a:satMod val="103000"/>
+                <a:tint val="73000"/>
+              </a:schemeClr>
+            </a:gs>
+            <a:gs pos="100000">
+              <a:schemeClr val="phClr">
+                <a:lumMod val="105000"/>
+                <a:satMod val="109000"/>
+                <a:tint val="81000"/>
+              </a:schemeClr>
+            </a:gs>
+          </a:gsLst>
+          <a:lin ang="5400000" scaled="0"/>
+        </a:gradFill>
+        <a:gradFill rotWithShape="1">
+          <a:gsLst>
+            <a:gs pos="0">
+              <a:schemeClr val="phClr">
+                <a:satMod val="103000"/>
+                <a:lumMod val="102000"/>
+                <a:tint val="94000"/>
+              </a:schemeClr>
+            </a:gs>
+            <a:gs pos="50000">
+              <a:schemeClr val="phClr">
+                <a:satMod val="110000"/>
+                <a:lumMod val="100000"/>
+                <a:shade val="100000"/>
+              </a:schemeClr>
+            </a:gs>
+            <a:gs pos="100000">
+              <a:schemeClr val="phClr">
+                <a:lumMod val="99000"/>
+                <a:satMod val="120000"/>
+                <a:shade val="78000"/>
+              </a:schemeClr>
+            </a:gs>
+          </a:gsLst>
+          <a:lin ang="5400000" scaled="0"/>
+        </a:gradFill>
+      </a:fillStyleLst>
+      <a:lnStyleLst>
+        <a:ln w="12700" cap="flat" cmpd="sng" algn="ctr">
+          <a:solidFill>
+            <a:schemeClr val="phClr"/>
+          </a:solidFill>
+          <a:prstDash val="solid"/>
+          <a:miter lim="800000"/>
+        </a:ln>
+        <a:ln w="19050" cap="flat" cmpd="sng" algn="ctr">
+          <a:solidFill>
+            <a:schemeClr val="phClr"/>
+          </a:solidFill>
+          <a:prstDash val="solid"/>
+          <a:miter lim="800000"/>
+        </a:ln>
+        <a:ln w="25400" cap="flat" cmpd="sng" algn="ctr">
+          <a:solidFill>
+            <a:schemeClr val="phClr"/>
+          </a:solidFill>
+          <a:prstDash val="solid"/>
+          <a:miter lim="800000"/>
+        </a:ln>
+      </a:lnStyleLst>
+      <a:effectStyleLst>
+        <a:effectStyle>
+          <a:effectLst/>
+        </a:effectStyle>
+        <a:effectStyle>
+          <a:effectLst/>
+        </a:effectStyle>
+        <a:effectStyle>
+          <a:effectLst>
+            <a:outerShdw blurRad="57150" dist="19050" dir="5400000" algn="ctr" rotWithShape="0">
+              <a:srgbClr val="000000">
+                <a:alpha val="63000"/>
+              </a:srgbClr>
+            </a:outerShdw>
+          </a:effectLst>
+        </a:effectStyle>
+      </a:effectStyleLst>
+      <a:bgFillStyleLst>
+        <a:solidFill>
+          <a:schemeClr val="phClr"/>
+        </a:solidFill>
+        <a:solidFill>
+          <a:schemeClr val="phClr">
+            <a:tint val="95000"/>
+            <a:satMod val="170000"/>
+          </a:schemeClr>
+        </a:solidFill>
+        <a:gradFill rotWithShape="1">
+          <a:gsLst>
+            <a:gs pos="0">
+              <a:schemeClr val="phClr">
+                <a:tint val="93000"/>
+                <a:satMod val="150000"/>
+                <a:shade val="98000"/>
+                <a:lumMod val="102000"/>
+              </a:schemeClr>
+            </a:gs>
+            <a:gs pos="50000">
+              <a:schemeClr val="phClr">
+                <a:tint val="98000"/>
+                <a:satMod val="130000"/>
+                <a:shade val="90000"/>
+                <a:lumMod val="103000"/>
+              </a:schemeClr>
+            </a:gs>
+            <a:gs pos="100000">
+              <a:schemeClr val="phClr">
+                <a:shade val="63000"/>
+                <a:satMod val="120000"/>
+              </a:schemeClr>
+            </a:gs>
+          </a:gsLst>
+          <a:lin ang="5400000" scaled="0"/>
+        </a:gradFill>
+      </a:bgFillStyleLst>
+    </a:fmtScheme>
+  </a:themeElements>
+  <a:objectDefaults>
+    <a:lnDef>
+      <a:spPr/>
+      <a:bodyPr/>
+      <a:lstStyle/>
+      <a:style>
+        <a:lnRef idx="2">
+          <a:schemeClr val="accent1"/>
+        </a:lnRef>
+        <a:fillRef idx="0">
+          <a:schemeClr val="accent1"/>
+        </a:fillRef>
+        <a:effectRef idx="1">
+          <a:schemeClr val="accent1"/>
+        </a:effectRef>
+        <a:fontRef idx="minor">
+          <a:schemeClr val="tx1"/>
+        </a:fontRef>
+      </a:style>
+    </a:lnDef>
+  </a:objectDefaults>
+  <a:extraClrSchemeLst/>
+  <a:extLst>
+    <a:ext uri="{05A4C25C-085E-4340-85A3-A5531E510DB2}">
+      <thm15:themeFamily xmlns:thm15="http://schemas.microsoft.com/office/thememl/2012/main" name="Office Theme" id="{2E142A2C-CD16-42D6-873A-C26D2A0506FA}" vid="{1BDDFF52-6CD6-40A5-AB3C-68EB2F1E4D0A}"/>
+    </a:ext>
+  </a:extLst>
+</a:theme>
+</file>
+
+<file path=ppt/webextensions/taskpanes.xml><?xml version="1.0" encoding="utf-8"?>
+<wetp:taskpanes xmlns:wetp="http://schemas.microsoft.com/office/webextensions/taskpanes/2010/11">
+  <wetp:taskpane dockstate="right" visibility="0" width="350" row="0">
+    <wetp:webextensionref xmlns:r="http://schemas.openxmlformats.org/officeDocument/2006/relationships" r:id="rId1"/>
+  </wetp:taskpane>
+  <wetp:taskpane dockstate="right" visibility="0" width="350" row="1">
+    <wetp:webextensionref xmlns:r="http://schemas.openxmlformats.org/officeDocument/2006/relationships" r:id="rId2"/>
+  </wetp:taskpane>
+</wetp:taskpanes>
+</file>
+
+<file path=ppt/webextensions/webextension1.xml><?xml version="1.0" encoding="utf-8"?>
+<we:webextension xmlns:we="http://schemas.microsoft.com/office/webextensions/webextension/2010/11" id="{F3D1F06C-B1B1-4286-A4F5-CD3CB28D416D}">
+  <we:reference id="WA200007130" version="1.0.0.1" store="Omex" storeType="OMEX"/>
+  <we:alternateReferences>
+    <we:reference id="WA200007130" version="1.0.0.1" store="WA200007130" storeType="OMEX"/>
+  </we:alternateReferences>
+  <we:properties/>
+  <we:bindings/>
+  <we:snapshot xmlns:r="http://schemas.openxmlformats.org/officeDocument/2006/relationships"/>
+</we:webextension>
+</file>
+
+<file path=ppt/webextensions/webextension2.xml><?xml version="1.0" encoding="utf-8"?>
+<we:webextension xmlns:we="http://schemas.microsoft.com/office/webextensions/webextension/2010/11" id="{1142A0B8-316D-40C6-AFEE-307B9A856519}">
+  <we:reference id="WA200010001" version="1.0.0.1" store="Omex" storeType="OMEX"/>
+  <we:alternateReferences>
+    <we:reference id="WA200010001" version="1.0.0.1" store="WA200010001" storeType="OMEX"/>
+  </we:alternateReferences>
+  <we:properties>
+    <we:property name="claude.fileId" value="&quot;bbce7fc7-fc19-4a41-992f-7fa47e59c906&quot;"/>
+  </we:properties>
+  <we:bindings/>
+  <we:snapshot xmlns:r="http://schemas.openxmlformats.org/officeDocument/2006/relationships"/>
+</we:webextension>
 </file>